--- a/sprint48_slide.pptx
+++ b/sprint48_slide.pptx
@@ -3097,7 +3097,7 @@
         <p:spPr>
           <a:xfrm>
             <a:off x="0" y="0"/>
-            <a:ext cx="12188952" cy="658368"/>
+            <a:ext cx="12188952" cy="621792"/>
           </a:xfrm>
           <a:prstGeom prst="rect">
             <a:avLst/>
@@ -3140,7 +3140,7 @@
         <p:spPr>
           <a:xfrm>
             <a:off x="164592" y="36576"/>
-            <a:ext cx="8229600" cy="292608"/>
+            <a:ext cx="8686800" cy="292608"/>
           </a:xfrm>
           <a:prstGeom prst="rect">
             <a:avLst/>
@@ -3174,8 +3174,8 @@
         </p:nvSpPr>
         <p:spPr>
           <a:xfrm>
-            <a:off x="164592" y="329184"/>
-            <a:ext cx="6400800" cy="201168"/>
+            <a:off x="164592" y="338328"/>
+            <a:ext cx="7315200" cy="182880"/>
           </a:xfrm>
           <a:prstGeom prst="rect">
             <a:avLst/>
@@ -3190,7 +3190,7 @@
           <a:p>
             <a:pPr algn="l"/>
             <a:r>
-              <a:rPr sz="800" b="0" i="0">
+              <a:rPr sz="750" b="0" i="0">
                 <a:solidFill>
                   <a:srgbClr val="BBDEFB"/>
                 </a:solidFill>
@@ -3209,8 +3209,8 @@
         </p:nvSpPr>
         <p:spPr>
           <a:xfrm>
-            <a:off x="9692640" y="164592"/>
-            <a:ext cx="2331720" cy="329184"/>
+            <a:off x="9692640" y="155448"/>
+            <a:ext cx="2331720" cy="320040"/>
           </a:xfrm>
           <a:prstGeom prst="rect">
             <a:avLst/>
@@ -3254,8 +3254,8 @@
         </p:nvSpPr>
         <p:spPr>
           <a:xfrm>
-            <a:off x="9738360" y="173736"/>
-            <a:ext cx="2240280" cy="310896"/>
+            <a:off x="9710928" y="164592"/>
+            <a:ext cx="2286000" cy="292608"/>
           </a:xfrm>
           <a:prstGeom prst="rect">
             <a:avLst/>
@@ -3270,13 +3270,13 @@
           <a:p>
             <a:pPr algn="ctr"/>
             <a:r>
-              <a:rPr sz="800" b="1" i="0">
+              <a:rPr sz="750" b="1" i="0">
                 <a:solidFill>
                   <a:srgbClr val="FFFFFF"/>
                 </a:solidFill>
                 <a:latin typeface="Segoe UI"/>
               </a:rPr>
-              <a:t>GD Sprint 48  ·  Jun 23 – Jul 6, 2026</a:t>
+              <a:t>GD Sprint 48  ·  Jun 23–Jul 6, 2026</a:t>
             </a:r>
           </a:p>
         </p:txBody>
@@ -3289,14 +3289,14 @@
         </p:nvSpPr>
         <p:spPr>
           <a:xfrm>
-            <a:off x="0" y="658368"/>
-            <a:ext cx="12188952" cy="5907024"/>
-          </a:xfrm>
-          <a:prstGeom prst="rect">
-            <a:avLst/>
-          </a:prstGeom>
-          <a:solidFill>
-            <a:srgbClr val="F8F9FB"/>
+            <a:off x="0" y="6583680"/>
+            <a:ext cx="12188952" cy="274320"/>
+          </a:xfrm>
+          <a:prstGeom prst="rect">
+            <a:avLst/>
+          </a:prstGeom>
+          <a:solidFill>
+            <a:srgbClr val="F0F2F4"/>
           </a:solidFill>
           <a:ln>
             <a:noFill/>
@@ -3332,14 +3332,14 @@
         </p:nvSpPr>
         <p:spPr>
           <a:xfrm>
-            <a:off x="0" y="6565392"/>
-            <a:ext cx="12188952" cy="292608"/>
-          </a:xfrm>
-          <a:prstGeom prst="rect">
-            <a:avLst/>
-          </a:prstGeom>
-          <a:solidFill>
-            <a:srgbClr val="ECEFF1"/>
+            <a:off x="0" y="6583680"/>
+            <a:ext cx="12188952" cy="10972"/>
+          </a:xfrm>
+          <a:prstGeom prst="rect">
+            <a:avLst/>
+          </a:prstGeom>
+          <a:solidFill>
+            <a:srgbClr val="D0D5DD"/>
           </a:solidFill>
           <a:ln>
             <a:noFill/>
@@ -3375,8 +3375,8 @@
         </p:nvSpPr>
         <p:spPr>
           <a:xfrm>
-            <a:off x="164592" y="6620255"/>
-            <a:ext cx="6858000" cy="201168"/>
+            <a:off x="164592" y="6638544"/>
+            <a:ext cx="6858000" cy="182880"/>
           </a:xfrm>
           <a:prstGeom prst="rect">
             <a:avLst/>
@@ -3391,13 +3391,13 @@
           <a:p>
             <a:pPr algn="l"/>
             <a:r>
-              <a:rPr sz="700" b="0" i="0">
+              <a:rPr sz="650" b="0" i="0">
                 <a:solidFill>
                   <a:srgbClr val="78909C"/>
                 </a:solidFill>
                 <a:latin typeface="Segoe UI"/>
               </a:rPr>
-              <a:t>Digital Health Platform  ·  GD Core Team  ·  GD Sprint 48  ·  Jun 23 – Jul 6, 2026</a:t>
+              <a:t>Digital Health Platform  ·  GD Core Team  ·  Sprint 48  ·  Jun 23 – Jul 6, 2026</a:t>
             </a:r>
           </a:p>
         </p:txBody>
@@ -3410,8 +3410,8 @@
         </p:nvSpPr>
         <p:spPr>
           <a:xfrm>
-            <a:off x="7772400" y="6620255"/>
-            <a:ext cx="4251960" cy="201168"/>
+            <a:off x="7132320" y="6638544"/>
+            <a:ext cx="4892040" cy="182880"/>
           </a:xfrm>
           <a:prstGeom prst="rect">
             <a:avLst/>
@@ -3426,13 +3426,13 @@
           <a:p>
             <a:pPr algn="r"/>
             <a:r>
-              <a:rPr sz="700" b="0" i="0">
+              <a:rPr sz="650" b="0" i="0">
                 <a:solidFill>
                   <a:srgbClr val="78909C"/>
                 </a:solidFill>
                 <a:latin typeface="Segoe UI"/>
               </a:rPr>
-              <a:t>✓ 9 Completed     ⚙ 4 In QA     ⟳ 22 In Progress     ◷ 24 Planned</a:t>
+              <a:t>✓ 9 Completed    ⚙ 4 In QA    ⟳ 22 In Progress    ◷ 24 Planned</a:t>
             </a:r>
           </a:p>
         </p:txBody>
@@ -3445,14 +3445,14 @@
         </p:nvSpPr>
         <p:spPr>
           <a:xfrm>
-            <a:off x="3042666" y="658368"/>
-            <a:ext cx="9144" cy="5907024"/>
-          </a:xfrm>
-          <a:prstGeom prst="rect">
-            <a:avLst/>
-          </a:prstGeom>
-          <a:solidFill>
-            <a:srgbClr val="E0E4EA"/>
+            <a:off x="0" y="621792"/>
+            <a:ext cx="12188952" cy="5961888"/>
+          </a:xfrm>
+          <a:prstGeom prst="rect">
+            <a:avLst/>
+          </a:prstGeom>
+          <a:solidFill>
+            <a:srgbClr val="FFFFFF"/>
           </a:solidFill>
           <a:ln>
             <a:noFill/>
@@ -3482,60 +3482,23 @@
       </p:sp>
       <p:sp>
         <p:nvSpPr>
-          <p:cNvPr id="12" name="TextBox 11"/>
-          <p:cNvSpPr txBox="1"/>
-          <p:nvPr/>
-        </p:nvSpPr>
-        <p:spPr>
-          <a:xfrm>
-            <a:off x="64008" y="713232"/>
-            <a:ext cx="2919222" cy="201168"/>
-          </a:xfrm>
-          <a:prstGeom prst="rect">
-            <a:avLst/>
-          </a:prstGeom>
-          <a:noFill/>
-        </p:spPr>
-        <p:txBody>
-          <a:bodyPr wrap="square">
-            <a:spAutoFit/>
-          </a:bodyPr>
-          <a:lstStyle/>
-          <a:p>
-            <a:pPr algn="l"/>
-            <a:r>
-              <a:rPr sz="700" b="1" i="0">
-                <a:solidFill>
-                  <a:srgbClr val="546E7A"/>
-                </a:solidFill>
-                <a:latin typeface="Segoe UI"/>
-              </a:rPr>
-              <a:t>SDK Manager · Navigation &amp; Branding</a:t>
-            </a:r>
-          </a:p>
-        </p:txBody>
-      </p:sp>
-      <p:sp>
-        <p:nvSpPr>
-          <p:cNvPr id="13" name="Rectangle 12"/>
+          <p:cNvPr id="12" name="Rectangle 11"/>
           <p:cNvSpPr/>
           <p:nvPr/>
         </p:nvSpPr>
         <p:spPr>
           <a:xfrm>
-            <a:off x="64008" y="950976"/>
-            <a:ext cx="2919222" cy="1613916"/>
-          </a:xfrm>
-          <a:prstGeom prst="rect">
-            <a:avLst/>
-          </a:prstGeom>
-          <a:solidFill>
-            <a:srgbClr val="FFFFFF"/>
-          </a:solidFill>
-          <a:ln w="6350">
-            <a:solidFill>
-              <a:srgbClr val="E0E4EA"/>
-            </a:solidFill>
+            <a:off x="3039922" y="621792"/>
+            <a:ext cx="14630" cy="5961888"/>
+          </a:xfrm>
+          <a:prstGeom prst="rect">
+            <a:avLst/>
+          </a:prstGeom>
+          <a:solidFill>
+            <a:srgbClr val="CFD8DC"/>
+          </a:solidFill>
+          <a:ln>
+            <a:noFill/>
           </a:ln>
         </p:spPr>
         <p:style>
@@ -3562,20 +3525,20 @@
       </p:sp>
       <p:sp>
         <p:nvSpPr>
-          <p:cNvPr id="14" name="Rectangle 13"/>
+          <p:cNvPr id="13" name="Rectangle 12"/>
           <p:cNvSpPr/>
           <p:nvPr/>
         </p:nvSpPr>
         <p:spPr>
           <a:xfrm>
-            <a:off x="64008" y="950976"/>
-            <a:ext cx="2919222" cy="192024"/>
-          </a:xfrm>
-          <a:prstGeom prst="rect">
-            <a:avLst/>
-          </a:prstGeom>
-          <a:solidFill>
-            <a:srgbClr val="1565C0"/>
+            <a:off x="6087160" y="621792"/>
+            <a:ext cx="14630" cy="5961888"/>
+          </a:xfrm>
+          <a:prstGeom prst="rect">
+            <a:avLst/>
+          </a:prstGeom>
+          <a:solidFill>
+            <a:srgbClr val="CFD8DC"/>
           </a:solidFill>
           <a:ln>
             <a:noFill/>
@@ -3605,60 +3568,23 @@
       </p:sp>
       <p:sp>
         <p:nvSpPr>
-          <p:cNvPr id="15" name="TextBox 14"/>
-          <p:cNvSpPr txBox="1"/>
-          <p:nvPr/>
-        </p:nvSpPr>
-        <p:spPr>
-          <a:xfrm>
-            <a:off x="128016" y="978408"/>
-            <a:ext cx="2827782" cy="155448"/>
-          </a:xfrm>
-          <a:prstGeom prst="rect">
-            <a:avLst/>
-          </a:prstGeom>
-          <a:noFill/>
-        </p:spPr>
-        <p:txBody>
-          <a:bodyPr wrap="square">
-            <a:spAutoFit/>
-          </a:bodyPr>
-          <a:lstStyle/>
-          <a:p>
-            <a:pPr algn="l"/>
-            <a:r>
-              <a:rPr sz="800" b="1" i="0">
-                <a:solidFill>
-                  <a:srgbClr val="FFFFFF"/>
-                </a:solidFill>
-                <a:latin typeface="Segoe UI"/>
-              </a:rPr>
-              <a:t>Configurable Journey Navigation</a:t>
-            </a:r>
-          </a:p>
-        </p:txBody>
-      </p:sp>
-      <p:sp>
-        <p:nvSpPr>
-          <p:cNvPr id="16" name="Rectangle 15"/>
+          <p:cNvPr id="14" name="Rectangle 13"/>
           <p:cNvSpPr/>
           <p:nvPr/>
         </p:nvSpPr>
         <p:spPr>
           <a:xfrm>
-            <a:off x="118872" y="1179576"/>
-            <a:ext cx="749808" cy="141732"/>
-          </a:xfrm>
-          <a:prstGeom prst="rect">
-            <a:avLst/>
-          </a:prstGeom>
-          <a:solidFill>
-            <a:srgbClr val="E8F5E9"/>
-          </a:solidFill>
-          <a:ln w="6350">
-            <a:solidFill>
-              <a:srgbClr val="E8F5E9"/>
-            </a:solidFill>
+            <a:off x="9134398" y="621792"/>
+            <a:ext cx="14630" cy="5961888"/>
+          </a:xfrm>
+          <a:prstGeom prst="rect">
+            <a:avLst/>
+          </a:prstGeom>
+          <a:solidFill>
+            <a:srgbClr val="CFD8DC"/>
+          </a:solidFill>
+          <a:ln>
+            <a:noFill/>
           </a:ln>
         </p:spPr>
         <p:style>
@@ -3685,14 +3611,14 @@
       </p:sp>
       <p:sp>
         <p:nvSpPr>
-          <p:cNvPr id="17" name="TextBox 16"/>
+          <p:cNvPr id="15" name="TextBox 14"/>
           <p:cNvSpPr txBox="1"/>
           <p:nvPr/>
         </p:nvSpPr>
         <p:spPr>
           <a:xfrm>
-            <a:off x="128016" y="1188720"/>
-            <a:ext cx="731520" cy="128016"/>
+            <a:off x="82296" y="676656"/>
+            <a:ext cx="2882646" cy="182880"/>
           </a:xfrm>
           <a:prstGeom prst="rect">
             <a:avLst/>
@@ -3707,33 +3633,33 @@
           <a:p>
             <a:pPr algn="l"/>
             <a:r>
-              <a:rPr sz="650" b="1" i="0">
-                <a:solidFill>
-                  <a:srgbClr val="1B5E20"/>
+              <a:rPr sz="700" b="1" i="0">
+                <a:solidFill>
+                  <a:srgbClr val="37474F"/>
                 </a:solidFill>
                 <a:latin typeface="Segoe UI"/>
               </a:rPr>
-              <a:t>✓ Completed</a:t>
-            </a:r>
-          </a:p>
-        </p:txBody>
-      </p:sp>
-      <p:sp>
-        <p:nvSpPr>
-          <p:cNvPr id="18" name="Rectangle 17"/>
+              <a:t>SDK Manager · Navigation &amp; Branding</a:t>
+            </a:r>
+          </a:p>
+        </p:txBody>
+      </p:sp>
+      <p:sp>
+        <p:nvSpPr>
+          <p:cNvPr id="16" name="Rectangle 15"/>
           <p:cNvSpPr/>
           <p:nvPr/>
         </p:nvSpPr>
         <p:spPr>
           <a:xfrm>
-            <a:off x="173736" y="1389888"/>
-            <a:ext cx="36576" cy="36576"/>
-          </a:xfrm>
-          <a:prstGeom prst="rect">
-            <a:avLst/>
-          </a:prstGeom>
-          <a:solidFill>
-            <a:srgbClr val="90A4AE"/>
+            <a:off x="82296" y="868680"/>
+            <a:ext cx="2882646" cy="10972"/>
+          </a:xfrm>
+          <a:prstGeom prst="rect">
+            <a:avLst/>
+          </a:prstGeom>
+          <a:solidFill>
+            <a:srgbClr val="D0D5DD"/>
           </a:solidFill>
           <a:ln>
             <a:noFill/>
@@ -3763,58 +3689,25 @@
       </p:sp>
       <p:sp>
         <p:nvSpPr>
-          <p:cNvPr id="19" name="TextBox 18"/>
-          <p:cNvSpPr txBox="1"/>
-          <p:nvPr/>
-        </p:nvSpPr>
-        <p:spPr>
-          <a:xfrm>
-            <a:off x="237744" y="1339596"/>
-            <a:ext cx="2681478" cy="150875"/>
-          </a:xfrm>
-          <a:prstGeom prst="rect">
-            <a:avLst/>
-          </a:prstGeom>
-          <a:noFill/>
-        </p:spPr>
-        <p:txBody>
-          <a:bodyPr wrap="square">
-            <a:spAutoFit/>
-          </a:bodyPr>
-          <a:lstStyle/>
-          <a:p>
-            <a:pPr algn="l"/>
-            <a:r>
-              <a:rPr sz="750" b="0" i="0">
-                <a:solidFill>
-                  <a:srgbClr val="333333"/>
-                </a:solidFill>
-                <a:latin typeface="Segoe UI"/>
-              </a:rPr>
-              <a:t>Navigation Rules save validation delivered</a:t>
-            </a:r>
-          </a:p>
-        </p:txBody>
-      </p:sp>
-      <p:sp>
-        <p:nvSpPr>
-          <p:cNvPr id="20" name="Rectangle 19"/>
+          <p:cNvPr id="17" name="Rectangle 16"/>
           <p:cNvSpPr/>
           <p:nvPr/>
         </p:nvSpPr>
         <p:spPr>
           <a:xfrm>
-            <a:off x="173736" y="1522476"/>
-            <a:ext cx="36576" cy="36576"/>
-          </a:xfrm>
-          <a:prstGeom prst="rect">
-            <a:avLst/>
-          </a:prstGeom>
-          <a:solidFill>
-            <a:srgbClr val="90A4AE"/>
-          </a:solidFill>
-          <a:ln>
-            <a:noFill/>
+            <a:off x="82296" y="923544"/>
+            <a:ext cx="2882646" cy="1653235"/>
+          </a:xfrm>
+          <a:prstGeom prst="rect">
+            <a:avLst/>
+          </a:prstGeom>
+          <a:solidFill>
+            <a:srgbClr val="FFFFFF"/>
+          </a:solidFill>
+          <a:ln w="6350">
+            <a:solidFill>
+              <a:srgbClr val="D0D5DD"/>
+            </a:solidFill>
           </a:ln>
         </p:spPr>
         <p:style>
@@ -3841,60 +3734,23 @@
       </p:sp>
       <p:sp>
         <p:nvSpPr>
-          <p:cNvPr id="21" name="TextBox 20"/>
-          <p:cNvSpPr txBox="1"/>
-          <p:nvPr/>
-        </p:nvSpPr>
-        <p:spPr>
-          <a:xfrm>
-            <a:off x="237744" y="1472184"/>
-            <a:ext cx="2681478" cy="150875"/>
-          </a:xfrm>
-          <a:prstGeom prst="rect">
-            <a:avLst/>
-          </a:prstGeom>
-          <a:noFill/>
-        </p:spPr>
-        <p:txBody>
-          <a:bodyPr wrap="square">
-            <a:spAutoFit/>
-          </a:bodyPr>
-          <a:lstStyle/>
-          <a:p>
-            <a:pPr algn="l"/>
-            <a:r>
-              <a:rPr sz="750" b="0" i="0">
-                <a:solidFill>
-                  <a:srgbClr val="333333"/>
-                </a:solidFill>
-                <a:latin typeface="Segoe UI"/>
-              </a:rPr>
-              <a:t>Navigation Rules &amp; View Conditions schema completed</a:t>
-            </a:r>
-          </a:p>
-        </p:txBody>
-      </p:sp>
-      <p:sp>
-        <p:nvSpPr>
-          <p:cNvPr id="22" name="Rectangle 21"/>
+          <p:cNvPr id="18" name="Rectangle 17"/>
           <p:cNvSpPr/>
           <p:nvPr/>
         </p:nvSpPr>
         <p:spPr>
           <a:xfrm>
-            <a:off x="118872" y="1641348"/>
-            <a:ext cx="749808" cy="141732"/>
-          </a:xfrm>
-          <a:prstGeom prst="rect">
-            <a:avLst/>
-          </a:prstGeom>
-          <a:solidFill>
-            <a:srgbClr val="E3F2FD"/>
-          </a:solidFill>
-          <a:ln w="6350">
-            <a:solidFill>
-              <a:srgbClr val="E3F2FD"/>
-            </a:solidFill>
+            <a:off x="82296" y="923544"/>
+            <a:ext cx="36576" cy="1653235"/>
+          </a:xfrm>
+          <a:prstGeom prst="rect">
+            <a:avLst/>
+          </a:prstGeom>
+          <a:solidFill>
+            <a:srgbClr val="1565C0"/>
+          </a:solidFill>
+          <a:ln>
+            <a:noFill/>
           </a:ln>
         </p:spPr>
         <p:style>
@@ -3921,14 +3777,14 @@
       </p:sp>
       <p:sp>
         <p:nvSpPr>
-          <p:cNvPr id="23" name="TextBox 22"/>
+          <p:cNvPr id="19" name="TextBox 18"/>
           <p:cNvSpPr txBox="1"/>
           <p:nvPr/>
         </p:nvSpPr>
         <p:spPr>
           <a:xfrm>
-            <a:off x="128016" y="1650492"/>
-            <a:ext cx="731520" cy="128016"/>
+            <a:off x="173736" y="941832"/>
+            <a:ext cx="2754629" cy="178308"/>
           </a:xfrm>
           <a:prstGeom prst="rect">
             <a:avLst/>
@@ -3943,33 +3799,33 @@
           <a:p>
             <a:pPr algn="l"/>
             <a:r>
-              <a:rPr sz="650" b="1" i="0">
+              <a:rPr sz="850" b="1" i="0">
                 <a:solidFill>
                   <a:srgbClr val="0D47A1"/>
                 </a:solidFill>
                 <a:latin typeface="Segoe UI"/>
               </a:rPr>
-              <a:t>⟳ In Progress</a:t>
-            </a:r>
-          </a:p>
-        </p:txBody>
-      </p:sp>
-      <p:sp>
-        <p:nvSpPr>
-          <p:cNvPr id="24" name="Rectangle 23"/>
+              <a:t>Configurable Journey Navigation</a:t>
+            </a:r>
+          </a:p>
+        </p:txBody>
+      </p:sp>
+      <p:sp>
+        <p:nvSpPr>
+          <p:cNvPr id="20" name="Rectangle 19"/>
           <p:cNvSpPr/>
           <p:nvPr/>
         </p:nvSpPr>
         <p:spPr>
           <a:xfrm>
-            <a:off x="173736" y="1851660"/>
-            <a:ext cx="36576" cy="36576"/>
-          </a:xfrm>
-          <a:prstGeom prst="rect">
-            <a:avLst/>
-          </a:prstGeom>
-          <a:solidFill>
-            <a:srgbClr val="90A4AE"/>
+            <a:off x="173736" y="1110996"/>
+            <a:ext cx="2754629" cy="7315"/>
+          </a:xfrm>
+          <a:prstGeom prst="rect">
+            <a:avLst/>
+          </a:prstGeom>
+          <a:solidFill>
+            <a:srgbClr val="D0D5DD"/>
           </a:solidFill>
           <a:ln>
             <a:noFill/>
@@ -3999,14 +3855,14 @@
       </p:sp>
       <p:sp>
         <p:nvSpPr>
-          <p:cNvPr id="25" name="TextBox 24"/>
+          <p:cNvPr id="21" name="TextBox 20"/>
           <p:cNvSpPr txBox="1"/>
           <p:nvPr/>
         </p:nvSpPr>
         <p:spPr>
           <a:xfrm>
-            <a:off x="237744" y="1801368"/>
-            <a:ext cx="2681478" cy="150875"/>
+            <a:off x="192024" y="1138428"/>
+            <a:ext cx="2718053" cy="132588"/>
           </a:xfrm>
           <a:prstGeom prst="rect">
             <a:avLst/>
@@ -4021,33 +3877,33 @@
           <a:p>
             <a:pPr algn="l"/>
             <a:r>
-              <a:rPr sz="750" b="0" i="0">
-                <a:solidFill>
-                  <a:srgbClr val="333333"/>
+              <a:rPr sz="700" b="1" i="0">
+                <a:solidFill>
+                  <a:srgbClr val="37474F"/>
                 </a:solidFill>
                 <a:latin typeface="Segoe UI"/>
               </a:rPr>
-              <a:t>UX design for navigation rules configuration in SDK Manager</a:t>
-            </a:r>
-          </a:p>
-        </p:txBody>
-      </p:sp>
-      <p:sp>
-        <p:nvSpPr>
-          <p:cNvPr id="26" name="Rectangle 25"/>
+              <a:t>COMPLETED</a:t>
+            </a:r>
+          </a:p>
+        </p:txBody>
+      </p:sp>
+      <p:sp>
+        <p:nvSpPr>
+          <p:cNvPr id="22" name="Rectangle 21"/>
           <p:cNvSpPr/>
           <p:nvPr/>
         </p:nvSpPr>
         <p:spPr>
           <a:xfrm>
-            <a:off x="173736" y="1984248"/>
-            <a:ext cx="36576" cy="36576"/>
-          </a:xfrm>
-          <a:prstGeom prst="rect">
-            <a:avLst/>
-          </a:prstGeom>
-          <a:solidFill>
-            <a:srgbClr val="90A4AE"/>
+            <a:off x="246888" y="1339596"/>
+            <a:ext cx="29260" cy="29260"/>
+          </a:xfrm>
+          <a:prstGeom prst="rect">
+            <a:avLst/>
+          </a:prstGeom>
+          <a:solidFill>
+            <a:srgbClr val="D0D5DD"/>
           </a:solidFill>
           <a:ln>
             <a:noFill/>
@@ -4077,14 +3933,14 @@
       </p:sp>
       <p:sp>
         <p:nvSpPr>
-          <p:cNvPr id="27" name="TextBox 26"/>
+          <p:cNvPr id="23" name="TextBox 22"/>
           <p:cNvSpPr txBox="1"/>
           <p:nvPr/>
         </p:nvSpPr>
         <p:spPr>
           <a:xfrm>
-            <a:off x="237744" y="1933956"/>
-            <a:ext cx="2681478" cy="150875"/>
+            <a:off x="310896" y="1289304"/>
+            <a:ext cx="2590038" cy="153619"/>
           </a:xfrm>
           <a:prstGeom prst="rect">
             <a:avLst/>
@@ -4101,36 +3957,34 @@
             <a:r>
               <a:rPr sz="750" b="0" i="0">
                 <a:solidFill>
-                  <a:srgbClr val="333333"/>
+                  <a:srgbClr val="444444"/>
                 </a:solidFill>
                 <a:latin typeface="Segoe UI"/>
               </a:rPr>
-              <a:t>Screen lifecycle actions in Screen Builder (frontend)</a:t>
-            </a:r>
-          </a:p>
-        </p:txBody>
-      </p:sp>
-      <p:sp>
-        <p:nvSpPr>
-          <p:cNvPr id="28" name="Rectangle 27"/>
+              <a:t>Navigation Rules save validation delivered</a:t>
+            </a:r>
+          </a:p>
+        </p:txBody>
+      </p:sp>
+      <p:sp>
+        <p:nvSpPr>
+          <p:cNvPr id="24" name="Rectangle 23"/>
           <p:cNvSpPr/>
           <p:nvPr/>
         </p:nvSpPr>
         <p:spPr>
           <a:xfrm>
-            <a:off x="118872" y="2103120"/>
-            <a:ext cx="749808" cy="141732"/>
-          </a:xfrm>
-          <a:prstGeom prst="rect">
-            <a:avLst/>
-          </a:prstGeom>
-          <a:solidFill>
-            <a:srgbClr val="F3E5F5"/>
-          </a:solidFill>
-          <a:ln w="6350">
-            <a:solidFill>
-              <a:srgbClr val="F3E5F5"/>
-            </a:solidFill>
+            <a:off x="246888" y="1474927"/>
+            <a:ext cx="29260" cy="29260"/>
+          </a:xfrm>
+          <a:prstGeom prst="rect">
+            <a:avLst/>
+          </a:prstGeom>
+          <a:solidFill>
+            <a:srgbClr val="D0D5DD"/>
+          </a:solidFill>
+          <a:ln>
+            <a:noFill/>
           </a:ln>
         </p:spPr>
         <p:style>
@@ -4157,14 +4011,14 @@
       </p:sp>
       <p:sp>
         <p:nvSpPr>
-          <p:cNvPr id="29" name="TextBox 28"/>
+          <p:cNvPr id="25" name="TextBox 24"/>
           <p:cNvSpPr txBox="1"/>
           <p:nvPr/>
         </p:nvSpPr>
         <p:spPr>
           <a:xfrm>
-            <a:off x="128016" y="2112264"/>
-            <a:ext cx="731520" cy="128016"/>
+            <a:off x="310896" y="1424635"/>
+            <a:ext cx="2590038" cy="153619"/>
           </a:xfrm>
           <a:prstGeom prst="rect">
             <a:avLst/>
@@ -4179,33 +4033,68 @@
           <a:p>
             <a:pPr algn="l"/>
             <a:r>
-              <a:rPr sz="650" b="1" i="0">
-                <a:solidFill>
-                  <a:srgbClr val="4A148C"/>
+              <a:rPr sz="750" b="0" i="0">
+                <a:solidFill>
+                  <a:srgbClr val="444444"/>
                 </a:solidFill>
                 <a:latin typeface="Segoe UI"/>
               </a:rPr>
-              <a:t>◷ Planned</a:t>
-            </a:r>
-          </a:p>
-        </p:txBody>
-      </p:sp>
-      <p:sp>
-        <p:nvSpPr>
-          <p:cNvPr id="30" name="Rectangle 29"/>
+              <a:t>Navigation Rules &amp; View Conditions schema completed</a:t>
+            </a:r>
+          </a:p>
+        </p:txBody>
+      </p:sp>
+      <p:sp>
+        <p:nvSpPr>
+          <p:cNvPr id="26" name="TextBox 25"/>
+          <p:cNvSpPr txBox="1"/>
+          <p:nvPr/>
+        </p:nvSpPr>
+        <p:spPr>
+          <a:xfrm>
+            <a:off x="192024" y="1596542"/>
+            <a:ext cx="2718053" cy="132588"/>
+          </a:xfrm>
+          <a:prstGeom prst="rect">
+            <a:avLst/>
+          </a:prstGeom>
+          <a:noFill/>
+        </p:spPr>
+        <p:txBody>
+          <a:bodyPr wrap="square">
+            <a:spAutoFit/>
+          </a:bodyPr>
+          <a:lstStyle/>
+          <a:p>
+            <a:pPr algn="l"/>
+            <a:r>
+              <a:rPr sz="700" b="1" i="0">
+                <a:solidFill>
+                  <a:srgbClr val="37474F"/>
+                </a:solidFill>
+                <a:latin typeface="Segoe UI"/>
+              </a:rPr>
+              <a:t>IN PROGRESS</a:t>
+            </a:r>
+          </a:p>
+        </p:txBody>
+      </p:sp>
+      <p:sp>
+        <p:nvSpPr>
+          <p:cNvPr id="27" name="Rectangle 26"/>
           <p:cNvSpPr/>
           <p:nvPr/>
         </p:nvSpPr>
         <p:spPr>
           <a:xfrm>
-            <a:off x="173736" y="2313432"/>
-            <a:ext cx="36576" cy="36576"/>
-          </a:xfrm>
-          <a:prstGeom prst="rect">
-            <a:avLst/>
-          </a:prstGeom>
-          <a:solidFill>
-            <a:srgbClr val="90A4AE"/>
+            <a:off x="246888" y="1797710"/>
+            <a:ext cx="29260" cy="29260"/>
+          </a:xfrm>
+          <a:prstGeom prst="rect">
+            <a:avLst/>
+          </a:prstGeom>
+          <a:solidFill>
+            <a:srgbClr val="D0D5DD"/>
           </a:solidFill>
           <a:ln>
             <a:noFill/>
@@ -4235,14 +4124,14 @@
       </p:sp>
       <p:sp>
         <p:nvSpPr>
-          <p:cNvPr id="31" name="TextBox 30"/>
+          <p:cNvPr id="28" name="TextBox 27"/>
           <p:cNvSpPr txBox="1"/>
           <p:nvPr/>
         </p:nvSpPr>
         <p:spPr>
           <a:xfrm>
-            <a:off x="237744" y="2263140"/>
-            <a:ext cx="2681478" cy="150875"/>
+            <a:off x="310896" y="1747418"/>
+            <a:ext cx="2590038" cy="153619"/>
           </a:xfrm>
           <a:prstGeom prst="rect">
             <a:avLst/>
@@ -4259,31 +4148,31 @@
             <a:r>
               <a:rPr sz="750" b="0" i="0">
                 <a:solidFill>
-                  <a:srgbClr val="333333"/>
+                  <a:srgbClr val="444444"/>
                 </a:solidFill>
                 <a:latin typeface="Segoe UI"/>
               </a:rPr>
-              <a:t>Screen lifecycle actions execution in SDK runtime</a:t>
-            </a:r>
-          </a:p>
-        </p:txBody>
-      </p:sp>
-      <p:sp>
-        <p:nvSpPr>
-          <p:cNvPr id="32" name="Rectangle 31"/>
+              <a:t>UX design for navigation rules in SDK Manager</a:t>
+            </a:r>
+          </a:p>
+        </p:txBody>
+      </p:sp>
+      <p:sp>
+        <p:nvSpPr>
+          <p:cNvPr id="29" name="Rectangle 28"/>
           <p:cNvSpPr/>
           <p:nvPr/>
         </p:nvSpPr>
         <p:spPr>
           <a:xfrm>
-            <a:off x="173736" y="2446020"/>
-            <a:ext cx="36576" cy="36576"/>
-          </a:xfrm>
-          <a:prstGeom prst="rect">
-            <a:avLst/>
-          </a:prstGeom>
-          <a:solidFill>
-            <a:srgbClr val="90A4AE"/>
+            <a:off x="246888" y="1933041"/>
+            <a:ext cx="29260" cy="29260"/>
+          </a:xfrm>
+          <a:prstGeom prst="rect">
+            <a:avLst/>
+          </a:prstGeom>
+          <a:solidFill>
+            <a:srgbClr val="D0D5DD"/>
           </a:solidFill>
           <a:ln>
             <a:noFill/>
@@ -4313,14 +4202,14 @@
       </p:sp>
       <p:sp>
         <p:nvSpPr>
-          <p:cNvPr id="33" name="TextBox 32"/>
+          <p:cNvPr id="30" name="TextBox 29"/>
           <p:cNvSpPr txBox="1"/>
           <p:nvPr/>
         </p:nvSpPr>
         <p:spPr>
           <a:xfrm>
-            <a:off x="237744" y="2395728"/>
-            <a:ext cx="2681478" cy="150875"/>
+            <a:off x="310896" y="1882749"/>
+            <a:ext cx="2590038" cy="153619"/>
           </a:xfrm>
           <a:prstGeom prst="rect">
             <a:avLst/>
@@ -4337,36 +4226,69 @@
             <a:r>
               <a:rPr sz="750" b="0" i="0">
                 <a:solidFill>
-                  <a:srgbClr val="333333"/>
+                  <a:srgbClr val="444444"/>
                 </a:solidFill>
                 <a:latin typeface="Segoe UI"/>
               </a:rPr>
-              <a:t>Idempotent outcome persistence for lifecycle actions</a:t>
-            </a:r>
-          </a:p>
-        </p:txBody>
-      </p:sp>
-      <p:sp>
-        <p:nvSpPr>
-          <p:cNvPr id="34" name="Rectangle 33"/>
+              <a:t>Screen lifecycle actions in Screen Builder (FE)</a:t>
+            </a:r>
+          </a:p>
+        </p:txBody>
+      </p:sp>
+      <p:sp>
+        <p:nvSpPr>
+          <p:cNvPr id="31" name="TextBox 30"/>
+          <p:cNvSpPr txBox="1"/>
+          <p:nvPr/>
+        </p:nvSpPr>
+        <p:spPr>
+          <a:xfrm>
+            <a:off x="192024" y="2054656"/>
+            <a:ext cx="2718053" cy="132588"/>
+          </a:xfrm>
+          <a:prstGeom prst="rect">
+            <a:avLst/>
+          </a:prstGeom>
+          <a:noFill/>
+        </p:spPr>
+        <p:txBody>
+          <a:bodyPr wrap="square">
+            <a:spAutoFit/>
+          </a:bodyPr>
+          <a:lstStyle/>
+          <a:p>
+            <a:pPr algn="l"/>
+            <a:r>
+              <a:rPr sz="700" b="1" i="0">
+                <a:solidFill>
+                  <a:srgbClr val="37474F"/>
+                </a:solidFill>
+                <a:latin typeface="Segoe UI"/>
+              </a:rPr>
+              <a:t>PLANNED</a:t>
+            </a:r>
+          </a:p>
+        </p:txBody>
+      </p:sp>
+      <p:sp>
+        <p:nvSpPr>
+          <p:cNvPr id="32" name="Rectangle 31"/>
           <p:cNvSpPr/>
           <p:nvPr/>
         </p:nvSpPr>
         <p:spPr>
           <a:xfrm>
-            <a:off x="64008" y="2619756"/>
-            <a:ext cx="2919222" cy="886968"/>
-          </a:xfrm>
-          <a:prstGeom prst="rect">
-            <a:avLst/>
-          </a:prstGeom>
-          <a:solidFill>
-            <a:srgbClr val="FFFFFF"/>
-          </a:solidFill>
-          <a:ln w="6350">
-            <a:solidFill>
-              <a:srgbClr val="E0E4EA"/>
-            </a:solidFill>
+            <a:off x="246888" y="2255824"/>
+            <a:ext cx="29260" cy="29260"/>
+          </a:xfrm>
+          <a:prstGeom prst="rect">
+            <a:avLst/>
+          </a:prstGeom>
+          <a:solidFill>
+            <a:srgbClr val="D0D5DD"/>
+          </a:solidFill>
+          <a:ln>
+            <a:noFill/>
           </a:ln>
         </p:spPr>
         <p:style>
@@ -4393,20 +4315,55 @@
       </p:sp>
       <p:sp>
         <p:nvSpPr>
-          <p:cNvPr id="35" name="Rectangle 34"/>
+          <p:cNvPr id="33" name="TextBox 32"/>
+          <p:cNvSpPr txBox="1"/>
+          <p:nvPr/>
+        </p:nvSpPr>
+        <p:spPr>
+          <a:xfrm>
+            <a:off x="310896" y="2205532"/>
+            <a:ext cx="2590038" cy="153619"/>
+          </a:xfrm>
+          <a:prstGeom prst="rect">
+            <a:avLst/>
+          </a:prstGeom>
+          <a:noFill/>
+        </p:spPr>
+        <p:txBody>
+          <a:bodyPr wrap="square">
+            <a:spAutoFit/>
+          </a:bodyPr>
+          <a:lstStyle/>
+          <a:p>
+            <a:pPr algn="l"/>
+            <a:r>
+              <a:rPr sz="750" b="0" i="0">
+                <a:solidFill>
+                  <a:srgbClr val="444444"/>
+                </a:solidFill>
+                <a:latin typeface="Segoe UI"/>
+              </a:rPr>
+              <a:t>Screen lifecycle actions execution in SDK runtime</a:t>
+            </a:r>
+          </a:p>
+        </p:txBody>
+      </p:sp>
+      <p:sp>
+        <p:nvSpPr>
+          <p:cNvPr id="34" name="Rectangle 33"/>
           <p:cNvSpPr/>
           <p:nvPr/>
         </p:nvSpPr>
         <p:spPr>
           <a:xfrm>
-            <a:off x="64008" y="2619756"/>
-            <a:ext cx="2919222" cy="192024"/>
-          </a:xfrm>
-          <a:prstGeom prst="rect">
-            <a:avLst/>
-          </a:prstGeom>
-          <a:solidFill>
-            <a:srgbClr val="0277BD"/>
+            <a:off x="246888" y="2391156"/>
+            <a:ext cx="29260" cy="29260"/>
+          </a:xfrm>
+          <a:prstGeom prst="rect">
+            <a:avLst/>
+          </a:prstGeom>
+          <a:solidFill>
+            <a:srgbClr val="D0D5DD"/>
           </a:solidFill>
           <a:ln>
             <a:noFill/>
@@ -4436,14 +4393,14 @@
       </p:sp>
       <p:sp>
         <p:nvSpPr>
-          <p:cNvPr id="36" name="TextBox 35"/>
+          <p:cNvPr id="35" name="TextBox 34"/>
           <p:cNvSpPr txBox="1"/>
           <p:nvPr/>
         </p:nvSpPr>
         <p:spPr>
           <a:xfrm>
-            <a:off x="128016" y="2647188"/>
-            <a:ext cx="2827782" cy="155448"/>
+            <a:off x="310896" y="2340864"/>
+            <a:ext cx="2590038" cy="153619"/>
           </a:xfrm>
           <a:prstGeom prst="rect">
             <a:avLst/>
@@ -4458,37 +4415,37 @@
           <a:p>
             <a:pPr algn="l"/>
             <a:r>
-              <a:rPr sz="800" b="1" i="0">
-                <a:solidFill>
-                  <a:srgbClr val="FFFFFF"/>
+              <a:rPr sz="750" b="0" i="0">
+                <a:solidFill>
+                  <a:srgbClr val="444444"/>
                 </a:solidFill>
                 <a:latin typeface="Segoe UI"/>
               </a:rPr>
-              <a:t>Edit Sub Brand</a:t>
-            </a:r>
-          </a:p>
-        </p:txBody>
-      </p:sp>
-      <p:sp>
-        <p:nvSpPr>
-          <p:cNvPr id="37" name="Rectangle 36"/>
+              <a:t>Idempotent outcome persistence for lifecycle actions</a:t>
+            </a:r>
+          </a:p>
+        </p:txBody>
+      </p:sp>
+      <p:sp>
+        <p:nvSpPr>
+          <p:cNvPr id="36" name="Rectangle 35"/>
           <p:cNvSpPr/>
           <p:nvPr/>
         </p:nvSpPr>
         <p:spPr>
           <a:xfrm>
-            <a:off x="118872" y="2848356"/>
-            <a:ext cx="749808" cy="141732"/>
-          </a:xfrm>
-          <a:prstGeom prst="rect">
-            <a:avLst/>
-          </a:prstGeom>
-          <a:solidFill>
-            <a:srgbClr val="E3F2FD"/>
+            <a:off x="82296" y="2649931"/>
+            <a:ext cx="2882646" cy="915314"/>
+          </a:xfrm>
+          <a:prstGeom prst="rect">
+            <a:avLst/>
+          </a:prstGeom>
+          <a:solidFill>
+            <a:srgbClr val="FFFFFF"/>
           </a:solidFill>
           <a:ln w="6350">
             <a:solidFill>
-              <a:srgbClr val="E3F2FD"/>
+              <a:srgbClr val="D0D5DD"/>
             </a:solidFill>
           </a:ln>
         </p:spPr>
@@ -4516,55 +4473,20 @@
       </p:sp>
       <p:sp>
         <p:nvSpPr>
-          <p:cNvPr id="38" name="TextBox 37"/>
-          <p:cNvSpPr txBox="1"/>
-          <p:nvPr/>
-        </p:nvSpPr>
-        <p:spPr>
-          <a:xfrm>
-            <a:off x="128016" y="2857500"/>
-            <a:ext cx="731520" cy="128016"/>
-          </a:xfrm>
-          <a:prstGeom prst="rect">
-            <a:avLst/>
-          </a:prstGeom>
-          <a:noFill/>
-        </p:spPr>
-        <p:txBody>
-          <a:bodyPr wrap="square">
-            <a:spAutoFit/>
-          </a:bodyPr>
-          <a:lstStyle/>
-          <a:p>
-            <a:pPr algn="l"/>
-            <a:r>
-              <a:rPr sz="650" b="1" i="0">
-                <a:solidFill>
-                  <a:srgbClr val="0D47A1"/>
-                </a:solidFill>
-                <a:latin typeface="Segoe UI"/>
-              </a:rPr>
-              <a:t>⟳ In Progress</a:t>
-            </a:r>
-          </a:p>
-        </p:txBody>
-      </p:sp>
-      <p:sp>
-        <p:nvSpPr>
-          <p:cNvPr id="39" name="Rectangle 38"/>
+          <p:cNvPr id="37" name="Rectangle 36"/>
           <p:cNvSpPr/>
           <p:nvPr/>
         </p:nvSpPr>
         <p:spPr>
           <a:xfrm>
-            <a:off x="173736" y="3058668"/>
-            <a:ext cx="36576" cy="36576"/>
-          </a:xfrm>
-          <a:prstGeom prst="rect">
-            <a:avLst/>
-          </a:prstGeom>
-          <a:solidFill>
-            <a:srgbClr val="90A4AE"/>
+            <a:off x="82296" y="2649931"/>
+            <a:ext cx="36576" cy="915314"/>
+          </a:xfrm>
+          <a:prstGeom prst="rect">
+            <a:avLst/>
+          </a:prstGeom>
+          <a:solidFill>
+            <a:srgbClr val="1565C0"/>
           </a:solidFill>
           <a:ln>
             <a:noFill/>
@@ -4594,14 +4516,14 @@
       </p:sp>
       <p:sp>
         <p:nvSpPr>
-          <p:cNvPr id="40" name="TextBox 39"/>
+          <p:cNvPr id="38" name="TextBox 37"/>
           <p:cNvSpPr txBox="1"/>
           <p:nvPr/>
         </p:nvSpPr>
         <p:spPr>
           <a:xfrm>
-            <a:off x="237744" y="3008376"/>
-            <a:ext cx="2681478" cy="150875"/>
+            <a:off x="173736" y="2668219"/>
+            <a:ext cx="2754629" cy="178308"/>
           </a:xfrm>
           <a:prstGeom prst="rect">
             <a:avLst/>
@@ -4616,38 +4538,36 @@
           <a:p>
             <a:pPr algn="l"/>
             <a:r>
-              <a:rPr sz="750" b="0" i="0">
-                <a:solidFill>
-                  <a:srgbClr val="333333"/>
+              <a:rPr sz="850" b="1" i="0">
+                <a:solidFill>
+                  <a:srgbClr val="0D47A1"/>
                 </a:solidFill>
                 <a:latin typeface="Segoe UI"/>
               </a:rPr>
-              <a:t>Sub-brand logo override from parent brand</a:t>
-            </a:r>
-          </a:p>
-        </p:txBody>
-      </p:sp>
-      <p:sp>
-        <p:nvSpPr>
-          <p:cNvPr id="41" name="Rectangle 40"/>
+              <a:t>Edit Sub Brand</a:t>
+            </a:r>
+          </a:p>
+        </p:txBody>
+      </p:sp>
+      <p:sp>
+        <p:nvSpPr>
+          <p:cNvPr id="39" name="Rectangle 38"/>
           <p:cNvSpPr/>
           <p:nvPr/>
         </p:nvSpPr>
         <p:spPr>
           <a:xfrm>
-            <a:off x="118872" y="3177540"/>
-            <a:ext cx="749808" cy="141732"/>
-          </a:xfrm>
-          <a:prstGeom prst="rect">
-            <a:avLst/>
-          </a:prstGeom>
-          <a:solidFill>
-            <a:srgbClr val="F3E5F5"/>
-          </a:solidFill>
-          <a:ln w="6350">
-            <a:solidFill>
-              <a:srgbClr val="F3E5F5"/>
-            </a:solidFill>
+            <a:off x="173736" y="2837383"/>
+            <a:ext cx="2754629" cy="7315"/>
+          </a:xfrm>
+          <a:prstGeom prst="rect">
+            <a:avLst/>
+          </a:prstGeom>
+          <a:solidFill>
+            <a:srgbClr val="D0D5DD"/>
+          </a:solidFill>
+          <a:ln>
+            <a:noFill/>
           </a:ln>
         </p:spPr>
         <p:style>
@@ -4674,14 +4594,14 @@
       </p:sp>
       <p:sp>
         <p:nvSpPr>
-          <p:cNvPr id="42" name="TextBox 41"/>
+          <p:cNvPr id="40" name="TextBox 39"/>
           <p:cNvSpPr txBox="1"/>
           <p:nvPr/>
         </p:nvSpPr>
         <p:spPr>
           <a:xfrm>
-            <a:off x="128016" y="3186684"/>
-            <a:ext cx="731520" cy="128016"/>
+            <a:off x="192024" y="2864815"/>
+            <a:ext cx="2718053" cy="132588"/>
           </a:xfrm>
           <a:prstGeom prst="rect">
             <a:avLst/>
@@ -4696,33 +4616,33 @@
           <a:p>
             <a:pPr algn="l"/>
             <a:r>
-              <a:rPr sz="650" b="1" i="0">
-                <a:solidFill>
-                  <a:srgbClr val="4A148C"/>
+              <a:rPr sz="700" b="1" i="0">
+                <a:solidFill>
+                  <a:srgbClr val="37474F"/>
                 </a:solidFill>
                 <a:latin typeface="Segoe UI"/>
               </a:rPr>
-              <a:t>◷ Planned</a:t>
-            </a:r>
-          </a:p>
-        </p:txBody>
-      </p:sp>
-      <p:sp>
-        <p:nvSpPr>
-          <p:cNvPr id="43" name="Rectangle 42"/>
+              <a:t>IN PROGRESS</a:t>
+            </a:r>
+          </a:p>
+        </p:txBody>
+      </p:sp>
+      <p:sp>
+        <p:nvSpPr>
+          <p:cNvPr id="41" name="Rectangle 40"/>
           <p:cNvSpPr/>
           <p:nvPr/>
         </p:nvSpPr>
         <p:spPr>
           <a:xfrm>
-            <a:off x="173736" y="3387852"/>
-            <a:ext cx="36576" cy="36576"/>
-          </a:xfrm>
-          <a:prstGeom prst="rect">
-            <a:avLst/>
-          </a:prstGeom>
-          <a:solidFill>
-            <a:srgbClr val="90A4AE"/>
+            <a:off x="246888" y="3065983"/>
+            <a:ext cx="29260" cy="29260"/>
+          </a:xfrm>
+          <a:prstGeom prst="rect">
+            <a:avLst/>
+          </a:prstGeom>
+          <a:solidFill>
+            <a:srgbClr val="D0D5DD"/>
           </a:solidFill>
           <a:ln>
             <a:noFill/>
@@ -4752,14 +4672,14 @@
       </p:sp>
       <p:sp>
         <p:nvSpPr>
-          <p:cNvPr id="44" name="TextBox 43"/>
+          <p:cNvPr id="42" name="TextBox 41"/>
           <p:cNvSpPr txBox="1"/>
           <p:nvPr/>
         </p:nvSpPr>
         <p:spPr>
           <a:xfrm>
-            <a:off x="237744" y="3337560"/>
-            <a:ext cx="2681478" cy="150875"/>
+            <a:off x="310896" y="3015691"/>
+            <a:ext cx="2590038" cy="153619"/>
           </a:xfrm>
           <a:prstGeom prst="rect">
             <a:avLst/>
@@ -4776,36 +4696,69 @@
             <a:r>
               <a:rPr sz="750" b="0" i="0">
                 <a:solidFill>
-                  <a:srgbClr val="333333"/>
+                  <a:srgbClr val="444444"/>
                 </a:solidFill>
                 <a:latin typeface="Segoe UI"/>
               </a:rPr>
-              <a:t>Sub-brand creation workflow bug resolution</a:t>
-            </a:r>
-          </a:p>
-        </p:txBody>
-      </p:sp>
-      <p:sp>
-        <p:nvSpPr>
-          <p:cNvPr id="45" name="Rectangle 44"/>
+              <a:t>Sub-brand logo override from parent brand</a:t>
+            </a:r>
+          </a:p>
+        </p:txBody>
+      </p:sp>
+      <p:sp>
+        <p:nvSpPr>
+          <p:cNvPr id="43" name="TextBox 42"/>
+          <p:cNvSpPr txBox="1"/>
+          <p:nvPr/>
+        </p:nvSpPr>
+        <p:spPr>
+          <a:xfrm>
+            <a:off x="192024" y="3187598"/>
+            <a:ext cx="2718053" cy="132588"/>
+          </a:xfrm>
+          <a:prstGeom prst="rect">
+            <a:avLst/>
+          </a:prstGeom>
+          <a:noFill/>
+        </p:spPr>
+        <p:txBody>
+          <a:bodyPr wrap="square">
+            <a:spAutoFit/>
+          </a:bodyPr>
+          <a:lstStyle/>
+          <a:p>
+            <a:pPr algn="l"/>
+            <a:r>
+              <a:rPr sz="700" b="1" i="0">
+                <a:solidFill>
+                  <a:srgbClr val="37474F"/>
+                </a:solidFill>
+                <a:latin typeface="Segoe UI"/>
+              </a:rPr>
+              <a:t>PLANNED</a:t>
+            </a:r>
+          </a:p>
+        </p:txBody>
+      </p:sp>
+      <p:sp>
+        <p:nvSpPr>
+          <p:cNvPr id="44" name="Rectangle 43"/>
           <p:cNvSpPr/>
           <p:nvPr/>
         </p:nvSpPr>
         <p:spPr>
           <a:xfrm>
-            <a:off x="64008" y="3561588"/>
-            <a:ext cx="2919222" cy="690372"/>
-          </a:xfrm>
-          <a:prstGeom prst="rect">
-            <a:avLst/>
-          </a:prstGeom>
-          <a:solidFill>
-            <a:srgbClr val="FFFFFF"/>
-          </a:solidFill>
-          <a:ln w="6350">
-            <a:solidFill>
-              <a:srgbClr val="E0E4EA"/>
-            </a:solidFill>
+            <a:off x="246888" y="3388766"/>
+            <a:ext cx="29260" cy="29260"/>
+          </a:xfrm>
+          <a:prstGeom prst="rect">
+            <a:avLst/>
+          </a:prstGeom>
+          <a:solidFill>
+            <a:srgbClr val="D0D5DD"/>
+          </a:solidFill>
+          <a:ln>
+            <a:noFill/>
           </a:ln>
         </p:spPr>
         <p:style>
@@ -4832,23 +4785,60 @@
       </p:sp>
       <p:sp>
         <p:nvSpPr>
+          <p:cNvPr id="45" name="TextBox 44"/>
+          <p:cNvSpPr txBox="1"/>
+          <p:nvPr/>
+        </p:nvSpPr>
+        <p:spPr>
+          <a:xfrm>
+            <a:off x="310896" y="3338474"/>
+            <a:ext cx="2590038" cy="153619"/>
+          </a:xfrm>
+          <a:prstGeom prst="rect">
+            <a:avLst/>
+          </a:prstGeom>
+          <a:noFill/>
+        </p:spPr>
+        <p:txBody>
+          <a:bodyPr wrap="square">
+            <a:spAutoFit/>
+          </a:bodyPr>
+          <a:lstStyle/>
+          <a:p>
+            <a:pPr algn="l"/>
+            <a:r>
+              <a:rPr sz="750" b="0" i="0">
+                <a:solidFill>
+                  <a:srgbClr val="444444"/>
+                </a:solidFill>
+                <a:latin typeface="Segoe UI"/>
+              </a:rPr>
+              <a:t>Sub-brand creation workflow bug resolution</a:t>
+            </a:r>
+          </a:p>
+        </p:txBody>
+      </p:sp>
+      <p:sp>
+        <p:nvSpPr>
           <p:cNvPr id="46" name="Rectangle 45"/>
           <p:cNvSpPr/>
           <p:nvPr/>
         </p:nvSpPr>
         <p:spPr>
           <a:xfrm>
-            <a:off x="64008" y="3561588"/>
-            <a:ext cx="2919222" cy="192024"/>
-          </a:xfrm>
-          <a:prstGeom prst="rect">
-            <a:avLst/>
-          </a:prstGeom>
-          <a:solidFill>
-            <a:srgbClr val="283593"/>
-          </a:solidFill>
-          <a:ln>
-            <a:noFill/>
+            <a:off x="82296" y="3638397"/>
+            <a:ext cx="2882646" cy="718718"/>
+          </a:xfrm>
+          <a:prstGeom prst="rect">
+            <a:avLst/>
+          </a:prstGeom>
+          <a:solidFill>
+            <a:srgbClr val="FFFFFF"/>
+          </a:solidFill>
+          <a:ln w="6350">
+            <a:solidFill>
+              <a:srgbClr val="D0D5DD"/>
+            </a:solidFill>
           </a:ln>
         </p:spPr>
         <p:style>
@@ -4875,60 +4865,23 @@
       </p:sp>
       <p:sp>
         <p:nvSpPr>
-          <p:cNvPr id="47" name="TextBox 46"/>
-          <p:cNvSpPr txBox="1"/>
-          <p:nvPr/>
-        </p:nvSpPr>
-        <p:spPr>
-          <a:xfrm>
-            <a:off x="128016" y="3589020"/>
-            <a:ext cx="2827782" cy="155448"/>
-          </a:xfrm>
-          <a:prstGeom prst="rect">
-            <a:avLst/>
-          </a:prstGeom>
-          <a:noFill/>
-        </p:spPr>
-        <p:txBody>
-          <a:bodyPr wrap="square">
-            <a:spAutoFit/>
-          </a:bodyPr>
-          <a:lstStyle/>
-          <a:p>
-            <a:pPr algn="l"/>
-            <a:r>
-              <a:rPr sz="800" b="1" i="0">
-                <a:solidFill>
-                  <a:srgbClr val="FFFFFF"/>
-                </a:solidFill>
-                <a:latin typeface="Segoe UI"/>
-              </a:rPr>
-              <a:t>Config ID Bundle Management</a:t>
-            </a:r>
-          </a:p>
-        </p:txBody>
-      </p:sp>
-      <p:sp>
-        <p:nvSpPr>
-          <p:cNvPr id="48" name="Rectangle 47"/>
+          <p:cNvPr id="47" name="Rectangle 46"/>
           <p:cNvSpPr/>
           <p:nvPr/>
         </p:nvSpPr>
         <p:spPr>
           <a:xfrm>
-            <a:off x="118872" y="3790188"/>
-            <a:ext cx="749808" cy="141732"/>
-          </a:xfrm>
-          <a:prstGeom prst="rect">
-            <a:avLst/>
-          </a:prstGeom>
-          <a:solidFill>
-            <a:srgbClr val="E3F2FD"/>
-          </a:solidFill>
-          <a:ln w="6350">
-            <a:solidFill>
-              <a:srgbClr val="E3F2FD"/>
-            </a:solidFill>
+            <a:off x="82296" y="3638397"/>
+            <a:ext cx="36576" cy="718718"/>
+          </a:xfrm>
+          <a:prstGeom prst="rect">
+            <a:avLst/>
+          </a:prstGeom>
+          <a:solidFill>
+            <a:srgbClr val="1565C0"/>
+          </a:solidFill>
+          <a:ln>
+            <a:noFill/>
           </a:ln>
         </p:spPr>
         <p:style>
@@ -4955,14 +4908,14 @@
       </p:sp>
       <p:sp>
         <p:nvSpPr>
-          <p:cNvPr id="49" name="TextBox 48"/>
+          <p:cNvPr id="48" name="TextBox 47"/>
           <p:cNvSpPr txBox="1"/>
           <p:nvPr/>
         </p:nvSpPr>
         <p:spPr>
           <a:xfrm>
-            <a:off x="128016" y="3799332"/>
-            <a:ext cx="731520" cy="128016"/>
+            <a:off x="173736" y="3656685"/>
+            <a:ext cx="2754629" cy="178308"/>
           </a:xfrm>
           <a:prstGeom prst="rect">
             <a:avLst/>
@@ -4977,33 +4930,33 @@
           <a:p>
             <a:pPr algn="l"/>
             <a:r>
-              <a:rPr sz="650" b="1" i="0">
+              <a:rPr sz="850" b="1" i="0">
                 <a:solidFill>
                   <a:srgbClr val="0D47A1"/>
                 </a:solidFill>
                 <a:latin typeface="Segoe UI"/>
               </a:rPr>
-              <a:t>⟳ In Progress</a:t>
-            </a:r>
-          </a:p>
-        </p:txBody>
-      </p:sp>
-      <p:sp>
-        <p:nvSpPr>
-          <p:cNvPr id="50" name="Rectangle 49"/>
+              <a:t>Config ID Bundle Management</a:t>
+            </a:r>
+          </a:p>
+        </p:txBody>
+      </p:sp>
+      <p:sp>
+        <p:nvSpPr>
+          <p:cNvPr id="49" name="Rectangle 48"/>
           <p:cNvSpPr/>
           <p:nvPr/>
         </p:nvSpPr>
         <p:spPr>
           <a:xfrm>
-            <a:off x="173736" y="4000500"/>
-            <a:ext cx="36576" cy="36576"/>
-          </a:xfrm>
-          <a:prstGeom prst="rect">
-            <a:avLst/>
-          </a:prstGeom>
-          <a:solidFill>
-            <a:srgbClr val="90A4AE"/>
+            <a:off x="173736" y="3825849"/>
+            <a:ext cx="2754629" cy="7315"/>
+          </a:xfrm>
+          <a:prstGeom prst="rect">
+            <a:avLst/>
+          </a:prstGeom>
+          <a:solidFill>
+            <a:srgbClr val="D0D5DD"/>
           </a:solidFill>
           <a:ln>
             <a:noFill/>
@@ -5033,14 +4986,14 @@
       </p:sp>
       <p:sp>
         <p:nvSpPr>
-          <p:cNvPr id="51" name="TextBox 50"/>
+          <p:cNvPr id="50" name="TextBox 49"/>
           <p:cNvSpPr txBox="1"/>
           <p:nvPr/>
         </p:nvSpPr>
         <p:spPr>
           <a:xfrm>
-            <a:off x="237744" y="3950208"/>
-            <a:ext cx="2681478" cy="150875"/>
+            <a:off x="192024" y="3853281"/>
+            <a:ext cx="2718053" cy="132588"/>
           </a:xfrm>
           <a:prstGeom prst="rect">
             <a:avLst/>
@@ -5055,33 +5008,33 @@
           <a:p>
             <a:pPr algn="l"/>
             <a:r>
-              <a:rPr sz="750" b="0" i="0">
-                <a:solidFill>
-                  <a:srgbClr val="333333"/>
+              <a:rPr sz="700" b="1" i="0">
+                <a:solidFill>
+                  <a:srgbClr val="37474F"/>
                 </a:solidFill>
                 <a:latin typeface="Segoe UI"/>
               </a:rPr>
-              <a:t>Configuration history integration design</a:t>
-            </a:r>
-          </a:p>
-        </p:txBody>
-      </p:sp>
-      <p:sp>
-        <p:nvSpPr>
-          <p:cNvPr id="52" name="Rectangle 51"/>
+              <a:t>IN PROGRESS</a:t>
+            </a:r>
+          </a:p>
+        </p:txBody>
+      </p:sp>
+      <p:sp>
+        <p:nvSpPr>
+          <p:cNvPr id="51" name="Rectangle 50"/>
           <p:cNvSpPr/>
           <p:nvPr/>
         </p:nvSpPr>
         <p:spPr>
           <a:xfrm>
-            <a:off x="173736" y="4133087"/>
-            <a:ext cx="36576" cy="36576"/>
-          </a:xfrm>
-          <a:prstGeom prst="rect">
-            <a:avLst/>
-          </a:prstGeom>
-          <a:solidFill>
-            <a:srgbClr val="90A4AE"/>
+            <a:off x="246888" y="4054449"/>
+            <a:ext cx="29260" cy="29260"/>
+          </a:xfrm>
+          <a:prstGeom prst="rect">
+            <a:avLst/>
+          </a:prstGeom>
+          <a:solidFill>
+            <a:srgbClr val="D0D5DD"/>
           </a:solidFill>
           <a:ln>
             <a:noFill/>
@@ -5111,14 +5064,14 @@
       </p:sp>
       <p:sp>
         <p:nvSpPr>
-          <p:cNvPr id="53" name="TextBox 52"/>
+          <p:cNvPr id="52" name="TextBox 51"/>
           <p:cNvSpPr txBox="1"/>
           <p:nvPr/>
         </p:nvSpPr>
         <p:spPr>
           <a:xfrm>
-            <a:off x="237744" y="4082796"/>
-            <a:ext cx="2681478" cy="150875"/>
+            <a:off x="310896" y="4004157"/>
+            <a:ext cx="2590038" cy="153619"/>
           </a:xfrm>
           <a:prstGeom prst="rect">
             <a:avLst/>
@@ -5135,36 +5088,34 @@
             <a:r>
               <a:rPr sz="750" b="0" i="0">
                 <a:solidFill>
-                  <a:srgbClr val="333333"/>
+                  <a:srgbClr val="444444"/>
                 </a:solidFill>
                 <a:latin typeface="Segoe UI"/>
               </a:rPr>
-              <a:t>Configuration variants relationship design</a:t>
-            </a:r>
-          </a:p>
-        </p:txBody>
-      </p:sp>
-      <p:sp>
-        <p:nvSpPr>
-          <p:cNvPr id="54" name="Rectangle 53"/>
+              <a:t>Configuration history integration design</a:t>
+            </a:r>
+          </a:p>
+        </p:txBody>
+      </p:sp>
+      <p:sp>
+        <p:nvSpPr>
+          <p:cNvPr id="53" name="Rectangle 52"/>
           <p:cNvSpPr/>
           <p:nvPr/>
         </p:nvSpPr>
         <p:spPr>
           <a:xfrm>
-            <a:off x="64008" y="4306824"/>
-            <a:ext cx="2919222" cy="690372"/>
-          </a:xfrm>
-          <a:prstGeom prst="rect">
-            <a:avLst/>
-          </a:prstGeom>
-          <a:solidFill>
-            <a:srgbClr val="FFFFFF"/>
-          </a:solidFill>
-          <a:ln w="6350">
-            <a:solidFill>
-              <a:srgbClr val="E0E4EA"/>
-            </a:solidFill>
+            <a:off x="246888" y="4189780"/>
+            <a:ext cx="29260" cy="29260"/>
+          </a:xfrm>
+          <a:prstGeom prst="rect">
+            <a:avLst/>
+          </a:prstGeom>
+          <a:solidFill>
+            <a:srgbClr val="D0D5DD"/>
+          </a:solidFill>
+          <a:ln>
+            <a:noFill/>
           </a:ln>
         </p:spPr>
         <p:style>
@@ -5191,23 +5142,60 @@
       </p:sp>
       <p:sp>
         <p:nvSpPr>
+          <p:cNvPr id="54" name="TextBox 53"/>
+          <p:cNvSpPr txBox="1"/>
+          <p:nvPr/>
+        </p:nvSpPr>
+        <p:spPr>
+          <a:xfrm>
+            <a:off x="310896" y="4139488"/>
+            <a:ext cx="2590038" cy="153619"/>
+          </a:xfrm>
+          <a:prstGeom prst="rect">
+            <a:avLst/>
+          </a:prstGeom>
+          <a:noFill/>
+        </p:spPr>
+        <p:txBody>
+          <a:bodyPr wrap="square">
+            <a:spAutoFit/>
+          </a:bodyPr>
+          <a:lstStyle/>
+          <a:p>
+            <a:pPr algn="l"/>
+            <a:r>
+              <a:rPr sz="750" b="0" i="0">
+                <a:solidFill>
+                  <a:srgbClr val="444444"/>
+                </a:solidFill>
+                <a:latin typeface="Segoe UI"/>
+              </a:rPr>
+              <a:t>Configuration variants relationship design</a:t>
+            </a:r>
+          </a:p>
+        </p:txBody>
+      </p:sp>
+      <p:sp>
+        <p:nvSpPr>
           <p:cNvPr id="55" name="Rectangle 54"/>
           <p:cNvSpPr/>
           <p:nvPr/>
         </p:nvSpPr>
         <p:spPr>
           <a:xfrm>
-            <a:off x="64008" y="4306824"/>
-            <a:ext cx="2919222" cy="192024"/>
-          </a:xfrm>
-          <a:prstGeom prst="rect">
-            <a:avLst/>
-          </a:prstGeom>
-          <a:solidFill>
-            <a:srgbClr val="E65100"/>
-          </a:solidFill>
-          <a:ln>
-            <a:noFill/>
+            <a:off x="82296" y="4430268"/>
+            <a:ext cx="2882646" cy="718718"/>
+          </a:xfrm>
+          <a:prstGeom prst="rect">
+            <a:avLst/>
+          </a:prstGeom>
+          <a:solidFill>
+            <a:srgbClr val="FFFFFF"/>
+          </a:solidFill>
+          <a:ln w="6350">
+            <a:solidFill>
+              <a:srgbClr val="D0D5DD"/>
+            </a:solidFill>
           </a:ln>
         </p:spPr>
         <p:style>
@@ -5234,60 +5222,23 @@
       </p:sp>
       <p:sp>
         <p:nvSpPr>
-          <p:cNvPr id="56" name="TextBox 55"/>
-          <p:cNvSpPr txBox="1"/>
-          <p:nvPr/>
-        </p:nvSpPr>
-        <p:spPr>
-          <a:xfrm>
-            <a:off x="128016" y="4334256"/>
-            <a:ext cx="2827782" cy="155448"/>
-          </a:xfrm>
-          <a:prstGeom prst="rect">
-            <a:avLst/>
-          </a:prstGeom>
-          <a:noFill/>
-        </p:spPr>
-        <p:txBody>
-          <a:bodyPr wrap="square">
-            <a:spAutoFit/>
-          </a:bodyPr>
-          <a:lstStyle/>
-          <a:p>
-            <a:pPr algn="l"/>
-            <a:r>
-              <a:rPr sz="800" b="1" i="0">
-                <a:solidFill>
-                  <a:srgbClr val="FFFFFF"/>
-                </a:solidFill>
-                <a:latin typeface="Segoe UI"/>
-              </a:rPr>
-              <a:t>SDK Version Workflow Enhancements</a:t>
-            </a:r>
-          </a:p>
-        </p:txBody>
-      </p:sp>
-      <p:sp>
-        <p:nvSpPr>
-          <p:cNvPr id="57" name="Rectangle 56"/>
+          <p:cNvPr id="56" name="Rectangle 55"/>
           <p:cNvSpPr/>
           <p:nvPr/>
         </p:nvSpPr>
         <p:spPr>
           <a:xfrm>
-            <a:off x="118872" y="4535424"/>
-            <a:ext cx="749808" cy="141732"/>
-          </a:xfrm>
-          <a:prstGeom prst="rect">
-            <a:avLst/>
-          </a:prstGeom>
-          <a:solidFill>
-            <a:srgbClr val="E3F2FD"/>
-          </a:solidFill>
-          <a:ln w="6350">
-            <a:solidFill>
-              <a:srgbClr val="E3F2FD"/>
-            </a:solidFill>
+            <a:off x="82296" y="4430268"/>
+            <a:ext cx="36576" cy="718718"/>
+          </a:xfrm>
+          <a:prstGeom prst="rect">
+            <a:avLst/>
+          </a:prstGeom>
+          <a:solidFill>
+            <a:srgbClr val="1565C0"/>
+          </a:solidFill>
+          <a:ln>
+            <a:noFill/>
           </a:ln>
         </p:spPr>
         <p:style>
@@ -5314,14 +5265,14 @@
       </p:sp>
       <p:sp>
         <p:nvSpPr>
-          <p:cNvPr id="58" name="TextBox 57"/>
+          <p:cNvPr id="57" name="TextBox 56"/>
           <p:cNvSpPr txBox="1"/>
           <p:nvPr/>
         </p:nvSpPr>
         <p:spPr>
           <a:xfrm>
-            <a:off x="128016" y="4544568"/>
-            <a:ext cx="731520" cy="128016"/>
+            <a:off x="173736" y="4448556"/>
+            <a:ext cx="2754629" cy="178308"/>
           </a:xfrm>
           <a:prstGeom prst="rect">
             <a:avLst/>
@@ -5336,33 +5287,33 @@
           <a:p>
             <a:pPr algn="l"/>
             <a:r>
-              <a:rPr sz="650" b="1" i="0">
+              <a:rPr sz="850" b="1" i="0">
                 <a:solidFill>
                   <a:srgbClr val="0D47A1"/>
                 </a:solidFill>
                 <a:latin typeface="Segoe UI"/>
               </a:rPr>
-              <a:t>⟳ In Progress</a:t>
-            </a:r>
-          </a:p>
-        </p:txBody>
-      </p:sp>
-      <p:sp>
-        <p:nvSpPr>
-          <p:cNvPr id="59" name="Rectangle 58"/>
+              <a:t>SDK Version Workflow Enhancements</a:t>
+            </a:r>
+          </a:p>
+        </p:txBody>
+      </p:sp>
+      <p:sp>
+        <p:nvSpPr>
+          <p:cNvPr id="58" name="Rectangle 57"/>
           <p:cNvSpPr/>
           <p:nvPr/>
         </p:nvSpPr>
         <p:spPr>
           <a:xfrm>
-            <a:off x="173736" y="4745736"/>
-            <a:ext cx="36576" cy="36576"/>
-          </a:xfrm>
-          <a:prstGeom prst="rect">
-            <a:avLst/>
-          </a:prstGeom>
-          <a:solidFill>
-            <a:srgbClr val="90A4AE"/>
+            <a:off x="173736" y="4617720"/>
+            <a:ext cx="2754629" cy="7315"/>
+          </a:xfrm>
+          <a:prstGeom prst="rect">
+            <a:avLst/>
+          </a:prstGeom>
+          <a:solidFill>
+            <a:srgbClr val="D0D5DD"/>
           </a:solidFill>
           <a:ln>
             <a:noFill/>
@@ -5392,14 +5343,14 @@
       </p:sp>
       <p:sp>
         <p:nvSpPr>
-          <p:cNvPr id="60" name="TextBox 59"/>
+          <p:cNvPr id="59" name="TextBox 58"/>
           <p:cNvSpPr txBox="1"/>
           <p:nvPr/>
         </p:nvSpPr>
         <p:spPr>
           <a:xfrm>
-            <a:off x="237744" y="4695444"/>
-            <a:ext cx="2681478" cy="150875"/>
+            <a:off x="192024" y="4645152"/>
+            <a:ext cx="2718053" cy="132588"/>
           </a:xfrm>
           <a:prstGeom prst="rect">
             <a:avLst/>
@@ -5414,33 +5365,33 @@
           <a:p>
             <a:pPr algn="l"/>
             <a:r>
-              <a:rPr sz="750" b="0" i="0">
-                <a:solidFill>
-                  <a:srgbClr val="333333"/>
+              <a:rPr sz="700" b="1" i="0">
+                <a:solidFill>
+                  <a:srgbClr val="37474F"/>
                 </a:solidFill>
                 <a:latin typeface="Segoe UI"/>
               </a:rPr>
-              <a:t>Save/Delete/Lifecycle consistency design for Versions &amp; Variants</a:t>
-            </a:r>
-          </a:p>
-        </p:txBody>
-      </p:sp>
-      <p:sp>
-        <p:nvSpPr>
-          <p:cNvPr id="61" name="Rectangle 60"/>
+              <a:t>IN PROGRESS</a:t>
+            </a:r>
+          </a:p>
+        </p:txBody>
+      </p:sp>
+      <p:sp>
+        <p:nvSpPr>
+          <p:cNvPr id="60" name="Rectangle 59"/>
           <p:cNvSpPr/>
           <p:nvPr/>
         </p:nvSpPr>
         <p:spPr>
           <a:xfrm>
-            <a:off x="173736" y="4878323"/>
-            <a:ext cx="36576" cy="36576"/>
-          </a:xfrm>
-          <a:prstGeom prst="rect">
-            <a:avLst/>
-          </a:prstGeom>
-          <a:solidFill>
-            <a:srgbClr val="90A4AE"/>
+            <a:off x="246888" y="4846320"/>
+            <a:ext cx="29260" cy="29260"/>
+          </a:xfrm>
+          <a:prstGeom prst="rect">
+            <a:avLst/>
+          </a:prstGeom>
+          <a:solidFill>
+            <a:srgbClr val="D0D5DD"/>
           </a:solidFill>
           <a:ln>
             <a:noFill/>
@@ -5470,14 +5421,14 @@
       </p:sp>
       <p:sp>
         <p:nvSpPr>
-          <p:cNvPr id="62" name="TextBox 61"/>
+          <p:cNvPr id="61" name="TextBox 60"/>
           <p:cNvSpPr txBox="1"/>
           <p:nvPr/>
         </p:nvSpPr>
         <p:spPr>
           <a:xfrm>
-            <a:off x="237744" y="4828031"/>
-            <a:ext cx="2681478" cy="150875"/>
+            <a:off x="310896" y="4796028"/>
+            <a:ext cx="2590038" cy="153619"/>
           </a:xfrm>
           <a:prstGeom prst="rect">
             <a:avLst/>
@@ -5494,31 +5445,31 @@
             <a:r>
               <a:rPr sz="750" b="0" i="0">
                 <a:solidFill>
-                  <a:srgbClr val="333333"/>
+                  <a:srgbClr val="444444"/>
                 </a:solidFill>
                 <a:latin typeface="Segoe UI"/>
               </a:rPr>
-              <a:t>Safe &amp; consistent lifecycle implementation (frontend &amp; backend)</a:t>
-            </a:r>
-          </a:p>
-        </p:txBody>
-      </p:sp>
-      <p:sp>
-        <p:nvSpPr>
-          <p:cNvPr id="63" name="Rectangle 62"/>
+              <a:t>Save/Delete/Lifecycle consistency design for Versions &amp; Variants</a:t>
+            </a:r>
+          </a:p>
+        </p:txBody>
+      </p:sp>
+      <p:sp>
+        <p:nvSpPr>
+          <p:cNvPr id="62" name="Rectangle 61"/>
           <p:cNvSpPr/>
           <p:nvPr/>
         </p:nvSpPr>
         <p:spPr>
           <a:xfrm>
-            <a:off x="6089904" y="658368"/>
-            <a:ext cx="9144" cy="5907024"/>
-          </a:xfrm>
-          <a:prstGeom prst="rect">
-            <a:avLst/>
-          </a:prstGeom>
-          <a:solidFill>
-            <a:srgbClr val="E0E4EA"/>
+            <a:off x="246888" y="4981651"/>
+            <a:ext cx="29260" cy="29260"/>
+          </a:xfrm>
+          <a:prstGeom prst="rect">
+            <a:avLst/>
+          </a:prstGeom>
+          <a:solidFill>
+            <a:srgbClr val="D0D5DD"/>
           </a:solidFill>
           <a:ln>
             <a:noFill/>
@@ -5548,14 +5499,14 @@
       </p:sp>
       <p:sp>
         <p:nvSpPr>
-          <p:cNvPr id="64" name="TextBox 63"/>
+          <p:cNvPr id="63" name="TextBox 62"/>
           <p:cNvSpPr txBox="1"/>
           <p:nvPr/>
         </p:nvSpPr>
         <p:spPr>
           <a:xfrm>
-            <a:off x="3111246" y="713232"/>
-            <a:ext cx="2919222" cy="201168"/>
+            <a:off x="310896" y="4931359"/>
+            <a:ext cx="2590038" cy="153619"/>
           </a:xfrm>
           <a:prstGeom prst="rect">
             <a:avLst/>
@@ -5570,9 +5521,44 @@
           <a:p>
             <a:pPr algn="l"/>
             <a:r>
+              <a:rPr sz="750" b="0" i="0">
+                <a:solidFill>
+                  <a:srgbClr val="444444"/>
+                </a:solidFill>
+                <a:latin typeface="Segoe UI"/>
+              </a:rPr>
+              <a:t>Safe &amp; consistent lifecycle implementation (FE &amp; BE)</a:t>
+            </a:r>
+          </a:p>
+        </p:txBody>
+      </p:sp>
+      <p:sp>
+        <p:nvSpPr>
+          <p:cNvPr id="64" name="TextBox 63"/>
+          <p:cNvSpPr txBox="1"/>
+          <p:nvPr/>
+        </p:nvSpPr>
+        <p:spPr>
+          <a:xfrm>
+            <a:off x="3129534" y="676656"/>
+            <a:ext cx="2882646" cy="182880"/>
+          </a:xfrm>
+          <a:prstGeom prst="rect">
+            <a:avLst/>
+          </a:prstGeom>
+          <a:noFill/>
+        </p:spPr>
+        <p:txBody>
+          <a:bodyPr wrap="square">
+            <a:spAutoFit/>
+          </a:bodyPr>
+          <a:lstStyle/>
+          <a:p>
+            <a:pPr algn="l"/>
+            <a:r>
               <a:rPr sz="700" b="1" i="0">
                 <a:solidFill>
-                  <a:srgbClr val="546E7A"/>
+                  <a:srgbClr val="37474F"/>
                 </a:solidFill>
                 <a:latin typeface="Segoe UI"/>
               </a:rPr>
@@ -5589,19 +5575,17 @@
         </p:nvSpPr>
         <p:spPr>
           <a:xfrm>
-            <a:off x="3111246" y="950976"/>
-            <a:ext cx="2919222" cy="2738627"/>
-          </a:xfrm>
-          <a:prstGeom prst="rect">
-            <a:avLst/>
-          </a:prstGeom>
-          <a:solidFill>
-            <a:srgbClr val="FFFFFF"/>
-          </a:solidFill>
-          <a:ln w="6350">
-            <a:solidFill>
-              <a:srgbClr val="E0E4EA"/>
-            </a:solidFill>
+            <a:off x="3129534" y="868680"/>
+            <a:ext cx="2882646" cy="10972"/>
+          </a:xfrm>
+          <a:prstGeom prst="rect">
+            <a:avLst/>
+          </a:prstGeom>
+          <a:solidFill>
+            <a:srgbClr val="D0D5DD"/>
+          </a:solidFill>
+          <a:ln>
+            <a:noFill/>
           </a:ln>
         </p:spPr>
         <p:style>
@@ -5634,17 +5618,19 @@
         </p:nvSpPr>
         <p:spPr>
           <a:xfrm>
-            <a:off x="3111246" y="950976"/>
-            <a:ext cx="2919222" cy="192024"/>
-          </a:xfrm>
-          <a:prstGeom prst="rect">
-            <a:avLst/>
-          </a:prstGeom>
-          <a:solidFill>
-            <a:srgbClr val="6A1B9A"/>
-          </a:solidFill>
-          <a:ln>
-            <a:noFill/>
+            <a:off x="3129534" y="923544"/>
+            <a:ext cx="2882646" cy="2797149"/>
+          </a:xfrm>
+          <a:prstGeom prst="rect">
+            <a:avLst/>
+          </a:prstGeom>
+          <a:solidFill>
+            <a:srgbClr val="FFFFFF"/>
+          </a:solidFill>
+          <a:ln w="6350">
+            <a:solidFill>
+              <a:srgbClr val="D0D5DD"/>
+            </a:solidFill>
           </a:ln>
         </p:spPr>
         <p:style>
@@ -5671,60 +5657,23 @@
       </p:sp>
       <p:sp>
         <p:nvSpPr>
-          <p:cNvPr id="67" name="TextBox 66"/>
-          <p:cNvSpPr txBox="1"/>
-          <p:nvPr/>
-        </p:nvSpPr>
-        <p:spPr>
-          <a:xfrm>
-            <a:off x="3175253" y="978408"/>
-            <a:ext cx="2827782" cy="155448"/>
-          </a:xfrm>
-          <a:prstGeom prst="rect">
-            <a:avLst/>
-          </a:prstGeom>
-          <a:noFill/>
-        </p:spPr>
-        <p:txBody>
-          <a:bodyPr wrap="square">
-            <a:spAutoFit/>
-          </a:bodyPr>
-          <a:lstStyle/>
-          <a:p>
-            <a:pPr algn="l"/>
-            <a:r>
-              <a:rPr sz="800" b="1" i="0">
-                <a:solidFill>
-                  <a:srgbClr val="FFFFFF"/>
-                </a:solidFill>
-                <a:latin typeface="Segoe UI"/>
-              </a:rPr>
-              <a:t>ToothScan 2.0 – Pet Parent Experience</a:t>
-            </a:r>
-          </a:p>
-        </p:txBody>
-      </p:sp>
-      <p:sp>
-        <p:nvSpPr>
-          <p:cNvPr id="68" name="Rectangle 67"/>
+          <p:cNvPr id="67" name="Rectangle 66"/>
           <p:cNvSpPr/>
           <p:nvPr/>
         </p:nvSpPr>
         <p:spPr>
           <a:xfrm>
-            <a:off x="3166110" y="1179576"/>
-            <a:ext cx="749808" cy="141732"/>
-          </a:xfrm>
-          <a:prstGeom prst="rect">
-            <a:avLst/>
-          </a:prstGeom>
-          <a:solidFill>
-            <a:srgbClr val="E8F5E9"/>
-          </a:solidFill>
-          <a:ln w="6350">
-            <a:solidFill>
-              <a:srgbClr val="E8F5E9"/>
-            </a:solidFill>
+            <a:off x="3129534" y="923544"/>
+            <a:ext cx="36576" cy="2797149"/>
+          </a:xfrm>
+          <a:prstGeom prst="rect">
+            <a:avLst/>
+          </a:prstGeom>
+          <a:solidFill>
+            <a:srgbClr val="1565C0"/>
+          </a:solidFill>
+          <a:ln>
+            <a:noFill/>
           </a:ln>
         </p:spPr>
         <p:style>
@@ -5751,14 +5700,14 @@
       </p:sp>
       <p:sp>
         <p:nvSpPr>
-          <p:cNvPr id="69" name="TextBox 68"/>
+          <p:cNvPr id="68" name="TextBox 67"/>
           <p:cNvSpPr txBox="1"/>
           <p:nvPr/>
         </p:nvSpPr>
         <p:spPr>
           <a:xfrm>
-            <a:off x="3175253" y="1188720"/>
-            <a:ext cx="731520" cy="128016"/>
+            <a:off x="3220974" y="941832"/>
+            <a:ext cx="2754629" cy="178308"/>
           </a:xfrm>
           <a:prstGeom prst="rect">
             <a:avLst/>
@@ -5773,33 +5722,33 @@
           <a:p>
             <a:pPr algn="l"/>
             <a:r>
-              <a:rPr sz="650" b="1" i="0">
-                <a:solidFill>
-                  <a:srgbClr val="1B5E20"/>
+              <a:rPr sz="850" b="1" i="0">
+                <a:solidFill>
+                  <a:srgbClr val="0D47A1"/>
                 </a:solidFill>
                 <a:latin typeface="Segoe UI"/>
               </a:rPr>
-              <a:t>✓ Completed</a:t>
-            </a:r>
-          </a:p>
-        </p:txBody>
-      </p:sp>
-      <p:sp>
-        <p:nvSpPr>
-          <p:cNvPr id="70" name="Rectangle 69"/>
+              <a:t>ToothScan 2.0 – Pet Parent Experience</a:t>
+            </a:r>
+          </a:p>
+        </p:txBody>
+      </p:sp>
+      <p:sp>
+        <p:nvSpPr>
+          <p:cNvPr id="69" name="Rectangle 68"/>
           <p:cNvSpPr/>
           <p:nvPr/>
         </p:nvSpPr>
         <p:spPr>
           <a:xfrm>
-            <a:off x="3220974" y="1389888"/>
-            <a:ext cx="36576" cy="36576"/>
-          </a:xfrm>
-          <a:prstGeom prst="rect">
-            <a:avLst/>
-          </a:prstGeom>
-          <a:solidFill>
-            <a:srgbClr val="90A4AE"/>
+            <a:off x="3220974" y="1110996"/>
+            <a:ext cx="2754629" cy="7315"/>
+          </a:xfrm>
+          <a:prstGeom prst="rect">
+            <a:avLst/>
+          </a:prstGeom>
+          <a:solidFill>
+            <a:srgbClr val="D0D5DD"/>
           </a:solidFill>
           <a:ln>
             <a:noFill/>
@@ -5829,14 +5778,14 @@
       </p:sp>
       <p:sp>
         <p:nvSpPr>
-          <p:cNvPr id="71" name="TextBox 70"/>
+          <p:cNvPr id="70" name="TextBox 69"/>
           <p:cNvSpPr txBox="1"/>
           <p:nvPr/>
         </p:nvSpPr>
         <p:spPr>
           <a:xfrm>
-            <a:off x="3284982" y="1339596"/>
-            <a:ext cx="2681478" cy="150875"/>
+            <a:off x="3239262" y="1138428"/>
+            <a:ext cx="2718053" cy="132588"/>
           </a:xfrm>
           <a:prstGeom prst="rect">
             <a:avLst/>
@@ -5851,33 +5800,33 @@
           <a:p>
             <a:pPr algn="l"/>
             <a:r>
-              <a:rPr sz="750" b="0" i="0">
-                <a:solidFill>
-                  <a:srgbClr val="333333"/>
+              <a:rPr sz="700" b="1" i="0">
+                <a:solidFill>
+                  <a:srgbClr val="37474F"/>
                 </a:solidFill>
                 <a:latin typeface="Segoe UI"/>
               </a:rPr>
-              <a:t>Fixed content on welcome page &amp; fun fact page</a:t>
-            </a:r>
-          </a:p>
-        </p:txBody>
-      </p:sp>
-      <p:sp>
-        <p:nvSpPr>
-          <p:cNvPr id="72" name="Rectangle 71"/>
+              <a:t>COMPLETED</a:t>
+            </a:r>
+          </a:p>
+        </p:txBody>
+      </p:sp>
+      <p:sp>
+        <p:nvSpPr>
+          <p:cNvPr id="71" name="Rectangle 70"/>
           <p:cNvSpPr/>
           <p:nvPr/>
         </p:nvSpPr>
         <p:spPr>
           <a:xfrm>
-            <a:off x="3220974" y="1522476"/>
-            <a:ext cx="36576" cy="36576"/>
-          </a:xfrm>
-          <a:prstGeom prst="rect">
-            <a:avLst/>
-          </a:prstGeom>
-          <a:solidFill>
-            <a:srgbClr val="90A4AE"/>
+            <a:off x="3294126" y="1339596"/>
+            <a:ext cx="29260" cy="29260"/>
+          </a:xfrm>
+          <a:prstGeom prst="rect">
+            <a:avLst/>
+          </a:prstGeom>
+          <a:solidFill>
+            <a:srgbClr val="D0D5DD"/>
           </a:solidFill>
           <a:ln>
             <a:noFill/>
@@ -5907,14 +5856,14 @@
       </p:sp>
       <p:sp>
         <p:nvSpPr>
-          <p:cNvPr id="73" name="TextBox 72"/>
+          <p:cNvPr id="72" name="TextBox 71"/>
           <p:cNvSpPr txBox="1"/>
           <p:nvPr/>
         </p:nvSpPr>
         <p:spPr>
           <a:xfrm>
-            <a:off x="3284982" y="1472184"/>
-            <a:ext cx="2681478" cy="150875"/>
+            <a:off x="3358134" y="1289304"/>
+            <a:ext cx="2590038" cy="153619"/>
           </a:xfrm>
           <a:prstGeom prst="rect">
             <a:avLst/>
@@ -5931,31 +5880,31 @@
             <a:r>
               <a:rPr sz="750" b="0" i="0">
                 <a:solidFill>
-                  <a:srgbClr val="333333"/>
+                  <a:srgbClr val="444444"/>
                 </a:solidFill>
                 <a:latin typeface="Segoe UI"/>
               </a:rPr>
-              <a:t>Resolved spacing issues in user questionnaire</a:t>
-            </a:r>
-          </a:p>
-        </p:txBody>
-      </p:sp>
-      <p:sp>
-        <p:nvSpPr>
-          <p:cNvPr id="74" name="Rectangle 73"/>
+              <a:t>Fixed content on welcome page &amp; fun fact page</a:t>
+            </a:r>
+          </a:p>
+        </p:txBody>
+      </p:sp>
+      <p:sp>
+        <p:nvSpPr>
+          <p:cNvPr id="73" name="Rectangle 72"/>
           <p:cNvSpPr/>
           <p:nvPr/>
         </p:nvSpPr>
         <p:spPr>
           <a:xfrm>
-            <a:off x="3220974" y="1655064"/>
-            <a:ext cx="36576" cy="36576"/>
-          </a:xfrm>
-          <a:prstGeom prst="rect">
-            <a:avLst/>
-          </a:prstGeom>
-          <a:solidFill>
-            <a:srgbClr val="90A4AE"/>
+            <a:off x="3294126" y="1474927"/>
+            <a:ext cx="29260" cy="29260"/>
+          </a:xfrm>
+          <a:prstGeom prst="rect">
+            <a:avLst/>
+          </a:prstGeom>
+          <a:solidFill>
+            <a:srgbClr val="D0D5DD"/>
           </a:solidFill>
           <a:ln>
             <a:noFill/>
@@ -5985,14 +5934,14 @@
       </p:sp>
       <p:sp>
         <p:nvSpPr>
-          <p:cNvPr id="75" name="TextBox 74"/>
+          <p:cNvPr id="74" name="TextBox 73"/>
           <p:cNvSpPr txBox="1"/>
           <p:nvPr/>
         </p:nvSpPr>
         <p:spPr>
           <a:xfrm>
-            <a:off x="3284982" y="1604772"/>
-            <a:ext cx="2681478" cy="150875"/>
+            <a:off x="3358134" y="1424635"/>
+            <a:ext cx="2590038" cy="153619"/>
           </a:xfrm>
           <a:prstGeom prst="rect">
             <a:avLst/>
@@ -6009,31 +5958,31 @@
             <a:r>
               <a:rPr sz="750" b="0" i="0">
                 <a:solidFill>
-                  <a:srgbClr val="333333"/>
+                  <a:srgbClr val="444444"/>
                 </a:solidFill>
                 <a:latin typeface="Segoe UI"/>
               </a:rPr>
-              <a:t>Restored back button on Additional Resources page</a:t>
-            </a:r>
-          </a:p>
-        </p:txBody>
-      </p:sp>
-      <p:sp>
-        <p:nvSpPr>
-          <p:cNvPr id="76" name="Rectangle 75"/>
+              <a:t>Resolved spacing issues in user questionnaire</a:t>
+            </a:r>
+          </a:p>
+        </p:txBody>
+      </p:sp>
+      <p:sp>
+        <p:nvSpPr>
+          <p:cNvPr id="75" name="Rectangle 74"/>
           <p:cNvSpPr/>
           <p:nvPr/>
         </p:nvSpPr>
         <p:spPr>
           <a:xfrm>
-            <a:off x="3220974" y="1787652"/>
-            <a:ext cx="36576" cy="36576"/>
-          </a:xfrm>
-          <a:prstGeom prst="rect">
-            <a:avLst/>
-          </a:prstGeom>
-          <a:solidFill>
-            <a:srgbClr val="90A4AE"/>
+            <a:off x="3294126" y="1610258"/>
+            <a:ext cx="29260" cy="29260"/>
+          </a:xfrm>
+          <a:prstGeom prst="rect">
+            <a:avLst/>
+          </a:prstGeom>
+          <a:solidFill>
+            <a:srgbClr val="D0D5DD"/>
           </a:solidFill>
           <a:ln>
             <a:noFill/>
@@ -6063,14 +6012,14 @@
       </p:sp>
       <p:sp>
         <p:nvSpPr>
-          <p:cNvPr id="77" name="TextBox 76"/>
+          <p:cNvPr id="76" name="TextBox 75"/>
           <p:cNvSpPr txBox="1"/>
           <p:nvPr/>
         </p:nvSpPr>
         <p:spPr>
           <a:xfrm>
-            <a:off x="3284982" y="1737360"/>
-            <a:ext cx="2681478" cy="150875"/>
+            <a:off x="3358134" y="1559966"/>
+            <a:ext cx="2590038" cy="153619"/>
           </a:xfrm>
           <a:prstGeom prst="rect">
             <a:avLst/>
@@ -6087,36 +6036,34 @@
             <a:r>
               <a:rPr sz="750" b="0" i="0">
                 <a:solidFill>
-                  <a:srgbClr val="333333"/>
+                  <a:srgbClr val="444444"/>
                 </a:solidFill>
                 <a:latin typeface="Segoe UI"/>
               </a:rPr>
-              <a:t>Resolved mobile Stage testing observations</a:t>
-            </a:r>
-          </a:p>
-        </p:txBody>
-      </p:sp>
-      <p:sp>
-        <p:nvSpPr>
-          <p:cNvPr id="78" name="Rectangle 77"/>
+              <a:t>Restored back button on Additional Resources page</a:t>
+            </a:r>
+          </a:p>
+        </p:txBody>
+      </p:sp>
+      <p:sp>
+        <p:nvSpPr>
+          <p:cNvPr id="77" name="Rectangle 76"/>
           <p:cNvSpPr/>
           <p:nvPr/>
         </p:nvSpPr>
         <p:spPr>
           <a:xfrm>
-            <a:off x="3166110" y="1906524"/>
-            <a:ext cx="749808" cy="141732"/>
-          </a:xfrm>
-          <a:prstGeom prst="rect">
-            <a:avLst/>
-          </a:prstGeom>
-          <a:solidFill>
-            <a:srgbClr val="FFF8E1"/>
-          </a:solidFill>
-          <a:ln w="6350">
-            <a:solidFill>
-              <a:srgbClr val="FFF8E1"/>
-            </a:solidFill>
+            <a:off x="3294126" y="1745589"/>
+            <a:ext cx="29260" cy="29260"/>
+          </a:xfrm>
+          <a:prstGeom prst="rect">
+            <a:avLst/>
+          </a:prstGeom>
+          <a:solidFill>
+            <a:srgbClr val="D0D5DD"/>
+          </a:solidFill>
+          <a:ln>
+            <a:noFill/>
           </a:ln>
         </p:spPr>
         <p:style>
@@ -6143,14 +6090,14 @@
       </p:sp>
       <p:sp>
         <p:nvSpPr>
-          <p:cNvPr id="79" name="TextBox 78"/>
+          <p:cNvPr id="78" name="TextBox 77"/>
           <p:cNvSpPr txBox="1"/>
           <p:nvPr/>
         </p:nvSpPr>
         <p:spPr>
           <a:xfrm>
-            <a:off x="3175253" y="1915667"/>
-            <a:ext cx="731520" cy="128016"/>
+            <a:off x="3358134" y="1695297"/>
+            <a:ext cx="2590038" cy="153619"/>
           </a:xfrm>
           <a:prstGeom prst="rect">
             <a:avLst/>
@@ -6165,13 +6112,48 @@
           <a:p>
             <a:pPr algn="l"/>
             <a:r>
-              <a:rPr sz="650" b="1" i="0">
-                <a:solidFill>
-                  <a:srgbClr val="F57F17"/>
+              <a:rPr sz="750" b="0" i="0">
+                <a:solidFill>
+                  <a:srgbClr val="444444"/>
                 </a:solidFill>
                 <a:latin typeface="Segoe UI"/>
               </a:rPr>
-              <a:t>⚙ In QA</a:t>
+              <a:t>Resolved mobile Stage testing observations</a:t>
+            </a:r>
+          </a:p>
+        </p:txBody>
+      </p:sp>
+      <p:sp>
+        <p:nvSpPr>
+          <p:cNvPr id="79" name="TextBox 78"/>
+          <p:cNvSpPr txBox="1"/>
+          <p:nvPr/>
+        </p:nvSpPr>
+        <p:spPr>
+          <a:xfrm>
+            <a:off x="3239262" y="1867204"/>
+            <a:ext cx="2718053" cy="132588"/>
+          </a:xfrm>
+          <a:prstGeom prst="rect">
+            <a:avLst/>
+          </a:prstGeom>
+          <a:noFill/>
+        </p:spPr>
+        <p:txBody>
+          <a:bodyPr wrap="square">
+            <a:spAutoFit/>
+          </a:bodyPr>
+          <a:lstStyle/>
+          <a:p>
+            <a:pPr algn="l"/>
+            <a:r>
+              <a:rPr sz="700" b="1" i="0">
+                <a:solidFill>
+                  <a:srgbClr val="37474F"/>
+                </a:solidFill>
+                <a:latin typeface="Segoe UI"/>
+              </a:rPr>
+              <a:t>IN QA</a:t>
             </a:r>
           </a:p>
         </p:txBody>
@@ -6184,14 +6166,14 @@
         </p:nvSpPr>
         <p:spPr>
           <a:xfrm>
-            <a:off x="3220974" y="2116836"/>
-            <a:ext cx="36576" cy="36576"/>
-          </a:xfrm>
-          <a:prstGeom prst="rect">
-            <a:avLst/>
-          </a:prstGeom>
-          <a:solidFill>
-            <a:srgbClr val="90A4AE"/>
+            <a:off x="3294126" y="2068372"/>
+            <a:ext cx="29260" cy="29260"/>
+          </a:xfrm>
+          <a:prstGeom prst="rect">
+            <a:avLst/>
+          </a:prstGeom>
+          <a:solidFill>
+            <a:srgbClr val="D0D5DD"/>
           </a:solidFill>
           <a:ln>
             <a:noFill/>
@@ -6227,8 +6209,8 @@
         </p:nvSpPr>
         <p:spPr>
           <a:xfrm>
-            <a:off x="3284982" y="2066543"/>
-            <a:ext cx="2681478" cy="150875"/>
+            <a:off x="3358134" y="2018080"/>
+            <a:ext cx="2590038" cy="153619"/>
           </a:xfrm>
           <a:prstGeom prst="rect">
             <a:avLst/>
@@ -6245,7 +6227,7 @@
             <a:r>
               <a:rPr sz="750" b="0" i="0">
                 <a:solidFill>
-                  <a:srgbClr val="333333"/>
+                  <a:srgbClr val="444444"/>
                 </a:solidFill>
                 <a:latin typeface="Segoe UI"/>
               </a:rPr>
@@ -6262,14 +6244,14 @@
         </p:nvSpPr>
         <p:spPr>
           <a:xfrm>
-            <a:off x="3220974" y="2249424"/>
-            <a:ext cx="36576" cy="36576"/>
-          </a:xfrm>
-          <a:prstGeom prst="rect">
-            <a:avLst/>
-          </a:prstGeom>
-          <a:solidFill>
-            <a:srgbClr val="90A4AE"/>
+            <a:off x="3294126" y="2203704"/>
+            <a:ext cx="29260" cy="29260"/>
+          </a:xfrm>
+          <a:prstGeom prst="rect">
+            <a:avLst/>
+          </a:prstGeom>
+          <a:solidFill>
+            <a:srgbClr val="D0D5DD"/>
           </a:solidFill>
           <a:ln>
             <a:noFill/>
@@ -6305,8 +6287,8 @@
         </p:nvSpPr>
         <p:spPr>
           <a:xfrm>
-            <a:off x="3284982" y="2199132"/>
-            <a:ext cx="2681478" cy="150875"/>
+            <a:off x="3358134" y="2153412"/>
+            <a:ext cx="2590038" cy="153619"/>
           </a:xfrm>
           <a:prstGeom prst="rect">
             <a:avLst/>
@@ -6323,7 +6305,7 @@
             <a:r>
               <a:rPr sz="750" b="0" i="0">
                 <a:solidFill>
-                  <a:srgbClr val="333333"/>
+                  <a:srgbClr val="444444"/>
                 </a:solidFill>
                 <a:latin typeface="Segoe UI"/>
               </a:rPr>
@@ -6340,14 +6322,14 @@
         </p:nvSpPr>
         <p:spPr>
           <a:xfrm>
-            <a:off x="3220974" y="2382012"/>
-            <a:ext cx="36576" cy="36576"/>
-          </a:xfrm>
-          <a:prstGeom prst="rect">
-            <a:avLst/>
-          </a:prstGeom>
-          <a:solidFill>
-            <a:srgbClr val="90A4AE"/>
+            <a:off x="3294126" y="2339035"/>
+            <a:ext cx="29260" cy="29260"/>
+          </a:xfrm>
+          <a:prstGeom prst="rect">
+            <a:avLst/>
+          </a:prstGeom>
+          <a:solidFill>
+            <a:srgbClr val="D0D5DD"/>
           </a:solidFill>
           <a:ln>
             <a:noFill/>
@@ -6383,8 +6365,8 @@
         </p:nvSpPr>
         <p:spPr>
           <a:xfrm>
-            <a:off x="3284982" y="2331720"/>
-            <a:ext cx="2681478" cy="150875"/>
+            <a:off x="3358134" y="2288743"/>
+            <a:ext cx="2590038" cy="153619"/>
           </a:xfrm>
           <a:prstGeom prst="rect">
             <a:avLst/>
@@ -6401,7 +6383,7 @@
             <a:r>
               <a:rPr sz="750" b="0" i="0">
                 <a:solidFill>
-                  <a:srgbClr val="333333"/>
+                  <a:srgbClr val="444444"/>
                 </a:solidFill>
                 <a:latin typeface="Segoe UI"/>
               </a:rPr>
@@ -6412,25 +6394,58 @@
       </p:sp>
       <p:sp>
         <p:nvSpPr>
-          <p:cNvPr id="86" name="Rectangle 85"/>
+          <p:cNvPr id="86" name="TextBox 85"/>
+          <p:cNvSpPr txBox="1"/>
+          <p:nvPr/>
+        </p:nvSpPr>
+        <p:spPr>
+          <a:xfrm>
+            <a:off x="3239262" y="2460650"/>
+            <a:ext cx="2718053" cy="132588"/>
+          </a:xfrm>
+          <a:prstGeom prst="rect">
+            <a:avLst/>
+          </a:prstGeom>
+          <a:noFill/>
+        </p:spPr>
+        <p:txBody>
+          <a:bodyPr wrap="square">
+            <a:spAutoFit/>
+          </a:bodyPr>
+          <a:lstStyle/>
+          <a:p>
+            <a:pPr algn="l"/>
+            <a:r>
+              <a:rPr sz="700" b="1" i="0">
+                <a:solidFill>
+                  <a:srgbClr val="37474F"/>
+                </a:solidFill>
+                <a:latin typeface="Segoe UI"/>
+              </a:rPr>
+              <a:t>IN PROGRESS</a:t>
+            </a:r>
+          </a:p>
+        </p:txBody>
+      </p:sp>
+      <p:sp>
+        <p:nvSpPr>
+          <p:cNvPr id="87" name="Rectangle 86"/>
           <p:cNvSpPr/>
           <p:nvPr/>
         </p:nvSpPr>
         <p:spPr>
           <a:xfrm>
-            <a:off x="3166110" y="2500884"/>
-            <a:ext cx="749808" cy="141732"/>
-          </a:xfrm>
-          <a:prstGeom prst="rect">
-            <a:avLst/>
-          </a:prstGeom>
-          <a:solidFill>
-            <a:srgbClr val="E3F2FD"/>
-          </a:solidFill>
-          <a:ln w="6350">
-            <a:solidFill>
-              <a:srgbClr val="E3F2FD"/>
-            </a:solidFill>
+            <a:off x="3294126" y="2661818"/>
+            <a:ext cx="29260" cy="29260"/>
+          </a:xfrm>
+          <a:prstGeom prst="rect">
+            <a:avLst/>
+          </a:prstGeom>
+          <a:solidFill>
+            <a:srgbClr val="D0D5DD"/>
+          </a:solidFill>
+          <a:ln>
+            <a:noFill/>
           </a:ln>
         </p:spPr>
         <p:style>
@@ -6457,14 +6472,14 @@
       </p:sp>
       <p:sp>
         <p:nvSpPr>
-          <p:cNvPr id="87" name="TextBox 86"/>
+          <p:cNvPr id="88" name="TextBox 87"/>
           <p:cNvSpPr txBox="1"/>
           <p:nvPr/>
         </p:nvSpPr>
         <p:spPr>
           <a:xfrm>
-            <a:off x="3175253" y="2510027"/>
-            <a:ext cx="731520" cy="128016"/>
+            <a:off x="3358134" y="2611526"/>
+            <a:ext cx="2590038" cy="153619"/>
           </a:xfrm>
           <a:prstGeom prst="rect">
             <a:avLst/>
@@ -6479,33 +6494,33 @@
           <a:p>
             <a:pPr algn="l"/>
             <a:r>
-              <a:rPr sz="650" b="1" i="0">
-                <a:solidFill>
-                  <a:srgbClr val="0D47A1"/>
+              <a:rPr sz="750" b="0" i="0">
+                <a:solidFill>
+                  <a:srgbClr val="444444"/>
                 </a:solidFill>
                 <a:latin typeface="Segoe UI"/>
               </a:rPr>
-              <a:t>⟳ In Progress</a:t>
-            </a:r>
-          </a:p>
-        </p:txBody>
-      </p:sp>
-      <p:sp>
-        <p:nvSpPr>
-          <p:cNvPr id="88" name="Rectangle 87"/>
+              <a:t>User Journey deployment to Preprod &amp; Production</a:t>
+            </a:r>
+          </a:p>
+        </p:txBody>
+      </p:sp>
+      <p:sp>
+        <p:nvSpPr>
+          <p:cNvPr id="89" name="Rectangle 88"/>
           <p:cNvSpPr/>
           <p:nvPr/>
         </p:nvSpPr>
         <p:spPr>
           <a:xfrm>
-            <a:off x="3220974" y="2711196"/>
-            <a:ext cx="36576" cy="36576"/>
-          </a:xfrm>
-          <a:prstGeom prst="rect">
-            <a:avLst/>
-          </a:prstGeom>
-          <a:solidFill>
-            <a:srgbClr val="90A4AE"/>
+            <a:off x="3294126" y="2797149"/>
+            <a:ext cx="29260" cy="29260"/>
+          </a:xfrm>
+          <a:prstGeom prst="rect">
+            <a:avLst/>
+          </a:prstGeom>
+          <a:solidFill>
+            <a:srgbClr val="D0D5DD"/>
           </a:solidFill>
           <a:ln>
             <a:noFill/>
@@ -6535,14 +6550,14 @@
       </p:sp>
       <p:sp>
         <p:nvSpPr>
-          <p:cNvPr id="89" name="TextBox 88"/>
+          <p:cNvPr id="90" name="TextBox 89"/>
           <p:cNvSpPr txBox="1"/>
           <p:nvPr/>
         </p:nvSpPr>
         <p:spPr>
           <a:xfrm>
-            <a:off x="3284982" y="2660903"/>
-            <a:ext cx="2681478" cy="150875"/>
+            <a:off x="3358134" y="2746857"/>
+            <a:ext cx="2590038" cy="153619"/>
           </a:xfrm>
           <a:prstGeom prst="rect">
             <a:avLst/>
@@ -6559,31 +6574,66 @@
             <a:r>
               <a:rPr sz="750" b="0" i="0">
                 <a:solidFill>
-                  <a:srgbClr val="333333"/>
+                  <a:srgbClr val="444444"/>
                 </a:solidFill>
                 <a:latin typeface="Segoe UI"/>
               </a:rPr>
-              <a:t>User Journey deployment to Preprod &amp; Production</a:t>
-            </a:r>
-          </a:p>
-        </p:txBody>
-      </p:sp>
-      <p:sp>
-        <p:nvSpPr>
-          <p:cNvPr id="90" name="Rectangle 89"/>
+              <a:t>Backend logger error resolution in ToothScan service</a:t>
+            </a:r>
+          </a:p>
+        </p:txBody>
+      </p:sp>
+      <p:sp>
+        <p:nvSpPr>
+          <p:cNvPr id="91" name="TextBox 90"/>
+          <p:cNvSpPr txBox="1"/>
+          <p:nvPr/>
+        </p:nvSpPr>
+        <p:spPr>
+          <a:xfrm>
+            <a:off x="3239262" y="2918764"/>
+            <a:ext cx="2718053" cy="132588"/>
+          </a:xfrm>
+          <a:prstGeom prst="rect">
+            <a:avLst/>
+          </a:prstGeom>
+          <a:noFill/>
+        </p:spPr>
+        <p:txBody>
+          <a:bodyPr wrap="square">
+            <a:spAutoFit/>
+          </a:bodyPr>
+          <a:lstStyle/>
+          <a:p>
+            <a:pPr algn="l"/>
+            <a:r>
+              <a:rPr sz="700" b="1" i="0">
+                <a:solidFill>
+                  <a:srgbClr val="37474F"/>
+                </a:solidFill>
+                <a:latin typeface="Segoe UI"/>
+              </a:rPr>
+              <a:t>PLANNED</a:t>
+            </a:r>
+          </a:p>
+        </p:txBody>
+      </p:sp>
+      <p:sp>
+        <p:nvSpPr>
+          <p:cNvPr id="92" name="Rectangle 91"/>
           <p:cNvSpPr/>
           <p:nvPr/>
         </p:nvSpPr>
         <p:spPr>
           <a:xfrm>
-            <a:off x="3220974" y="2843784"/>
-            <a:ext cx="36576" cy="36576"/>
-          </a:xfrm>
-          <a:prstGeom prst="rect">
-            <a:avLst/>
-          </a:prstGeom>
-          <a:solidFill>
-            <a:srgbClr val="90A4AE"/>
+            <a:off x="3294126" y="3119932"/>
+            <a:ext cx="29260" cy="29260"/>
+          </a:xfrm>
+          <a:prstGeom prst="rect">
+            <a:avLst/>
+          </a:prstGeom>
+          <a:solidFill>
+            <a:srgbClr val="D0D5DD"/>
           </a:solidFill>
           <a:ln>
             <a:noFill/>
@@ -6613,14 +6663,14 @@
       </p:sp>
       <p:sp>
         <p:nvSpPr>
-          <p:cNvPr id="91" name="TextBox 90"/>
+          <p:cNvPr id="93" name="TextBox 92"/>
           <p:cNvSpPr txBox="1"/>
           <p:nvPr/>
         </p:nvSpPr>
         <p:spPr>
           <a:xfrm>
-            <a:off x="3284982" y="2793491"/>
-            <a:ext cx="2681478" cy="150875"/>
+            <a:off x="3358134" y="3069640"/>
+            <a:ext cx="2590038" cy="153619"/>
           </a:xfrm>
           <a:prstGeom prst="rect">
             <a:avLst/>
@@ -6637,36 +6687,34 @@
             <a:r>
               <a:rPr sz="750" b="0" i="0">
                 <a:solidFill>
-                  <a:srgbClr val="333333"/>
+                  <a:srgbClr val="444444"/>
                 </a:solidFill>
                 <a:latin typeface="Segoe UI"/>
               </a:rPr>
-              <a:t>Backend logger error resolution in ToothScan service</a:t>
-            </a:r>
-          </a:p>
-        </p:txBody>
-      </p:sp>
-      <p:sp>
-        <p:nvSpPr>
-          <p:cNvPr id="92" name="Rectangle 91"/>
+              <a:t>Updated image upload error screens (new Figma designs)</a:t>
+            </a:r>
+          </a:p>
+        </p:txBody>
+      </p:sp>
+      <p:sp>
+        <p:nvSpPr>
+          <p:cNvPr id="94" name="Rectangle 93"/>
           <p:cNvSpPr/>
           <p:nvPr/>
         </p:nvSpPr>
         <p:spPr>
           <a:xfrm>
-            <a:off x="3166110" y="2962656"/>
-            <a:ext cx="749808" cy="141732"/>
-          </a:xfrm>
-          <a:prstGeom prst="rect">
-            <a:avLst/>
-          </a:prstGeom>
-          <a:solidFill>
-            <a:srgbClr val="F3E5F5"/>
-          </a:solidFill>
-          <a:ln w="6350">
-            <a:solidFill>
-              <a:srgbClr val="F3E5F5"/>
-            </a:solidFill>
+            <a:off x="3294126" y="3255264"/>
+            <a:ext cx="29260" cy="29260"/>
+          </a:xfrm>
+          <a:prstGeom prst="rect">
+            <a:avLst/>
+          </a:prstGeom>
+          <a:solidFill>
+            <a:srgbClr val="D0D5DD"/>
+          </a:solidFill>
+          <a:ln>
+            <a:noFill/>
           </a:ln>
         </p:spPr>
         <p:style>
@@ -6693,14 +6741,14 @@
       </p:sp>
       <p:sp>
         <p:nvSpPr>
-          <p:cNvPr id="93" name="TextBox 92"/>
+          <p:cNvPr id="95" name="TextBox 94"/>
           <p:cNvSpPr txBox="1"/>
           <p:nvPr/>
         </p:nvSpPr>
         <p:spPr>
           <a:xfrm>
-            <a:off x="3175253" y="2971799"/>
-            <a:ext cx="731520" cy="128016"/>
+            <a:off x="3358134" y="3204972"/>
+            <a:ext cx="2590038" cy="153619"/>
           </a:xfrm>
           <a:prstGeom prst="rect">
             <a:avLst/>
@@ -6715,33 +6763,33 @@
           <a:p>
             <a:pPr algn="l"/>
             <a:r>
-              <a:rPr sz="650" b="1" i="0">
-                <a:solidFill>
-                  <a:srgbClr val="4A148C"/>
+              <a:rPr sz="750" b="0" i="0">
+                <a:solidFill>
+                  <a:srgbClr val="444444"/>
                 </a:solidFill>
                 <a:latin typeface="Segoe UI"/>
               </a:rPr>
-              <a:t>◷ Planned</a:t>
-            </a:r>
-          </a:p>
-        </p:txBody>
-      </p:sp>
-      <p:sp>
-        <p:nvSpPr>
-          <p:cNvPr id="94" name="Rectangle 93"/>
+              <a:t>Validation messages display fix on preview screen</a:t>
+            </a:r>
+          </a:p>
+        </p:txBody>
+      </p:sp>
+      <p:sp>
+        <p:nvSpPr>
+          <p:cNvPr id="96" name="Rectangle 95"/>
           <p:cNvSpPr/>
           <p:nvPr/>
         </p:nvSpPr>
         <p:spPr>
           <a:xfrm>
-            <a:off x="3220974" y="3172968"/>
-            <a:ext cx="36576" cy="36576"/>
-          </a:xfrm>
-          <a:prstGeom prst="rect">
-            <a:avLst/>
-          </a:prstGeom>
-          <a:solidFill>
-            <a:srgbClr val="90A4AE"/>
+            <a:off x="3294126" y="3390595"/>
+            <a:ext cx="29260" cy="29260"/>
+          </a:xfrm>
+          <a:prstGeom prst="rect">
+            <a:avLst/>
+          </a:prstGeom>
+          <a:solidFill>
+            <a:srgbClr val="D0D5DD"/>
           </a:solidFill>
           <a:ln>
             <a:noFill/>
@@ -6771,14 +6819,14 @@
       </p:sp>
       <p:sp>
         <p:nvSpPr>
-          <p:cNvPr id="95" name="TextBox 94"/>
+          <p:cNvPr id="97" name="TextBox 96"/>
           <p:cNvSpPr txBox="1"/>
           <p:nvPr/>
         </p:nvSpPr>
         <p:spPr>
           <a:xfrm>
-            <a:off x="3284982" y="3122675"/>
-            <a:ext cx="2681478" cy="150875"/>
+            <a:off x="3358134" y="3340303"/>
+            <a:ext cx="2590038" cy="153619"/>
           </a:xfrm>
           <a:prstGeom prst="rect">
             <a:avLst/>
@@ -6795,31 +6843,31 @@
             <a:r>
               <a:rPr sz="750" b="0" i="0">
                 <a:solidFill>
-                  <a:srgbClr val="333333"/>
+                  <a:srgbClr val="444444"/>
                 </a:solidFill>
                 <a:latin typeface="Segoe UI"/>
               </a:rPr>
-              <a:t>Updated image upload error screens (new Figma designs)</a:t>
-            </a:r>
-          </a:p>
-        </p:txBody>
-      </p:sp>
-      <p:sp>
-        <p:nvSpPr>
-          <p:cNvPr id="96" name="Rectangle 95"/>
+              <a:t>Image Not Found error handling on user submission</a:t>
+            </a:r>
+          </a:p>
+        </p:txBody>
+      </p:sp>
+      <p:sp>
+        <p:nvSpPr>
+          <p:cNvPr id="98" name="Rectangle 97"/>
           <p:cNvSpPr/>
           <p:nvPr/>
         </p:nvSpPr>
         <p:spPr>
           <a:xfrm>
-            <a:off x="3220974" y="3305556"/>
-            <a:ext cx="36576" cy="36576"/>
-          </a:xfrm>
-          <a:prstGeom prst="rect">
-            <a:avLst/>
-          </a:prstGeom>
-          <a:solidFill>
-            <a:srgbClr val="90A4AE"/>
+            <a:off x="3294126" y="3525926"/>
+            <a:ext cx="29260" cy="29260"/>
+          </a:xfrm>
+          <a:prstGeom prst="rect">
+            <a:avLst/>
+          </a:prstGeom>
+          <a:solidFill>
+            <a:srgbClr val="D0D5DD"/>
           </a:solidFill>
           <a:ln>
             <a:noFill/>
@@ -6849,14 +6897,14 @@
       </p:sp>
       <p:sp>
         <p:nvSpPr>
-          <p:cNvPr id="97" name="TextBox 96"/>
+          <p:cNvPr id="99" name="TextBox 98"/>
           <p:cNvSpPr txBox="1"/>
           <p:nvPr/>
         </p:nvSpPr>
         <p:spPr>
           <a:xfrm>
-            <a:off x="3284982" y="3255263"/>
-            <a:ext cx="2681478" cy="150875"/>
+            <a:off x="3358134" y="3475634"/>
+            <a:ext cx="2590038" cy="153619"/>
           </a:xfrm>
           <a:prstGeom prst="rect">
             <a:avLst/>
@@ -6873,31 +6921,66 @@
             <a:r>
               <a:rPr sz="750" b="0" i="0">
                 <a:solidFill>
-                  <a:srgbClr val="333333"/>
+                  <a:srgbClr val="444444"/>
                 </a:solidFill>
                 <a:latin typeface="Segoe UI"/>
               </a:rPr>
-              <a:t>Validation messages display fix on preview screen</a:t>
-            </a:r>
-          </a:p>
-        </p:txBody>
-      </p:sp>
-      <p:sp>
-        <p:nvSpPr>
-          <p:cNvPr id="98" name="Rectangle 97"/>
+              <a:t>Clickable option display correction on preview screen</a:t>
+            </a:r>
+          </a:p>
+        </p:txBody>
+      </p:sp>
+      <p:sp>
+        <p:nvSpPr>
+          <p:cNvPr id="100" name="TextBox 99"/>
+          <p:cNvSpPr txBox="1"/>
+          <p:nvPr/>
+        </p:nvSpPr>
+        <p:spPr>
+          <a:xfrm>
+            <a:off x="6176772" y="676656"/>
+            <a:ext cx="2882646" cy="182880"/>
+          </a:xfrm>
+          <a:prstGeom prst="rect">
+            <a:avLst/>
+          </a:prstGeom>
+          <a:noFill/>
+        </p:spPr>
+        <p:txBody>
+          <a:bodyPr wrap="square">
+            <a:spAutoFit/>
+          </a:bodyPr>
+          <a:lstStyle/>
+          <a:p>
+            <a:pPr algn="l"/>
+            <a:r>
+              <a:rPr sz="700" b="1" i="0">
+                <a:solidFill>
+                  <a:srgbClr val="37474F"/>
+                </a:solidFill>
+                <a:latin typeface="Segoe UI"/>
+              </a:rPr>
+              <a:t>Feedback, Migration &amp; Platform</a:t>
+            </a:r>
+          </a:p>
+        </p:txBody>
+      </p:sp>
+      <p:sp>
+        <p:nvSpPr>
+          <p:cNvPr id="101" name="Rectangle 100"/>
           <p:cNvSpPr/>
           <p:nvPr/>
         </p:nvSpPr>
         <p:spPr>
           <a:xfrm>
-            <a:off x="3220974" y="3438144"/>
-            <a:ext cx="36576" cy="36576"/>
-          </a:xfrm>
-          <a:prstGeom prst="rect">
-            <a:avLst/>
-          </a:prstGeom>
-          <a:solidFill>
-            <a:srgbClr val="90A4AE"/>
+            <a:off x="6176772" y="868680"/>
+            <a:ext cx="2882646" cy="10972"/>
+          </a:xfrm>
+          <a:prstGeom prst="rect">
+            <a:avLst/>
+          </a:prstGeom>
+          <a:solidFill>
+            <a:srgbClr val="D0D5DD"/>
           </a:solidFill>
           <a:ln>
             <a:noFill/>
@@ -6927,58 +7010,25 @@
       </p:sp>
       <p:sp>
         <p:nvSpPr>
-          <p:cNvPr id="99" name="TextBox 98"/>
-          <p:cNvSpPr txBox="1"/>
-          <p:nvPr/>
-        </p:nvSpPr>
-        <p:spPr>
-          <a:xfrm>
-            <a:off x="3284982" y="3387851"/>
-            <a:ext cx="2681478" cy="150875"/>
-          </a:xfrm>
-          <a:prstGeom prst="rect">
-            <a:avLst/>
-          </a:prstGeom>
-          <a:noFill/>
-        </p:spPr>
-        <p:txBody>
-          <a:bodyPr wrap="square">
-            <a:spAutoFit/>
-          </a:bodyPr>
-          <a:lstStyle/>
-          <a:p>
-            <a:pPr algn="l"/>
-            <a:r>
-              <a:rPr sz="750" b="0" i="0">
-                <a:solidFill>
-                  <a:srgbClr val="333333"/>
-                </a:solidFill>
-                <a:latin typeface="Segoe UI"/>
-              </a:rPr>
-              <a:t>Image Not Found error handling on user submission</a:t>
-            </a:r>
-          </a:p>
-        </p:txBody>
-      </p:sp>
-      <p:sp>
-        <p:nvSpPr>
-          <p:cNvPr id="100" name="Rectangle 99"/>
+          <p:cNvPr id="102" name="Rectangle 101"/>
           <p:cNvSpPr/>
           <p:nvPr/>
         </p:nvSpPr>
         <p:spPr>
           <a:xfrm>
-            <a:off x="3220974" y="3570732"/>
-            <a:ext cx="36576" cy="36576"/>
-          </a:xfrm>
-          <a:prstGeom prst="rect">
-            <a:avLst/>
-          </a:prstGeom>
-          <a:solidFill>
-            <a:srgbClr val="90A4AE"/>
-          </a:solidFill>
-          <a:ln>
-            <a:noFill/>
+            <a:off x="6176772" y="923544"/>
+            <a:ext cx="2882646" cy="1321307"/>
+          </a:xfrm>
+          <a:prstGeom prst="rect">
+            <a:avLst/>
+          </a:prstGeom>
+          <a:solidFill>
+            <a:srgbClr val="FFFFFF"/>
+          </a:solidFill>
+          <a:ln w="6350">
+            <a:solidFill>
+              <a:srgbClr val="D0D5DD"/>
+            </a:solidFill>
           </a:ln>
         </p:spPr>
         <p:style>
@@ -7005,55 +7055,20 @@
       </p:sp>
       <p:sp>
         <p:nvSpPr>
-          <p:cNvPr id="101" name="TextBox 100"/>
-          <p:cNvSpPr txBox="1"/>
-          <p:nvPr/>
-        </p:nvSpPr>
-        <p:spPr>
-          <a:xfrm>
-            <a:off x="3284982" y="3520439"/>
-            <a:ext cx="2681478" cy="150875"/>
-          </a:xfrm>
-          <a:prstGeom prst="rect">
-            <a:avLst/>
-          </a:prstGeom>
-          <a:noFill/>
-        </p:spPr>
-        <p:txBody>
-          <a:bodyPr wrap="square">
-            <a:spAutoFit/>
-          </a:bodyPr>
-          <a:lstStyle/>
-          <a:p>
-            <a:pPr algn="l"/>
-            <a:r>
-              <a:rPr sz="750" b="0" i="0">
-                <a:solidFill>
-                  <a:srgbClr val="333333"/>
-                </a:solidFill>
-                <a:latin typeface="Segoe UI"/>
-              </a:rPr>
-              <a:t>Clickable option display correction on preview screen</a:t>
-            </a:r>
-          </a:p>
-        </p:txBody>
-      </p:sp>
-      <p:sp>
-        <p:nvSpPr>
-          <p:cNvPr id="102" name="Rectangle 101"/>
+          <p:cNvPr id="103" name="Rectangle 102"/>
           <p:cNvSpPr/>
           <p:nvPr/>
         </p:nvSpPr>
         <p:spPr>
           <a:xfrm>
-            <a:off x="9137142" y="658368"/>
-            <a:ext cx="9144" cy="5907024"/>
-          </a:xfrm>
-          <a:prstGeom prst="rect">
-            <a:avLst/>
-          </a:prstGeom>
-          <a:solidFill>
-            <a:srgbClr val="E0E4EA"/>
+            <a:off x="6176772" y="923544"/>
+            <a:ext cx="36576" cy="1321307"/>
+          </a:xfrm>
+          <a:prstGeom prst="rect">
+            <a:avLst/>
+          </a:prstGeom>
+          <a:solidFill>
+            <a:srgbClr val="1565C0"/>
           </a:solidFill>
           <a:ln>
             <a:noFill/>
@@ -7083,14 +7098,14 @@
       </p:sp>
       <p:sp>
         <p:nvSpPr>
-          <p:cNvPr id="103" name="TextBox 102"/>
+          <p:cNvPr id="104" name="TextBox 103"/>
           <p:cNvSpPr txBox="1"/>
           <p:nvPr/>
         </p:nvSpPr>
         <p:spPr>
           <a:xfrm>
-            <a:off x="6158484" y="713232"/>
-            <a:ext cx="2919222" cy="201168"/>
+            <a:off x="6268212" y="941832"/>
+            <a:ext cx="2754629" cy="178308"/>
           </a:xfrm>
           <a:prstGeom prst="rect">
             <a:avLst/>
@@ -7105,38 +7120,36 @@
           <a:p>
             <a:pPr algn="l"/>
             <a:r>
-              <a:rPr sz="700" b="1" i="0">
-                <a:solidFill>
-                  <a:srgbClr val="546E7A"/>
+              <a:rPr sz="850" b="1" i="0">
+                <a:solidFill>
+                  <a:srgbClr val="0D47A1"/>
                 </a:solidFill>
                 <a:latin typeface="Segoe UI"/>
               </a:rPr>
-              <a:t>Feedback, Migration &amp; Platform</a:t>
-            </a:r>
-          </a:p>
-        </p:txBody>
-      </p:sp>
-      <p:sp>
-        <p:nvSpPr>
-          <p:cNvPr id="104" name="Rectangle 103"/>
+              <a:t>Feedback Capture – All Tools</a:t>
+            </a:r>
+          </a:p>
+        </p:txBody>
+      </p:sp>
+      <p:sp>
+        <p:nvSpPr>
+          <p:cNvPr id="105" name="Rectangle 104"/>
           <p:cNvSpPr/>
           <p:nvPr/>
         </p:nvSpPr>
         <p:spPr>
           <a:xfrm>
-            <a:off x="6158484" y="950976"/>
-            <a:ext cx="2919222" cy="1284731"/>
-          </a:xfrm>
-          <a:prstGeom prst="rect">
-            <a:avLst/>
-          </a:prstGeom>
-          <a:solidFill>
-            <a:srgbClr val="FFFFFF"/>
-          </a:solidFill>
-          <a:ln w="6350">
-            <a:solidFill>
-              <a:srgbClr val="E0E4EA"/>
-            </a:solidFill>
+            <a:off x="6268212" y="1110996"/>
+            <a:ext cx="2754629" cy="7315"/>
+          </a:xfrm>
+          <a:prstGeom prst="rect">
+            <a:avLst/>
+          </a:prstGeom>
+          <a:solidFill>
+            <a:srgbClr val="D0D5DD"/>
+          </a:solidFill>
+          <a:ln>
+            <a:noFill/>
           </a:ln>
         </p:spPr>
         <p:style>
@@ -7163,20 +7176,55 @@
       </p:sp>
       <p:sp>
         <p:nvSpPr>
-          <p:cNvPr id="105" name="Rectangle 104"/>
+          <p:cNvPr id="106" name="TextBox 105"/>
+          <p:cNvSpPr txBox="1"/>
+          <p:nvPr/>
+        </p:nvSpPr>
+        <p:spPr>
+          <a:xfrm>
+            <a:off x="6286500" y="1138428"/>
+            <a:ext cx="2718053" cy="132588"/>
+          </a:xfrm>
+          <a:prstGeom prst="rect">
+            <a:avLst/>
+          </a:prstGeom>
+          <a:noFill/>
+        </p:spPr>
+        <p:txBody>
+          <a:bodyPr wrap="square">
+            <a:spAutoFit/>
+          </a:bodyPr>
+          <a:lstStyle/>
+          <a:p>
+            <a:pPr algn="l"/>
+            <a:r>
+              <a:rPr sz="700" b="1" i="0">
+                <a:solidFill>
+                  <a:srgbClr val="37474F"/>
+                </a:solidFill>
+                <a:latin typeface="Segoe UI"/>
+              </a:rPr>
+              <a:t>IN PROGRESS</a:t>
+            </a:r>
+          </a:p>
+        </p:txBody>
+      </p:sp>
+      <p:sp>
+        <p:nvSpPr>
+          <p:cNvPr id="107" name="Rectangle 106"/>
           <p:cNvSpPr/>
           <p:nvPr/>
         </p:nvSpPr>
         <p:spPr>
           <a:xfrm>
-            <a:off x="6158484" y="950976"/>
-            <a:ext cx="2919222" cy="192024"/>
-          </a:xfrm>
-          <a:prstGeom prst="rect">
-            <a:avLst/>
-          </a:prstGeom>
-          <a:solidFill>
-            <a:srgbClr val="00695C"/>
+            <a:off x="6341364" y="1339596"/>
+            <a:ext cx="29260" cy="29260"/>
+          </a:xfrm>
+          <a:prstGeom prst="rect">
+            <a:avLst/>
+          </a:prstGeom>
+          <a:solidFill>
+            <a:srgbClr val="D0D5DD"/>
           </a:solidFill>
           <a:ln>
             <a:noFill/>
@@ -7206,14 +7254,14 @@
       </p:sp>
       <p:sp>
         <p:nvSpPr>
-          <p:cNvPr id="106" name="TextBox 105"/>
+          <p:cNvPr id="108" name="TextBox 107"/>
           <p:cNvSpPr txBox="1"/>
           <p:nvPr/>
         </p:nvSpPr>
         <p:spPr>
           <a:xfrm>
-            <a:off x="6222492" y="978408"/>
-            <a:ext cx="2827782" cy="155448"/>
+            <a:off x="6405372" y="1289304"/>
+            <a:ext cx="2590038" cy="153619"/>
           </a:xfrm>
           <a:prstGeom prst="rect">
             <a:avLst/>
@@ -7228,38 +7276,71 @@
           <a:p>
             <a:pPr algn="l"/>
             <a:r>
-              <a:rPr sz="800" b="1" i="0">
-                <a:solidFill>
-                  <a:srgbClr val="FFFFFF"/>
+              <a:rPr sz="750" b="0" i="0">
+                <a:solidFill>
+                  <a:srgbClr val="444444"/>
                 </a:solidFill>
                 <a:latin typeface="Segoe UI"/>
               </a:rPr>
-              <a:t>Feedback Capture – All Tools</a:t>
-            </a:r>
-          </a:p>
-        </p:txBody>
-      </p:sp>
-      <p:sp>
-        <p:nvSpPr>
-          <p:cNvPr id="107" name="Rectangle 106"/>
+              <a:t>Feedback submission API backend implementation</a:t>
+            </a:r>
+          </a:p>
+        </p:txBody>
+      </p:sp>
+      <p:sp>
+        <p:nvSpPr>
+          <p:cNvPr id="109" name="TextBox 108"/>
+          <p:cNvSpPr txBox="1"/>
+          <p:nvPr/>
+        </p:nvSpPr>
+        <p:spPr>
+          <a:xfrm>
+            <a:off x="6286500" y="1461211"/>
+            <a:ext cx="2718053" cy="132588"/>
+          </a:xfrm>
+          <a:prstGeom prst="rect">
+            <a:avLst/>
+          </a:prstGeom>
+          <a:noFill/>
+        </p:spPr>
+        <p:txBody>
+          <a:bodyPr wrap="square">
+            <a:spAutoFit/>
+          </a:bodyPr>
+          <a:lstStyle/>
+          <a:p>
+            <a:pPr algn="l"/>
+            <a:r>
+              <a:rPr sz="700" b="1" i="0">
+                <a:solidFill>
+                  <a:srgbClr val="37474F"/>
+                </a:solidFill>
+                <a:latin typeface="Segoe UI"/>
+              </a:rPr>
+              <a:t>PLANNED</a:t>
+            </a:r>
+          </a:p>
+        </p:txBody>
+      </p:sp>
+      <p:sp>
+        <p:nvSpPr>
+          <p:cNvPr id="110" name="Rectangle 109"/>
           <p:cNvSpPr/>
           <p:nvPr/>
         </p:nvSpPr>
         <p:spPr>
           <a:xfrm>
-            <a:off x="6213348" y="1179576"/>
-            <a:ext cx="749808" cy="141732"/>
-          </a:xfrm>
-          <a:prstGeom prst="rect">
-            <a:avLst/>
-          </a:prstGeom>
-          <a:solidFill>
-            <a:srgbClr val="E3F2FD"/>
-          </a:solidFill>
-          <a:ln w="6350">
-            <a:solidFill>
-              <a:srgbClr val="E3F2FD"/>
-            </a:solidFill>
+            <a:off x="6341364" y="1662379"/>
+            <a:ext cx="29260" cy="29260"/>
+          </a:xfrm>
+          <a:prstGeom prst="rect">
+            <a:avLst/>
+          </a:prstGeom>
+          <a:solidFill>
+            <a:srgbClr val="D0D5DD"/>
+          </a:solidFill>
+          <a:ln>
+            <a:noFill/>
           </a:ln>
         </p:spPr>
         <p:style>
@@ -7286,14 +7367,14 @@
       </p:sp>
       <p:sp>
         <p:nvSpPr>
-          <p:cNvPr id="108" name="TextBox 107"/>
+          <p:cNvPr id="111" name="TextBox 110"/>
           <p:cNvSpPr txBox="1"/>
           <p:nvPr/>
         </p:nvSpPr>
         <p:spPr>
           <a:xfrm>
-            <a:off x="6222492" y="1188720"/>
-            <a:ext cx="731520" cy="128016"/>
+            <a:off x="6405372" y="1612087"/>
+            <a:ext cx="2590038" cy="153619"/>
           </a:xfrm>
           <a:prstGeom prst="rect">
             <a:avLst/>
@@ -7308,33 +7389,33 @@
           <a:p>
             <a:pPr algn="l"/>
             <a:r>
-              <a:rPr sz="650" b="1" i="0">
-                <a:solidFill>
-                  <a:srgbClr val="0D47A1"/>
+              <a:rPr sz="750" b="0" i="0">
+                <a:solidFill>
+                  <a:srgbClr val="444444"/>
                 </a:solidFill>
                 <a:latin typeface="Segoe UI"/>
               </a:rPr>
-              <a:t>⟳ In Progress</a:t>
-            </a:r>
-          </a:p>
-        </p:txBody>
-      </p:sp>
-      <p:sp>
-        <p:nvSpPr>
-          <p:cNvPr id="109" name="Rectangle 108"/>
+              <a:t>Feedback Form frontend component (D&amp;D, Macro, Preview)</a:t>
+            </a:r>
+          </a:p>
+        </p:txBody>
+      </p:sp>
+      <p:sp>
+        <p:nvSpPr>
+          <p:cNvPr id="112" name="Rectangle 111"/>
           <p:cNvSpPr/>
           <p:nvPr/>
         </p:nvSpPr>
         <p:spPr>
           <a:xfrm>
-            <a:off x="6268212" y="1389888"/>
-            <a:ext cx="36576" cy="36576"/>
-          </a:xfrm>
-          <a:prstGeom prst="rect">
-            <a:avLst/>
-          </a:prstGeom>
-          <a:solidFill>
-            <a:srgbClr val="90A4AE"/>
+            <a:off x="6341364" y="1797710"/>
+            <a:ext cx="29260" cy="29260"/>
+          </a:xfrm>
+          <a:prstGeom prst="rect">
+            <a:avLst/>
+          </a:prstGeom>
+          <a:solidFill>
+            <a:srgbClr val="D0D5DD"/>
           </a:solidFill>
           <a:ln>
             <a:noFill/>
@@ -7364,14 +7445,14 @@
       </p:sp>
       <p:sp>
         <p:nvSpPr>
-          <p:cNvPr id="110" name="TextBox 109"/>
+          <p:cNvPr id="113" name="TextBox 112"/>
           <p:cNvSpPr txBox="1"/>
           <p:nvPr/>
         </p:nvSpPr>
         <p:spPr>
           <a:xfrm>
-            <a:off x="6332220" y="1339596"/>
-            <a:ext cx="2681478" cy="150875"/>
+            <a:off x="6405372" y="1747418"/>
+            <a:ext cx="2590038" cy="153619"/>
           </a:xfrm>
           <a:prstGeom prst="rect">
             <a:avLst/>
@@ -7388,36 +7469,34 @@
             <a:r>
               <a:rPr sz="750" b="0" i="0">
                 <a:solidFill>
-                  <a:srgbClr val="333333"/>
+                  <a:srgbClr val="444444"/>
                 </a:solidFill>
                 <a:latin typeface="Segoe UI"/>
               </a:rPr>
-              <a:t>Feedback submission API backend implementation</a:t>
-            </a:r>
-          </a:p>
-        </p:txBody>
-      </p:sp>
-      <p:sp>
-        <p:nvSpPr>
-          <p:cNvPr id="111" name="Rectangle 110"/>
+              <a:t>Feedback Form API integration in SDK</a:t>
+            </a:r>
+          </a:p>
+        </p:txBody>
+      </p:sp>
+      <p:sp>
+        <p:nvSpPr>
+          <p:cNvPr id="114" name="Rectangle 113"/>
           <p:cNvSpPr/>
           <p:nvPr/>
         </p:nvSpPr>
         <p:spPr>
           <a:xfrm>
-            <a:off x="6213348" y="1508760"/>
-            <a:ext cx="749808" cy="141732"/>
-          </a:xfrm>
-          <a:prstGeom prst="rect">
-            <a:avLst/>
-          </a:prstGeom>
-          <a:solidFill>
-            <a:srgbClr val="F3E5F5"/>
-          </a:solidFill>
-          <a:ln w="6350">
-            <a:solidFill>
-              <a:srgbClr val="F3E5F5"/>
-            </a:solidFill>
+            <a:off x="6341364" y="1933041"/>
+            <a:ext cx="29260" cy="29260"/>
+          </a:xfrm>
+          <a:prstGeom prst="rect">
+            <a:avLst/>
+          </a:prstGeom>
+          <a:solidFill>
+            <a:srgbClr val="D0D5DD"/>
+          </a:solidFill>
+          <a:ln>
+            <a:noFill/>
           </a:ln>
         </p:spPr>
         <p:style>
@@ -7444,14 +7523,14 @@
       </p:sp>
       <p:sp>
         <p:nvSpPr>
-          <p:cNvPr id="112" name="TextBox 111"/>
+          <p:cNvPr id="115" name="TextBox 114"/>
           <p:cNvSpPr txBox="1"/>
           <p:nvPr/>
         </p:nvSpPr>
         <p:spPr>
           <a:xfrm>
-            <a:off x="6222492" y="1517904"/>
-            <a:ext cx="731520" cy="128016"/>
+            <a:off x="6405372" y="1882749"/>
+            <a:ext cx="2590038" cy="153619"/>
           </a:xfrm>
           <a:prstGeom prst="rect">
             <a:avLst/>
@@ -7466,33 +7545,33 @@
           <a:p>
             <a:pPr algn="l"/>
             <a:r>
-              <a:rPr sz="650" b="1" i="0">
-                <a:solidFill>
-                  <a:srgbClr val="4A148C"/>
+              <a:rPr sz="750" b="0" i="0">
+                <a:solidFill>
+                  <a:srgbClr val="444444"/>
                 </a:solidFill>
                 <a:latin typeface="Segoe UI"/>
               </a:rPr>
-              <a:t>◷ Planned</a:t>
-            </a:r>
-          </a:p>
-        </p:txBody>
-      </p:sp>
-      <p:sp>
-        <p:nvSpPr>
-          <p:cNvPr id="113" name="Rectangle 112"/>
+              <a:t>Feedback analytics integration</a:t>
+            </a:r>
+          </a:p>
+        </p:txBody>
+      </p:sp>
+      <p:sp>
+        <p:nvSpPr>
+          <p:cNvPr id="116" name="Rectangle 115"/>
           <p:cNvSpPr/>
           <p:nvPr/>
         </p:nvSpPr>
         <p:spPr>
           <a:xfrm>
-            <a:off x="6268212" y="1719072"/>
-            <a:ext cx="36576" cy="36576"/>
-          </a:xfrm>
-          <a:prstGeom prst="rect">
-            <a:avLst/>
-          </a:prstGeom>
-          <a:solidFill>
-            <a:srgbClr val="90A4AE"/>
+            <a:off x="6341364" y="2068372"/>
+            <a:ext cx="29260" cy="29260"/>
+          </a:xfrm>
+          <a:prstGeom prst="rect">
+            <a:avLst/>
+          </a:prstGeom>
+          <a:solidFill>
+            <a:srgbClr val="D0D5DD"/>
           </a:solidFill>
           <a:ln>
             <a:noFill/>
@@ -7522,14 +7601,14 @@
       </p:sp>
       <p:sp>
         <p:nvSpPr>
-          <p:cNvPr id="114" name="TextBox 113"/>
+          <p:cNvPr id="117" name="TextBox 116"/>
           <p:cNvSpPr txBox="1"/>
           <p:nvPr/>
         </p:nvSpPr>
         <p:spPr>
           <a:xfrm>
-            <a:off x="6332220" y="1668780"/>
-            <a:ext cx="2681478" cy="150875"/>
+            <a:off x="6405372" y="2018080"/>
+            <a:ext cx="2590038" cy="153619"/>
           </a:xfrm>
           <a:prstGeom prst="rect">
             <a:avLst/>
@@ -7546,34 +7625,36 @@
             <a:r>
               <a:rPr sz="750" b="0" i="0">
                 <a:solidFill>
-                  <a:srgbClr val="333333"/>
+                  <a:srgbClr val="444444"/>
                 </a:solidFill>
                 <a:latin typeface="Segoe UI"/>
               </a:rPr>
-              <a:t>Feedback Form frontend component (Drag &amp; Drop, Macro, Preview)</a:t>
-            </a:r>
-          </a:p>
-        </p:txBody>
-      </p:sp>
-      <p:sp>
-        <p:nvSpPr>
-          <p:cNvPr id="115" name="Rectangle 114"/>
+              <a:t>Feedback form frequency &amp; TTL settings in SDK Manager</a:t>
+            </a:r>
+          </a:p>
+        </p:txBody>
+      </p:sp>
+      <p:sp>
+        <p:nvSpPr>
+          <p:cNvPr id="118" name="Rectangle 117"/>
           <p:cNvSpPr/>
           <p:nvPr/>
         </p:nvSpPr>
         <p:spPr>
           <a:xfrm>
-            <a:off x="6268212" y="1851660"/>
-            <a:ext cx="36576" cy="36576"/>
-          </a:xfrm>
-          <a:prstGeom prst="rect">
-            <a:avLst/>
-          </a:prstGeom>
-          <a:solidFill>
-            <a:srgbClr val="90A4AE"/>
-          </a:solidFill>
-          <a:ln>
-            <a:noFill/>
+            <a:off x="6176772" y="2318004"/>
+            <a:ext cx="2882646" cy="718718"/>
+          </a:xfrm>
+          <a:prstGeom prst="rect">
+            <a:avLst/>
+          </a:prstGeom>
+          <a:solidFill>
+            <a:srgbClr val="FFFFFF"/>
+          </a:solidFill>
+          <a:ln w="6350">
+            <a:solidFill>
+              <a:srgbClr val="D0D5DD"/>
+            </a:solidFill>
           </a:ln>
         </p:spPr>
         <p:style>
@@ -7600,55 +7681,20 @@
       </p:sp>
       <p:sp>
         <p:nvSpPr>
-          <p:cNvPr id="116" name="TextBox 115"/>
-          <p:cNvSpPr txBox="1"/>
-          <p:nvPr/>
-        </p:nvSpPr>
-        <p:spPr>
-          <a:xfrm>
-            <a:off x="6332220" y="1801368"/>
-            <a:ext cx="2681478" cy="150875"/>
-          </a:xfrm>
-          <a:prstGeom prst="rect">
-            <a:avLst/>
-          </a:prstGeom>
-          <a:noFill/>
-        </p:spPr>
-        <p:txBody>
-          <a:bodyPr wrap="square">
-            <a:spAutoFit/>
-          </a:bodyPr>
-          <a:lstStyle/>
-          <a:p>
-            <a:pPr algn="l"/>
-            <a:r>
-              <a:rPr sz="750" b="0" i="0">
-                <a:solidFill>
-                  <a:srgbClr val="333333"/>
-                </a:solidFill>
-                <a:latin typeface="Segoe UI"/>
-              </a:rPr>
-              <a:t>Feedback Form API integration in SDK</a:t>
-            </a:r>
-          </a:p>
-        </p:txBody>
-      </p:sp>
-      <p:sp>
-        <p:nvSpPr>
-          <p:cNvPr id="117" name="Rectangle 116"/>
+          <p:cNvPr id="119" name="Rectangle 118"/>
           <p:cNvSpPr/>
           <p:nvPr/>
         </p:nvSpPr>
         <p:spPr>
           <a:xfrm>
-            <a:off x="6268212" y="1984248"/>
-            <a:ext cx="36576" cy="36576"/>
-          </a:xfrm>
-          <a:prstGeom prst="rect">
-            <a:avLst/>
-          </a:prstGeom>
-          <a:solidFill>
-            <a:srgbClr val="90A4AE"/>
+            <a:off x="6176772" y="2318004"/>
+            <a:ext cx="36576" cy="718718"/>
+          </a:xfrm>
+          <a:prstGeom prst="rect">
+            <a:avLst/>
+          </a:prstGeom>
+          <a:solidFill>
+            <a:srgbClr val="1565C0"/>
           </a:solidFill>
           <a:ln>
             <a:noFill/>
@@ -7678,14 +7724,14 @@
       </p:sp>
       <p:sp>
         <p:nvSpPr>
-          <p:cNvPr id="118" name="TextBox 117"/>
+          <p:cNvPr id="120" name="TextBox 119"/>
           <p:cNvSpPr txBox="1"/>
           <p:nvPr/>
         </p:nvSpPr>
         <p:spPr>
           <a:xfrm>
-            <a:off x="6332220" y="1933956"/>
-            <a:ext cx="2681478" cy="150875"/>
+            <a:off x="6268212" y="2336292"/>
+            <a:ext cx="2754629" cy="178308"/>
           </a:xfrm>
           <a:prstGeom prst="rect">
             <a:avLst/>
@@ -7700,33 +7746,33 @@
           <a:p>
             <a:pPr algn="l"/>
             <a:r>
-              <a:rPr sz="750" b="0" i="0">
-                <a:solidFill>
-                  <a:srgbClr val="333333"/>
+              <a:rPr sz="850" b="1" i="0">
+                <a:solidFill>
+                  <a:srgbClr val="0D47A1"/>
                 </a:solidFill>
                 <a:latin typeface="Segoe UI"/>
               </a:rPr>
-              <a:t>Feedback analytics integration</a:t>
-            </a:r>
-          </a:p>
-        </p:txBody>
-      </p:sp>
-      <p:sp>
-        <p:nvSpPr>
-          <p:cNvPr id="119" name="Rectangle 118"/>
+              <a:t>Monorepo Migration – Backend Services</a:t>
+            </a:r>
+          </a:p>
+        </p:txBody>
+      </p:sp>
+      <p:sp>
+        <p:nvSpPr>
+          <p:cNvPr id="121" name="Rectangle 120"/>
           <p:cNvSpPr/>
           <p:nvPr/>
         </p:nvSpPr>
         <p:spPr>
           <a:xfrm>
-            <a:off x="6268212" y="2116836"/>
-            <a:ext cx="36576" cy="36576"/>
-          </a:xfrm>
-          <a:prstGeom prst="rect">
-            <a:avLst/>
-          </a:prstGeom>
-          <a:solidFill>
-            <a:srgbClr val="90A4AE"/>
+            <a:off x="6268212" y="2505456"/>
+            <a:ext cx="2754629" cy="7315"/>
+          </a:xfrm>
+          <a:prstGeom prst="rect">
+            <a:avLst/>
+          </a:prstGeom>
+          <a:solidFill>
+            <a:srgbClr val="D0D5DD"/>
           </a:solidFill>
           <a:ln>
             <a:noFill/>
@@ -7756,14 +7802,14 @@
       </p:sp>
       <p:sp>
         <p:nvSpPr>
-          <p:cNvPr id="120" name="TextBox 119"/>
+          <p:cNvPr id="122" name="TextBox 121"/>
           <p:cNvSpPr txBox="1"/>
           <p:nvPr/>
         </p:nvSpPr>
         <p:spPr>
           <a:xfrm>
-            <a:off x="6332220" y="2066544"/>
-            <a:ext cx="2681478" cy="150875"/>
+            <a:off x="6286500" y="2532888"/>
+            <a:ext cx="2718053" cy="132588"/>
           </a:xfrm>
           <a:prstGeom prst="rect">
             <a:avLst/>
@@ -7778,38 +7824,36 @@
           <a:p>
             <a:pPr algn="l"/>
             <a:r>
-              <a:rPr sz="750" b="0" i="0">
-                <a:solidFill>
-                  <a:srgbClr val="333333"/>
+              <a:rPr sz="700" b="1" i="0">
+                <a:solidFill>
+                  <a:srgbClr val="37474F"/>
                 </a:solidFill>
                 <a:latin typeface="Segoe UI"/>
               </a:rPr>
-              <a:t>Feedback form frequency &amp; TTL settings in SDK Manager</a:t>
-            </a:r>
-          </a:p>
-        </p:txBody>
-      </p:sp>
-      <p:sp>
-        <p:nvSpPr>
-          <p:cNvPr id="121" name="Rectangle 120"/>
+              <a:t>PLANNED</a:t>
+            </a:r>
+          </a:p>
+        </p:txBody>
+      </p:sp>
+      <p:sp>
+        <p:nvSpPr>
+          <p:cNvPr id="123" name="Rectangle 122"/>
           <p:cNvSpPr/>
           <p:nvPr/>
         </p:nvSpPr>
         <p:spPr>
           <a:xfrm>
-            <a:off x="6158484" y="2290572"/>
-            <a:ext cx="2919222" cy="690372"/>
-          </a:xfrm>
-          <a:prstGeom prst="rect">
-            <a:avLst/>
-          </a:prstGeom>
-          <a:solidFill>
-            <a:srgbClr val="FFFFFF"/>
-          </a:solidFill>
-          <a:ln w="6350">
-            <a:solidFill>
-              <a:srgbClr val="E0E4EA"/>
-            </a:solidFill>
+            <a:off x="6341364" y="2734056"/>
+            <a:ext cx="29260" cy="29260"/>
+          </a:xfrm>
+          <a:prstGeom prst="rect">
+            <a:avLst/>
+          </a:prstGeom>
+          <a:solidFill>
+            <a:srgbClr val="D0D5DD"/>
+          </a:solidFill>
+          <a:ln>
+            <a:noFill/>
           </a:ln>
         </p:spPr>
         <p:style>
@@ -7836,20 +7880,55 @@
       </p:sp>
       <p:sp>
         <p:nvSpPr>
-          <p:cNvPr id="122" name="Rectangle 121"/>
+          <p:cNvPr id="124" name="TextBox 123"/>
+          <p:cNvSpPr txBox="1"/>
+          <p:nvPr/>
+        </p:nvSpPr>
+        <p:spPr>
+          <a:xfrm>
+            <a:off x="6405372" y="2683764"/>
+            <a:ext cx="2590038" cy="153619"/>
+          </a:xfrm>
+          <a:prstGeom prst="rect">
+            <a:avLst/>
+          </a:prstGeom>
+          <a:noFill/>
+        </p:spPr>
+        <p:txBody>
+          <a:bodyPr wrap="square">
+            <a:spAutoFit/>
+          </a:bodyPr>
+          <a:lstStyle/>
+          <a:p>
+            <a:pPr algn="l"/>
+            <a:r>
+              <a:rPr sz="750" b="0" i="0">
+                <a:solidFill>
+                  <a:srgbClr val="444444"/>
+                </a:solidFill>
+                <a:latin typeface="Segoe UI"/>
+              </a:rPr>
+              <a:t>Config-driven backend URL resolution (Check &amp; Care SDK)</a:t>
+            </a:r>
+          </a:p>
+        </p:txBody>
+      </p:sp>
+      <p:sp>
+        <p:nvSpPr>
+          <p:cNvPr id="125" name="Rectangle 124"/>
           <p:cNvSpPr/>
           <p:nvPr/>
         </p:nvSpPr>
         <p:spPr>
           <a:xfrm>
-            <a:off x="6158484" y="2290572"/>
-            <a:ext cx="2919222" cy="192024"/>
-          </a:xfrm>
-          <a:prstGeom prst="rect">
-            <a:avLst/>
-          </a:prstGeom>
-          <a:solidFill>
-            <a:srgbClr val="4527A0"/>
+            <a:off x="6341364" y="2869387"/>
+            <a:ext cx="29260" cy="29260"/>
+          </a:xfrm>
+          <a:prstGeom prst="rect">
+            <a:avLst/>
+          </a:prstGeom>
+          <a:solidFill>
+            <a:srgbClr val="D0D5DD"/>
           </a:solidFill>
           <a:ln>
             <a:noFill/>
@@ -7879,14 +7958,14 @@
       </p:sp>
       <p:sp>
         <p:nvSpPr>
-          <p:cNvPr id="123" name="TextBox 122"/>
+          <p:cNvPr id="126" name="TextBox 125"/>
           <p:cNvSpPr txBox="1"/>
           <p:nvPr/>
         </p:nvSpPr>
         <p:spPr>
           <a:xfrm>
-            <a:off x="6222492" y="2318003"/>
-            <a:ext cx="2827782" cy="155448"/>
+            <a:off x="6405372" y="2819095"/>
+            <a:ext cx="2590038" cy="153619"/>
           </a:xfrm>
           <a:prstGeom prst="rect">
             <a:avLst/>
@@ -7901,37 +7980,37 @@
           <a:p>
             <a:pPr algn="l"/>
             <a:r>
-              <a:rPr sz="800" b="1" i="0">
-                <a:solidFill>
-                  <a:srgbClr val="FFFFFF"/>
+              <a:rPr sz="750" b="0" i="0">
+                <a:solidFill>
+                  <a:srgbClr val="444444"/>
                 </a:solidFill>
                 <a:latin typeface="Segoe UI"/>
               </a:rPr>
-              <a:t>Monorepo Migration – Backend Services</a:t>
-            </a:r>
-          </a:p>
-        </p:txBody>
-      </p:sp>
-      <p:sp>
-        <p:nvSpPr>
-          <p:cNvPr id="124" name="Rectangle 123"/>
+              <a:t>Datadog monitoring migration &amp; shared library alignment</a:t>
+            </a:r>
+          </a:p>
+        </p:txBody>
+      </p:sp>
+      <p:sp>
+        <p:nvSpPr>
+          <p:cNvPr id="127" name="Rectangle 126"/>
           <p:cNvSpPr/>
           <p:nvPr/>
         </p:nvSpPr>
         <p:spPr>
           <a:xfrm>
-            <a:off x="6213348" y="2519172"/>
-            <a:ext cx="749808" cy="141732"/>
-          </a:xfrm>
-          <a:prstGeom prst="rect">
-            <a:avLst/>
-          </a:prstGeom>
-          <a:solidFill>
-            <a:srgbClr val="F3E5F5"/>
+            <a:off x="6176772" y="3109874"/>
+            <a:ext cx="2882646" cy="718718"/>
+          </a:xfrm>
+          <a:prstGeom prst="rect">
+            <a:avLst/>
+          </a:prstGeom>
+          <a:solidFill>
+            <a:srgbClr val="FFFFFF"/>
           </a:solidFill>
           <a:ln w="6350">
             <a:solidFill>
-              <a:srgbClr val="F3E5F5"/>
+              <a:srgbClr val="D0D5DD"/>
             </a:solidFill>
           </a:ln>
         </p:spPr>
@@ -7959,55 +8038,20 @@
       </p:sp>
       <p:sp>
         <p:nvSpPr>
-          <p:cNvPr id="125" name="TextBox 124"/>
-          <p:cNvSpPr txBox="1"/>
-          <p:nvPr/>
-        </p:nvSpPr>
-        <p:spPr>
-          <a:xfrm>
-            <a:off x="6222492" y="2528315"/>
-            <a:ext cx="731520" cy="128016"/>
-          </a:xfrm>
-          <a:prstGeom prst="rect">
-            <a:avLst/>
-          </a:prstGeom>
-          <a:noFill/>
-        </p:spPr>
-        <p:txBody>
-          <a:bodyPr wrap="square">
-            <a:spAutoFit/>
-          </a:bodyPr>
-          <a:lstStyle/>
-          <a:p>
-            <a:pPr algn="l"/>
-            <a:r>
-              <a:rPr sz="650" b="1" i="0">
-                <a:solidFill>
-                  <a:srgbClr val="4A148C"/>
-                </a:solidFill>
-                <a:latin typeface="Segoe UI"/>
-              </a:rPr>
-              <a:t>◷ Planned</a:t>
-            </a:r>
-          </a:p>
-        </p:txBody>
-      </p:sp>
-      <p:sp>
-        <p:nvSpPr>
-          <p:cNvPr id="126" name="Rectangle 125"/>
+          <p:cNvPr id="128" name="Rectangle 127"/>
           <p:cNvSpPr/>
           <p:nvPr/>
         </p:nvSpPr>
         <p:spPr>
           <a:xfrm>
-            <a:off x="6268212" y="2729484"/>
-            <a:ext cx="36576" cy="36576"/>
-          </a:xfrm>
-          <a:prstGeom prst="rect">
-            <a:avLst/>
-          </a:prstGeom>
-          <a:solidFill>
-            <a:srgbClr val="90A4AE"/>
+            <a:off x="6176772" y="3109874"/>
+            <a:ext cx="36576" cy="718718"/>
+          </a:xfrm>
+          <a:prstGeom prst="rect">
+            <a:avLst/>
+          </a:prstGeom>
+          <a:solidFill>
+            <a:srgbClr val="1565C0"/>
           </a:solidFill>
           <a:ln>
             <a:noFill/>
@@ -8037,14 +8081,14 @@
       </p:sp>
       <p:sp>
         <p:nvSpPr>
-          <p:cNvPr id="127" name="TextBox 126"/>
+          <p:cNvPr id="129" name="TextBox 128"/>
           <p:cNvSpPr txBox="1"/>
           <p:nvPr/>
         </p:nvSpPr>
         <p:spPr>
           <a:xfrm>
-            <a:off x="6332220" y="2679191"/>
-            <a:ext cx="2681478" cy="150875"/>
+            <a:off x="6268212" y="3128162"/>
+            <a:ext cx="2754629" cy="178308"/>
           </a:xfrm>
           <a:prstGeom prst="rect">
             <a:avLst/>
@@ -8059,33 +8103,33 @@
           <a:p>
             <a:pPr algn="l"/>
             <a:r>
-              <a:rPr sz="750" b="0" i="0">
-                <a:solidFill>
-                  <a:srgbClr val="333333"/>
+              <a:rPr sz="850" b="1" i="0">
+                <a:solidFill>
+                  <a:srgbClr val="0D47A1"/>
                 </a:solidFill>
                 <a:latin typeface="Segoe UI"/>
               </a:rPr>
-              <a:t>Config-driven backend URL resolution (Check &amp; Care SDK)</a:t>
-            </a:r>
-          </a:p>
-        </p:txBody>
-      </p:sp>
-      <p:sp>
-        <p:nvSpPr>
-          <p:cNvPr id="128" name="Rectangle 127"/>
+              <a:t>Transition Live Tools → SDK Manager</a:t>
+            </a:r>
+          </a:p>
+        </p:txBody>
+      </p:sp>
+      <p:sp>
+        <p:nvSpPr>
+          <p:cNvPr id="130" name="Rectangle 129"/>
           <p:cNvSpPr/>
           <p:nvPr/>
         </p:nvSpPr>
         <p:spPr>
           <a:xfrm>
-            <a:off x="6268212" y="2862072"/>
-            <a:ext cx="36576" cy="36576"/>
-          </a:xfrm>
-          <a:prstGeom prst="rect">
-            <a:avLst/>
-          </a:prstGeom>
-          <a:solidFill>
-            <a:srgbClr val="90A4AE"/>
+            <a:off x="6268212" y="3297326"/>
+            <a:ext cx="2754629" cy="7315"/>
+          </a:xfrm>
+          <a:prstGeom prst="rect">
+            <a:avLst/>
+          </a:prstGeom>
+          <a:solidFill>
+            <a:srgbClr val="D0D5DD"/>
           </a:solidFill>
           <a:ln>
             <a:noFill/>
@@ -8115,14 +8159,14 @@
       </p:sp>
       <p:sp>
         <p:nvSpPr>
-          <p:cNvPr id="129" name="TextBox 128"/>
+          <p:cNvPr id="131" name="TextBox 130"/>
           <p:cNvSpPr txBox="1"/>
           <p:nvPr/>
         </p:nvSpPr>
         <p:spPr>
           <a:xfrm>
-            <a:off x="6332220" y="2811779"/>
-            <a:ext cx="2681478" cy="150875"/>
+            <a:off x="6286500" y="3324758"/>
+            <a:ext cx="2718053" cy="132588"/>
           </a:xfrm>
           <a:prstGeom prst="rect">
             <a:avLst/>
@@ -8137,38 +8181,36 @@
           <a:p>
             <a:pPr algn="l"/>
             <a:r>
-              <a:rPr sz="750" b="0" i="0">
-                <a:solidFill>
-                  <a:srgbClr val="333333"/>
+              <a:rPr sz="700" b="1" i="0">
+                <a:solidFill>
+                  <a:srgbClr val="37474F"/>
                 </a:solidFill>
                 <a:latin typeface="Segoe UI"/>
               </a:rPr>
-              <a:t>Datadog monitoring migration &amp; shared library alignment</a:t>
-            </a:r>
-          </a:p>
-        </p:txBody>
-      </p:sp>
-      <p:sp>
-        <p:nvSpPr>
-          <p:cNvPr id="130" name="Rectangle 129"/>
+              <a:t>IN PROGRESS</a:t>
+            </a:r>
+          </a:p>
+        </p:txBody>
+      </p:sp>
+      <p:sp>
+        <p:nvSpPr>
+          <p:cNvPr id="132" name="Rectangle 131"/>
           <p:cNvSpPr/>
           <p:nvPr/>
         </p:nvSpPr>
         <p:spPr>
           <a:xfrm>
-            <a:off x="6158484" y="3035808"/>
-            <a:ext cx="2919222" cy="690372"/>
-          </a:xfrm>
-          <a:prstGeom prst="rect">
-            <a:avLst/>
-          </a:prstGeom>
-          <a:solidFill>
-            <a:srgbClr val="FFFFFF"/>
-          </a:solidFill>
-          <a:ln w="6350">
-            <a:solidFill>
-              <a:srgbClr val="E0E4EA"/>
-            </a:solidFill>
+            <a:off x="6341364" y="3525926"/>
+            <a:ext cx="29260" cy="29260"/>
+          </a:xfrm>
+          <a:prstGeom prst="rect">
+            <a:avLst/>
+          </a:prstGeom>
+          <a:solidFill>
+            <a:srgbClr val="D0D5DD"/>
+          </a:solidFill>
+          <a:ln>
+            <a:noFill/>
           </a:ln>
         </p:spPr>
         <p:style>
@@ -8195,20 +8237,55 @@
       </p:sp>
       <p:sp>
         <p:nvSpPr>
-          <p:cNvPr id="131" name="Rectangle 130"/>
+          <p:cNvPr id="133" name="TextBox 132"/>
+          <p:cNvSpPr txBox="1"/>
+          <p:nvPr/>
+        </p:nvSpPr>
+        <p:spPr>
+          <a:xfrm>
+            <a:off x="6405372" y="3475634"/>
+            <a:ext cx="2590038" cy="153619"/>
+          </a:xfrm>
+          <a:prstGeom prst="rect">
+            <a:avLst/>
+          </a:prstGeom>
+          <a:noFill/>
+        </p:spPr>
+        <p:txBody>
+          <a:bodyPr wrap="square">
+            <a:spAutoFit/>
+          </a:bodyPr>
+          <a:lstStyle/>
+          <a:p>
+            <a:pPr algn="l"/>
+            <a:r>
+              <a:rPr sz="750" b="0" i="0">
+                <a:solidFill>
+                  <a:srgbClr val="444444"/>
+                </a:solidFill>
+                <a:latin typeface="Segoe UI"/>
+              </a:rPr>
+              <a:t>Onboarding 7 live tools to SDK Manager with Config IDs</a:t>
+            </a:r>
+          </a:p>
+        </p:txBody>
+      </p:sp>
+      <p:sp>
+        <p:nvSpPr>
+          <p:cNvPr id="134" name="Rectangle 133"/>
           <p:cNvSpPr/>
           <p:nvPr/>
         </p:nvSpPr>
         <p:spPr>
           <a:xfrm>
-            <a:off x="6158484" y="3035808"/>
-            <a:ext cx="2919222" cy="192024"/>
-          </a:xfrm>
-          <a:prstGeom prst="rect">
-            <a:avLst/>
-          </a:prstGeom>
-          <a:solidFill>
-            <a:srgbClr val="1B5E20"/>
+            <a:off x="6341364" y="3661257"/>
+            <a:ext cx="29260" cy="29260"/>
+          </a:xfrm>
+          <a:prstGeom prst="rect">
+            <a:avLst/>
+          </a:prstGeom>
+          <a:solidFill>
+            <a:srgbClr val="D0D5DD"/>
           </a:solidFill>
           <a:ln>
             <a:noFill/>
@@ -8238,14 +8315,14 @@
       </p:sp>
       <p:sp>
         <p:nvSpPr>
-          <p:cNvPr id="132" name="TextBox 131"/>
+          <p:cNvPr id="135" name="TextBox 134"/>
           <p:cNvSpPr txBox="1"/>
           <p:nvPr/>
         </p:nvSpPr>
         <p:spPr>
           <a:xfrm>
-            <a:off x="6222492" y="3063239"/>
-            <a:ext cx="2827782" cy="155448"/>
+            <a:off x="6405372" y="3610965"/>
+            <a:ext cx="2590038" cy="153619"/>
           </a:xfrm>
           <a:prstGeom prst="rect">
             <a:avLst/>
@@ -8260,37 +8337,37 @@
           <a:p>
             <a:pPr algn="l"/>
             <a:r>
-              <a:rPr sz="800" b="1" i="0">
-                <a:solidFill>
-                  <a:srgbClr val="FFFFFF"/>
+              <a:rPr sz="750" b="0" i="0">
+                <a:solidFill>
+                  <a:srgbClr val="444444"/>
                 </a:solidFill>
                 <a:latin typeface="Segoe UI"/>
               </a:rPr>
-              <a:t>Transition Live Tools → SDK Manager</a:t>
-            </a:r>
-          </a:p>
-        </p:txBody>
-      </p:sp>
-      <p:sp>
-        <p:nvSpPr>
-          <p:cNvPr id="133" name="Rectangle 132"/>
+              <a:t>(PWC, KWC, ToothCheck, ToothScan, PoopScan, Dermascan, Pawscan)</a:t>
+            </a:r>
+          </a:p>
+        </p:txBody>
+      </p:sp>
+      <p:sp>
+        <p:nvSpPr>
+          <p:cNvPr id="136" name="Rectangle 135"/>
           <p:cNvSpPr/>
           <p:nvPr/>
         </p:nvSpPr>
         <p:spPr>
           <a:xfrm>
-            <a:off x="6213348" y="3264408"/>
-            <a:ext cx="749808" cy="141732"/>
-          </a:xfrm>
-          <a:prstGeom prst="rect">
-            <a:avLst/>
-          </a:prstGeom>
-          <a:solidFill>
-            <a:srgbClr val="E3F2FD"/>
+            <a:off x="6176772" y="3901744"/>
+            <a:ext cx="2882646" cy="718718"/>
+          </a:xfrm>
+          <a:prstGeom prst="rect">
+            <a:avLst/>
+          </a:prstGeom>
+          <a:solidFill>
+            <a:srgbClr val="FFFFFF"/>
           </a:solidFill>
           <a:ln w="6350">
             <a:solidFill>
-              <a:srgbClr val="E3F2FD"/>
+              <a:srgbClr val="D0D5DD"/>
             </a:solidFill>
           </a:ln>
         </p:spPr>
@@ -8318,55 +8395,20 @@
       </p:sp>
       <p:sp>
         <p:nvSpPr>
-          <p:cNvPr id="134" name="TextBox 133"/>
-          <p:cNvSpPr txBox="1"/>
-          <p:nvPr/>
-        </p:nvSpPr>
-        <p:spPr>
-          <a:xfrm>
-            <a:off x="6222492" y="3273551"/>
-            <a:ext cx="731520" cy="128016"/>
-          </a:xfrm>
-          <a:prstGeom prst="rect">
-            <a:avLst/>
-          </a:prstGeom>
-          <a:noFill/>
-        </p:spPr>
-        <p:txBody>
-          <a:bodyPr wrap="square">
-            <a:spAutoFit/>
-          </a:bodyPr>
-          <a:lstStyle/>
-          <a:p>
-            <a:pPr algn="l"/>
-            <a:r>
-              <a:rPr sz="650" b="1" i="0">
-                <a:solidFill>
-                  <a:srgbClr val="0D47A1"/>
-                </a:solidFill>
-                <a:latin typeface="Segoe UI"/>
-              </a:rPr>
-              <a:t>⟳ In Progress</a:t>
-            </a:r>
-          </a:p>
-        </p:txBody>
-      </p:sp>
-      <p:sp>
-        <p:nvSpPr>
-          <p:cNvPr id="135" name="Rectangle 134"/>
+          <p:cNvPr id="137" name="Rectangle 136"/>
           <p:cNvSpPr/>
           <p:nvPr/>
         </p:nvSpPr>
         <p:spPr>
           <a:xfrm>
-            <a:off x="6268212" y="3474720"/>
-            <a:ext cx="36576" cy="36576"/>
-          </a:xfrm>
-          <a:prstGeom prst="rect">
-            <a:avLst/>
-          </a:prstGeom>
-          <a:solidFill>
-            <a:srgbClr val="90A4AE"/>
+            <a:off x="6176772" y="3901744"/>
+            <a:ext cx="36576" cy="718718"/>
+          </a:xfrm>
+          <a:prstGeom prst="rect">
+            <a:avLst/>
+          </a:prstGeom>
+          <a:solidFill>
+            <a:srgbClr val="1565C0"/>
           </a:solidFill>
           <a:ln>
             <a:noFill/>
@@ -8396,14 +8438,14 @@
       </p:sp>
       <p:sp>
         <p:nvSpPr>
-          <p:cNvPr id="136" name="TextBox 135"/>
+          <p:cNvPr id="138" name="TextBox 137"/>
           <p:cNvSpPr txBox="1"/>
           <p:nvPr/>
         </p:nvSpPr>
         <p:spPr>
           <a:xfrm>
-            <a:off x="6332220" y="3424427"/>
-            <a:ext cx="2681478" cy="150875"/>
+            <a:off x="6268212" y="3920032"/>
+            <a:ext cx="2754629" cy="178308"/>
           </a:xfrm>
           <a:prstGeom prst="rect">
             <a:avLst/>
@@ -8418,33 +8460,33 @@
           <a:p>
             <a:pPr algn="l"/>
             <a:r>
-              <a:rPr sz="750" b="0" i="0">
-                <a:solidFill>
-                  <a:srgbClr val="333333"/>
+              <a:rPr sz="850" b="1" i="0">
+                <a:solidFill>
+                  <a:srgbClr val="0D47A1"/>
                 </a:solidFill>
                 <a:latin typeface="Segoe UI"/>
               </a:rPr>
-              <a:t>Onboarding 7 live tools to SDK Manager with Config IDs</a:t>
-            </a:r>
-          </a:p>
-        </p:txBody>
-      </p:sp>
-      <p:sp>
-        <p:nvSpPr>
-          <p:cNvPr id="137" name="Rectangle 136"/>
+              <a:t>Platform Stability &amp; Modernization</a:t>
+            </a:r>
+          </a:p>
+        </p:txBody>
+      </p:sp>
+      <p:sp>
+        <p:nvSpPr>
+          <p:cNvPr id="139" name="Rectangle 138"/>
           <p:cNvSpPr/>
           <p:nvPr/>
         </p:nvSpPr>
         <p:spPr>
           <a:xfrm>
-            <a:off x="6268212" y="3607308"/>
-            <a:ext cx="36576" cy="36576"/>
-          </a:xfrm>
-          <a:prstGeom prst="rect">
-            <a:avLst/>
-          </a:prstGeom>
-          <a:solidFill>
-            <a:srgbClr val="90A4AE"/>
+            <a:off x="6268212" y="4089196"/>
+            <a:ext cx="2754629" cy="7315"/>
+          </a:xfrm>
+          <a:prstGeom prst="rect">
+            <a:avLst/>
+          </a:prstGeom>
+          <a:solidFill>
+            <a:srgbClr val="D0D5DD"/>
           </a:solidFill>
           <a:ln>
             <a:noFill/>
@@ -8474,14 +8516,14 @@
       </p:sp>
       <p:sp>
         <p:nvSpPr>
-          <p:cNvPr id="138" name="TextBox 137"/>
+          <p:cNvPr id="140" name="TextBox 139"/>
           <p:cNvSpPr txBox="1"/>
           <p:nvPr/>
         </p:nvSpPr>
         <p:spPr>
           <a:xfrm>
-            <a:off x="6332220" y="3557015"/>
-            <a:ext cx="2681478" cy="150875"/>
+            <a:off x="6286500" y="4116628"/>
+            <a:ext cx="2718053" cy="132588"/>
           </a:xfrm>
           <a:prstGeom prst="rect">
             <a:avLst/>
@@ -8496,38 +8538,36 @@
           <a:p>
             <a:pPr algn="l"/>
             <a:r>
-              <a:rPr sz="750" b="0" i="0">
-                <a:solidFill>
-                  <a:srgbClr val="333333"/>
+              <a:rPr sz="700" b="1" i="0">
+                <a:solidFill>
+                  <a:srgbClr val="37474F"/>
                 </a:solidFill>
                 <a:latin typeface="Segoe UI"/>
               </a:rPr>
-              <a:t>(PWC, KWC, ToothCheck, ToothScan, PoopScan, Dermascan, Pawscan)</a:t>
-            </a:r>
-          </a:p>
-        </p:txBody>
-      </p:sp>
-      <p:sp>
-        <p:nvSpPr>
-          <p:cNvPr id="139" name="Rectangle 138"/>
+              <a:t>PLANNED</a:t>
+            </a:r>
+          </a:p>
+        </p:txBody>
+      </p:sp>
+      <p:sp>
+        <p:nvSpPr>
+          <p:cNvPr id="141" name="Rectangle 140"/>
           <p:cNvSpPr/>
           <p:nvPr/>
         </p:nvSpPr>
         <p:spPr>
           <a:xfrm>
-            <a:off x="6158484" y="3781044"/>
-            <a:ext cx="2919222" cy="690372"/>
-          </a:xfrm>
-          <a:prstGeom prst="rect">
-            <a:avLst/>
-          </a:prstGeom>
-          <a:solidFill>
-            <a:srgbClr val="FFFFFF"/>
-          </a:solidFill>
-          <a:ln w="6350">
-            <a:solidFill>
-              <a:srgbClr val="E0E4EA"/>
-            </a:solidFill>
+            <a:off x="6341364" y="4317796"/>
+            <a:ext cx="29260" cy="29260"/>
+          </a:xfrm>
+          <a:prstGeom prst="rect">
+            <a:avLst/>
+          </a:prstGeom>
+          <a:solidFill>
+            <a:srgbClr val="D0D5DD"/>
+          </a:solidFill>
+          <a:ln>
+            <a:noFill/>
           </a:ln>
         </p:spPr>
         <p:style>
@@ -8554,20 +8594,55 @@
       </p:sp>
       <p:sp>
         <p:nvSpPr>
-          <p:cNvPr id="140" name="Rectangle 139"/>
+          <p:cNvPr id="142" name="TextBox 141"/>
+          <p:cNvSpPr txBox="1"/>
+          <p:nvPr/>
+        </p:nvSpPr>
+        <p:spPr>
+          <a:xfrm>
+            <a:off x="6405372" y="4267504"/>
+            <a:ext cx="2590038" cy="153619"/>
+          </a:xfrm>
+          <a:prstGeom prst="rect">
+            <a:avLst/>
+          </a:prstGeom>
+          <a:noFill/>
+        </p:spPr>
+        <p:txBody>
+          <a:bodyPr wrap="square">
+            <a:spAutoFit/>
+          </a:bodyPr>
+          <a:lstStyle/>
+          <a:p>
+            <a:pPr algn="l"/>
+            <a:r>
+              <a:rPr sz="750" b="0" i="0">
+                <a:solidFill>
+                  <a:srgbClr val="444444"/>
+                </a:solidFill>
+                <a:latin typeface="Segoe UI"/>
+              </a:rPr>
+              <a:t>Reusable large text content component for D&amp;D builder</a:t>
+            </a:r>
+          </a:p>
+        </p:txBody>
+      </p:sp>
+      <p:sp>
+        <p:nvSpPr>
+          <p:cNvPr id="143" name="Rectangle 142"/>
           <p:cNvSpPr/>
           <p:nvPr/>
         </p:nvSpPr>
         <p:spPr>
           <a:xfrm>
-            <a:off x="6158484" y="3781044"/>
-            <a:ext cx="2919222" cy="192024"/>
-          </a:xfrm>
-          <a:prstGeom prst="rect">
-            <a:avLst/>
-          </a:prstGeom>
-          <a:solidFill>
-            <a:srgbClr val="37474F"/>
+            <a:off x="6341364" y="4453128"/>
+            <a:ext cx="29260" cy="29260"/>
+          </a:xfrm>
+          <a:prstGeom prst="rect">
+            <a:avLst/>
+          </a:prstGeom>
+          <a:solidFill>
+            <a:srgbClr val="D0D5DD"/>
           </a:solidFill>
           <a:ln>
             <a:noFill/>
@@ -8597,14 +8672,14 @@
       </p:sp>
       <p:sp>
         <p:nvSpPr>
-          <p:cNvPr id="141" name="TextBox 140"/>
+          <p:cNvPr id="144" name="TextBox 143"/>
           <p:cNvSpPr txBox="1"/>
           <p:nvPr/>
         </p:nvSpPr>
         <p:spPr>
           <a:xfrm>
-            <a:off x="6222492" y="3808476"/>
-            <a:ext cx="2827782" cy="155448"/>
+            <a:off x="6405372" y="4402836"/>
+            <a:ext cx="2590038" cy="153619"/>
           </a:xfrm>
           <a:prstGeom prst="rect">
             <a:avLst/>
@@ -8619,37 +8694,37 @@
           <a:p>
             <a:pPr algn="l"/>
             <a:r>
-              <a:rPr sz="800" b="1" i="0">
-                <a:solidFill>
-                  <a:srgbClr val="FFFFFF"/>
+              <a:rPr sz="750" b="0" i="0">
+                <a:solidFill>
+                  <a:srgbClr val="444444"/>
                 </a:solidFill>
                 <a:latin typeface="Segoe UI"/>
               </a:rPr>
-              <a:t>Platform Stability &amp; Modernization</a:t>
-            </a:r>
-          </a:p>
-        </p:txBody>
-      </p:sp>
-      <p:sp>
-        <p:nvSpPr>
-          <p:cNvPr id="142" name="Rectangle 141"/>
+              <a:t>SDK Version Template listing by species &amp; tool</a:t>
+            </a:r>
+          </a:p>
+        </p:txBody>
+      </p:sp>
+      <p:sp>
+        <p:nvSpPr>
+          <p:cNvPr id="145" name="Rectangle 144"/>
           <p:cNvSpPr/>
           <p:nvPr/>
         </p:nvSpPr>
         <p:spPr>
           <a:xfrm>
-            <a:off x="6213348" y="4009644"/>
-            <a:ext cx="749808" cy="141732"/>
-          </a:xfrm>
-          <a:prstGeom prst="rect">
-            <a:avLst/>
-          </a:prstGeom>
-          <a:solidFill>
-            <a:srgbClr val="F3E5F5"/>
+            <a:off x="6176772" y="4693615"/>
+            <a:ext cx="2882646" cy="583387"/>
+          </a:xfrm>
+          <a:prstGeom prst="rect">
+            <a:avLst/>
+          </a:prstGeom>
+          <a:solidFill>
+            <a:srgbClr val="FFFFFF"/>
           </a:solidFill>
           <a:ln w="6350">
             <a:solidFill>
-              <a:srgbClr val="F3E5F5"/>
+              <a:srgbClr val="D0D5DD"/>
             </a:solidFill>
           </a:ln>
         </p:spPr>
@@ -8677,55 +8752,20 @@
       </p:sp>
       <p:sp>
         <p:nvSpPr>
-          <p:cNvPr id="143" name="TextBox 142"/>
-          <p:cNvSpPr txBox="1"/>
-          <p:nvPr/>
-        </p:nvSpPr>
-        <p:spPr>
-          <a:xfrm>
-            <a:off x="6222492" y="4018787"/>
-            <a:ext cx="731520" cy="128016"/>
-          </a:xfrm>
-          <a:prstGeom prst="rect">
-            <a:avLst/>
-          </a:prstGeom>
-          <a:noFill/>
-        </p:spPr>
-        <p:txBody>
-          <a:bodyPr wrap="square">
-            <a:spAutoFit/>
-          </a:bodyPr>
-          <a:lstStyle/>
-          <a:p>
-            <a:pPr algn="l"/>
-            <a:r>
-              <a:rPr sz="650" b="1" i="0">
-                <a:solidFill>
-                  <a:srgbClr val="4A148C"/>
-                </a:solidFill>
-                <a:latin typeface="Segoe UI"/>
-              </a:rPr>
-              <a:t>◷ Planned</a:t>
-            </a:r>
-          </a:p>
-        </p:txBody>
-      </p:sp>
-      <p:sp>
-        <p:nvSpPr>
-          <p:cNvPr id="144" name="Rectangle 143"/>
+          <p:cNvPr id="146" name="Rectangle 145"/>
           <p:cNvSpPr/>
           <p:nvPr/>
         </p:nvSpPr>
         <p:spPr>
           <a:xfrm>
-            <a:off x="6268212" y="4219955"/>
-            <a:ext cx="36576" cy="36576"/>
-          </a:xfrm>
-          <a:prstGeom prst="rect">
-            <a:avLst/>
-          </a:prstGeom>
-          <a:solidFill>
-            <a:srgbClr val="90A4AE"/>
+            <a:off x="6176772" y="4693615"/>
+            <a:ext cx="36576" cy="583387"/>
+          </a:xfrm>
+          <a:prstGeom prst="rect">
+            <a:avLst/>
+          </a:prstGeom>
+          <a:solidFill>
+            <a:srgbClr val="1565C0"/>
           </a:solidFill>
           <a:ln>
             <a:noFill/>
@@ -8755,14 +8795,14 @@
       </p:sp>
       <p:sp>
         <p:nvSpPr>
-          <p:cNvPr id="145" name="TextBox 144"/>
+          <p:cNvPr id="147" name="TextBox 146"/>
           <p:cNvSpPr txBox="1"/>
           <p:nvPr/>
         </p:nvSpPr>
         <p:spPr>
           <a:xfrm>
-            <a:off x="6332220" y="4169663"/>
-            <a:ext cx="2681478" cy="150875"/>
+            <a:off x="6268212" y="4711903"/>
+            <a:ext cx="2754629" cy="178308"/>
           </a:xfrm>
           <a:prstGeom prst="rect">
             <a:avLst/>
@@ -8777,33 +8817,33 @@
           <a:p>
             <a:pPr algn="l"/>
             <a:r>
-              <a:rPr sz="750" b="0" i="0">
-                <a:solidFill>
-                  <a:srgbClr val="333333"/>
+              <a:rPr sz="850" b="1" i="0">
+                <a:solidFill>
+                  <a:srgbClr val="0D47A1"/>
                 </a:solidFill>
                 <a:latin typeface="Segoe UI"/>
               </a:rPr>
-              <a:t>Reusable large text content component for Drag &amp; Drop builder</a:t>
-            </a:r>
-          </a:p>
-        </p:txBody>
-      </p:sp>
-      <p:sp>
-        <p:nvSpPr>
-          <p:cNvPr id="146" name="Rectangle 145"/>
+              <a:t>Template Creation from SDK Version</a:t>
+            </a:r>
+          </a:p>
+        </p:txBody>
+      </p:sp>
+      <p:sp>
+        <p:nvSpPr>
+          <p:cNvPr id="148" name="Rectangle 147"/>
           <p:cNvSpPr/>
           <p:nvPr/>
         </p:nvSpPr>
         <p:spPr>
           <a:xfrm>
-            <a:off x="6268212" y="4352543"/>
-            <a:ext cx="36576" cy="36576"/>
-          </a:xfrm>
-          <a:prstGeom prst="rect">
-            <a:avLst/>
-          </a:prstGeom>
-          <a:solidFill>
-            <a:srgbClr val="90A4AE"/>
+            <a:off x="6268212" y="4881067"/>
+            <a:ext cx="2754629" cy="7315"/>
+          </a:xfrm>
+          <a:prstGeom prst="rect">
+            <a:avLst/>
+          </a:prstGeom>
+          <a:solidFill>
+            <a:srgbClr val="D0D5DD"/>
           </a:solidFill>
           <a:ln>
             <a:noFill/>
@@ -8833,14 +8873,14 @@
       </p:sp>
       <p:sp>
         <p:nvSpPr>
-          <p:cNvPr id="147" name="TextBox 146"/>
+          <p:cNvPr id="149" name="TextBox 148"/>
           <p:cNvSpPr txBox="1"/>
           <p:nvPr/>
         </p:nvSpPr>
         <p:spPr>
           <a:xfrm>
-            <a:off x="6332220" y="4302251"/>
-            <a:ext cx="2681478" cy="150875"/>
+            <a:off x="6286500" y="4908499"/>
+            <a:ext cx="2718053" cy="132588"/>
           </a:xfrm>
           <a:prstGeom prst="rect">
             <a:avLst/>
@@ -8855,38 +8895,36 @@
           <a:p>
             <a:pPr algn="l"/>
             <a:r>
-              <a:rPr sz="750" b="0" i="0">
-                <a:solidFill>
-                  <a:srgbClr val="333333"/>
+              <a:rPr sz="700" b="1" i="0">
+                <a:solidFill>
+                  <a:srgbClr val="37474F"/>
                 </a:solidFill>
                 <a:latin typeface="Segoe UI"/>
               </a:rPr>
-              <a:t>SDK Version Template listing by species &amp; tool</a:t>
-            </a:r>
-          </a:p>
-        </p:txBody>
-      </p:sp>
-      <p:sp>
-        <p:nvSpPr>
-          <p:cNvPr id="148" name="Rectangle 147"/>
+              <a:t>PLANNED</a:t>
+            </a:r>
+          </a:p>
+        </p:txBody>
+      </p:sp>
+      <p:sp>
+        <p:nvSpPr>
+          <p:cNvPr id="150" name="Rectangle 149"/>
           <p:cNvSpPr/>
           <p:nvPr/>
         </p:nvSpPr>
         <p:spPr>
           <a:xfrm>
-            <a:off x="6158484" y="4526279"/>
-            <a:ext cx="2919222" cy="557784"/>
-          </a:xfrm>
-          <a:prstGeom prst="rect">
-            <a:avLst/>
-          </a:prstGeom>
-          <a:solidFill>
-            <a:srgbClr val="FFFFFF"/>
-          </a:solidFill>
-          <a:ln w="6350">
-            <a:solidFill>
-              <a:srgbClr val="E0E4EA"/>
-            </a:solidFill>
+            <a:off x="6341364" y="5109667"/>
+            <a:ext cx="29260" cy="29260"/>
+          </a:xfrm>
+          <a:prstGeom prst="rect">
+            <a:avLst/>
+          </a:prstGeom>
+          <a:solidFill>
+            <a:srgbClr val="D0D5DD"/>
+          </a:solidFill>
+          <a:ln>
+            <a:noFill/>
           </a:ln>
         </p:spPr>
         <p:style>
@@ -8913,20 +8951,90 @@
       </p:sp>
       <p:sp>
         <p:nvSpPr>
-          <p:cNvPr id="149" name="Rectangle 148"/>
+          <p:cNvPr id="151" name="TextBox 150"/>
+          <p:cNvSpPr txBox="1"/>
+          <p:nvPr/>
+        </p:nvSpPr>
+        <p:spPr>
+          <a:xfrm>
+            <a:off x="6405372" y="5059375"/>
+            <a:ext cx="2590038" cy="153619"/>
+          </a:xfrm>
+          <a:prstGeom prst="rect">
+            <a:avLst/>
+          </a:prstGeom>
+          <a:noFill/>
+        </p:spPr>
+        <p:txBody>
+          <a:bodyPr wrap="square">
+            <a:spAutoFit/>
+          </a:bodyPr>
+          <a:lstStyle/>
+          <a:p>
+            <a:pPr algn="l"/>
+            <a:r>
+              <a:rPr sz="750" b="0" i="0">
+                <a:solidFill>
+                  <a:srgbClr val="444444"/>
+                </a:solidFill>
+                <a:latin typeface="Segoe UI"/>
+              </a:rPr>
+              <a:t>Template creation from existing SDK Version in SDK Manager</a:t>
+            </a:r>
+          </a:p>
+        </p:txBody>
+      </p:sp>
+      <p:sp>
+        <p:nvSpPr>
+          <p:cNvPr id="152" name="TextBox 151"/>
+          <p:cNvSpPr txBox="1"/>
+          <p:nvPr/>
+        </p:nvSpPr>
+        <p:spPr>
+          <a:xfrm>
+            <a:off x="9224010" y="676656"/>
+            <a:ext cx="2882646" cy="182880"/>
+          </a:xfrm>
+          <a:prstGeom prst="rect">
+            <a:avLst/>
+          </a:prstGeom>
+          <a:noFill/>
+        </p:spPr>
+        <p:txBody>
+          <a:bodyPr wrap="square">
+            <a:spAutoFit/>
+          </a:bodyPr>
+          <a:lstStyle/>
+          <a:p>
+            <a:pPr algn="l"/>
+            <a:r>
+              <a:rPr sz="700" b="1" i="0">
+                <a:solidFill>
+                  <a:srgbClr val="37474F"/>
+                </a:solidFill>
+                <a:latin typeface="Segoe UI"/>
+              </a:rPr>
+              <a:t>DevOps, Monitoring &amp; Cross-Cutting</a:t>
+            </a:r>
+          </a:p>
+        </p:txBody>
+      </p:sp>
+      <p:sp>
+        <p:nvSpPr>
+          <p:cNvPr id="153" name="Rectangle 152"/>
           <p:cNvSpPr/>
           <p:nvPr/>
         </p:nvSpPr>
         <p:spPr>
           <a:xfrm>
-            <a:off x="6158484" y="4526279"/>
-            <a:ext cx="2919222" cy="192024"/>
-          </a:xfrm>
-          <a:prstGeom prst="rect">
-            <a:avLst/>
-          </a:prstGeom>
-          <a:solidFill>
-            <a:srgbClr val="880E4F"/>
+            <a:off x="9224010" y="868680"/>
+            <a:ext cx="2882646" cy="10972"/>
+          </a:xfrm>
+          <a:prstGeom prst="rect">
+            <a:avLst/>
+          </a:prstGeom>
+          <a:solidFill>
+            <a:srgbClr val="D0D5DD"/>
           </a:solidFill>
           <a:ln>
             <a:noFill/>
@@ -8956,59 +9064,24 @@
       </p:sp>
       <p:sp>
         <p:nvSpPr>
-          <p:cNvPr id="150" name="TextBox 149"/>
-          <p:cNvSpPr txBox="1"/>
-          <p:nvPr/>
-        </p:nvSpPr>
-        <p:spPr>
-          <a:xfrm>
-            <a:off x="6222492" y="4553712"/>
-            <a:ext cx="2827782" cy="155448"/>
-          </a:xfrm>
-          <a:prstGeom prst="rect">
-            <a:avLst/>
-          </a:prstGeom>
-          <a:noFill/>
-        </p:spPr>
-        <p:txBody>
-          <a:bodyPr wrap="square">
-            <a:spAutoFit/>
-          </a:bodyPr>
-          <a:lstStyle/>
-          <a:p>
-            <a:pPr algn="l"/>
-            <a:r>
-              <a:rPr sz="800" b="1" i="0">
-                <a:solidFill>
-                  <a:srgbClr val="FFFFFF"/>
-                </a:solidFill>
-                <a:latin typeface="Segoe UI"/>
-              </a:rPr>
-              <a:t>Template Creation from SDK Version</a:t>
-            </a:r>
-          </a:p>
-        </p:txBody>
-      </p:sp>
-      <p:sp>
-        <p:nvSpPr>
-          <p:cNvPr id="151" name="Rectangle 150"/>
+          <p:cNvPr id="154" name="Rectangle 153"/>
           <p:cNvSpPr/>
           <p:nvPr/>
         </p:nvSpPr>
         <p:spPr>
           <a:xfrm>
-            <a:off x="6213348" y="4754879"/>
-            <a:ext cx="749808" cy="141732"/>
-          </a:xfrm>
-          <a:prstGeom prst="rect">
-            <a:avLst/>
-          </a:prstGeom>
-          <a:solidFill>
-            <a:srgbClr val="F3E5F5"/>
+            <a:off x="9224010" y="923544"/>
+            <a:ext cx="2882646" cy="718718"/>
+          </a:xfrm>
+          <a:prstGeom prst="rect">
+            <a:avLst/>
+          </a:prstGeom>
+          <a:solidFill>
+            <a:srgbClr val="FFFFFF"/>
           </a:solidFill>
           <a:ln w="6350">
             <a:solidFill>
-              <a:srgbClr val="F3E5F5"/>
+              <a:srgbClr val="D0D5DD"/>
             </a:solidFill>
           </a:ln>
         </p:spPr>
@@ -9036,55 +9109,20 @@
       </p:sp>
       <p:sp>
         <p:nvSpPr>
-          <p:cNvPr id="152" name="TextBox 151"/>
-          <p:cNvSpPr txBox="1"/>
-          <p:nvPr/>
-        </p:nvSpPr>
-        <p:spPr>
-          <a:xfrm>
-            <a:off x="6222492" y="4764023"/>
-            <a:ext cx="731520" cy="128016"/>
-          </a:xfrm>
-          <a:prstGeom prst="rect">
-            <a:avLst/>
-          </a:prstGeom>
-          <a:noFill/>
-        </p:spPr>
-        <p:txBody>
-          <a:bodyPr wrap="square">
-            <a:spAutoFit/>
-          </a:bodyPr>
-          <a:lstStyle/>
-          <a:p>
-            <a:pPr algn="l"/>
-            <a:r>
-              <a:rPr sz="650" b="1" i="0">
-                <a:solidFill>
-                  <a:srgbClr val="4A148C"/>
-                </a:solidFill>
-                <a:latin typeface="Segoe UI"/>
-              </a:rPr>
-              <a:t>◷ Planned</a:t>
-            </a:r>
-          </a:p>
-        </p:txBody>
-      </p:sp>
-      <p:sp>
-        <p:nvSpPr>
-          <p:cNvPr id="153" name="Rectangle 152"/>
+          <p:cNvPr id="155" name="Rectangle 154"/>
           <p:cNvSpPr/>
           <p:nvPr/>
         </p:nvSpPr>
         <p:spPr>
           <a:xfrm>
-            <a:off x="6268212" y="4965191"/>
-            <a:ext cx="36576" cy="36576"/>
-          </a:xfrm>
-          <a:prstGeom prst="rect">
-            <a:avLst/>
-          </a:prstGeom>
-          <a:solidFill>
-            <a:srgbClr val="90A4AE"/>
+            <a:off x="9224010" y="923544"/>
+            <a:ext cx="36576" cy="718718"/>
+          </a:xfrm>
+          <a:prstGeom prst="rect">
+            <a:avLst/>
+          </a:prstGeom>
+          <a:solidFill>
+            <a:srgbClr val="1565C0"/>
           </a:solidFill>
           <a:ln>
             <a:noFill/>
@@ -9114,14 +9152,14 @@
       </p:sp>
       <p:sp>
         <p:nvSpPr>
-          <p:cNvPr id="154" name="TextBox 153"/>
+          <p:cNvPr id="156" name="TextBox 155"/>
           <p:cNvSpPr txBox="1"/>
           <p:nvPr/>
         </p:nvSpPr>
         <p:spPr>
           <a:xfrm>
-            <a:off x="6332220" y="4914899"/>
-            <a:ext cx="2681478" cy="150875"/>
+            <a:off x="9315450" y="941832"/>
+            <a:ext cx="2754629" cy="178308"/>
           </a:xfrm>
           <a:prstGeom prst="rect">
             <a:avLst/>
@@ -9136,73 +9174,36 @@
           <a:p>
             <a:pPr algn="l"/>
             <a:r>
-              <a:rPr sz="750" b="0" i="0">
-                <a:solidFill>
-                  <a:srgbClr val="333333"/>
+              <a:rPr sz="850" b="1" i="0">
+                <a:solidFill>
+                  <a:srgbClr val="0D47A1"/>
                 </a:solidFill>
                 <a:latin typeface="Segoe UI"/>
               </a:rPr>
-              <a:t>Template creation from existing SDK Version in SDK Manager</a:t>
-            </a:r>
-          </a:p>
-        </p:txBody>
-      </p:sp>
-      <p:sp>
-        <p:nvSpPr>
-          <p:cNvPr id="155" name="TextBox 154"/>
-          <p:cNvSpPr txBox="1"/>
-          <p:nvPr/>
-        </p:nvSpPr>
-        <p:spPr>
-          <a:xfrm>
-            <a:off x="9205722" y="713232"/>
-            <a:ext cx="2919222" cy="201168"/>
-          </a:xfrm>
-          <a:prstGeom prst="rect">
-            <a:avLst/>
-          </a:prstGeom>
-          <a:noFill/>
-        </p:spPr>
-        <p:txBody>
-          <a:bodyPr wrap="square">
-            <a:spAutoFit/>
-          </a:bodyPr>
-          <a:lstStyle/>
-          <a:p>
-            <a:pPr algn="l"/>
-            <a:r>
-              <a:rPr sz="700" b="1" i="0">
-                <a:solidFill>
-                  <a:srgbClr val="546E7A"/>
-                </a:solidFill>
-                <a:latin typeface="Segoe UI"/>
-              </a:rPr>
-              <a:t>DevOps, Monitoring &amp; Cross-Cutting</a:t>
-            </a:r>
-          </a:p>
-        </p:txBody>
-      </p:sp>
-      <p:sp>
-        <p:nvSpPr>
-          <p:cNvPr id="156" name="Rectangle 155"/>
+              <a:t>DevOps – Apply DevOps Practices</a:t>
+            </a:r>
+          </a:p>
+        </p:txBody>
+      </p:sp>
+      <p:sp>
+        <p:nvSpPr>
+          <p:cNvPr id="157" name="Rectangle 156"/>
           <p:cNvSpPr/>
           <p:nvPr/>
         </p:nvSpPr>
         <p:spPr>
           <a:xfrm>
-            <a:off x="9205722" y="950976"/>
-            <a:ext cx="2919222" cy="690372"/>
-          </a:xfrm>
-          <a:prstGeom prst="rect">
-            <a:avLst/>
-          </a:prstGeom>
-          <a:solidFill>
-            <a:srgbClr val="FFFFFF"/>
-          </a:solidFill>
-          <a:ln w="6350">
-            <a:solidFill>
-              <a:srgbClr val="E0E4EA"/>
-            </a:solidFill>
+            <a:off x="9315450" y="1110996"/>
+            <a:ext cx="2754629" cy="7315"/>
+          </a:xfrm>
+          <a:prstGeom prst="rect">
+            <a:avLst/>
+          </a:prstGeom>
+          <a:solidFill>
+            <a:srgbClr val="D0D5DD"/>
+          </a:solidFill>
+          <a:ln>
+            <a:noFill/>
           </a:ln>
         </p:spPr>
         <p:style>
@@ -9229,20 +9230,55 @@
       </p:sp>
       <p:sp>
         <p:nvSpPr>
-          <p:cNvPr id="157" name="Rectangle 156"/>
+          <p:cNvPr id="158" name="TextBox 157"/>
+          <p:cNvSpPr txBox="1"/>
+          <p:nvPr/>
+        </p:nvSpPr>
+        <p:spPr>
+          <a:xfrm>
+            <a:off x="9333738" y="1138428"/>
+            <a:ext cx="2718053" cy="132588"/>
+          </a:xfrm>
+          <a:prstGeom prst="rect">
+            <a:avLst/>
+          </a:prstGeom>
+          <a:noFill/>
+        </p:spPr>
+        <p:txBody>
+          <a:bodyPr wrap="square">
+            <a:spAutoFit/>
+          </a:bodyPr>
+          <a:lstStyle/>
+          <a:p>
+            <a:pPr algn="l"/>
+            <a:r>
+              <a:rPr sz="700" b="1" i="0">
+                <a:solidFill>
+                  <a:srgbClr val="37474F"/>
+                </a:solidFill>
+                <a:latin typeface="Segoe UI"/>
+              </a:rPr>
+              <a:t>IN PROGRESS</a:t>
+            </a:r>
+          </a:p>
+        </p:txBody>
+      </p:sp>
+      <p:sp>
+        <p:nvSpPr>
+          <p:cNvPr id="159" name="Rectangle 158"/>
           <p:cNvSpPr/>
           <p:nvPr/>
         </p:nvSpPr>
         <p:spPr>
           <a:xfrm>
-            <a:off x="9205722" y="950976"/>
-            <a:ext cx="2919222" cy="192024"/>
-          </a:xfrm>
-          <a:prstGeom prst="rect">
-            <a:avLst/>
-          </a:prstGeom>
-          <a:solidFill>
-            <a:srgbClr val="BF360C"/>
+            <a:off x="9388602" y="1339596"/>
+            <a:ext cx="29260" cy="29260"/>
+          </a:xfrm>
+          <a:prstGeom prst="rect">
+            <a:avLst/>
+          </a:prstGeom>
+          <a:solidFill>
+            <a:srgbClr val="D0D5DD"/>
           </a:solidFill>
           <a:ln>
             <a:noFill/>
@@ -9272,14 +9308,14 @@
       </p:sp>
       <p:sp>
         <p:nvSpPr>
-          <p:cNvPr id="158" name="TextBox 157"/>
+          <p:cNvPr id="160" name="TextBox 159"/>
           <p:cNvSpPr txBox="1"/>
           <p:nvPr/>
         </p:nvSpPr>
         <p:spPr>
           <a:xfrm>
-            <a:off x="9269730" y="978408"/>
-            <a:ext cx="2827782" cy="155448"/>
+            <a:off x="9452610" y="1289304"/>
+            <a:ext cx="2590038" cy="153619"/>
           </a:xfrm>
           <a:prstGeom prst="rect">
             <a:avLst/>
@@ -9294,38 +9330,36 @@
           <a:p>
             <a:pPr algn="l"/>
             <a:r>
-              <a:rPr sz="800" b="1" i="0">
-                <a:solidFill>
-                  <a:srgbClr val="FFFFFF"/>
+              <a:rPr sz="750" b="0" i="0">
+                <a:solidFill>
+                  <a:srgbClr val="444444"/>
                 </a:solidFill>
                 <a:latin typeface="Segoe UI"/>
               </a:rPr>
-              <a:t>DevOps – Apply DevOps Practices</a:t>
-            </a:r>
-          </a:p>
-        </p:txBody>
-      </p:sp>
-      <p:sp>
-        <p:nvSpPr>
-          <p:cNvPr id="159" name="Rectangle 158"/>
+              <a:t>Sprint 48 CI/CD workflow maintenance &amp; fixes</a:t>
+            </a:r>
+          </a:p>
+        </p:txBody>
+      </p:sp>
+      <p:sp>
+        <p:nvSpPr>
+          <p:cNvPr id="161" name="Rectangle 160"/>
           <p:cNvSpPr/>
           <p:nvPr/>
         </p:nvSpPr>
         <p:spPr>
           <a:xfrm>
-            <a:off x="9260586" y="1179576"/>
-            <a:ext cx="749808" cy="141732"/>
-          </a:xfrm>
-          <a:prstGeom prst="rect">
-            <a:avLst/>
-          </a:prstGeom>
-          <a:solidFill>
-            <a:srgbClr val="E3F2FD"/>
-          </a:solidFill>
-          <a:ln w="6350">
-            <a:solidFill>
-              <a:srgbClr val="E3F2FD"/>
-            </a:solidFill>
+            <a:off x="9388602" y="1474927"/>
+            <a:ext cx="29260" cy="29260"/>
+          </a:xfrm>
+          <a:prstGeom prst="rect">
+            <a:avLst/>
+          </a:prstGeom>
+          <a:solidFill>
+            <a:srgbClr val="D0D5DD"/>
+          </a:solidFill>
+          <a:ln>
+            <a:noFill/>
           </a:ln>
         </p:spPr>
         <p:style>
@@ -9352,14 +9386,14 @@
       </p:sp>
       <p:sp>
         <p:nvSpPr>
-          <p:cNvPr id="160" name="TextBox 159"/>
+          <p:cNvPr id="162" name="TextBox 161"/>
           <p:cNvSpPr txBox="1"/>
           <p:nvPr/>
         </p:nvSpPr>
         <p:spPr>
           <a:xfrm>
-            <a:off x="9269730" y="1188720"/>
-            <a:ext cx="731520" cy="128016"/>
+            <a:off x="9452610" y="1424635"/>
+            <a:ext cx="2590038" cy="153619"/>
           </a:xfrm>
           <a:prstGeom prst="rect">
             <a:avLst/>
@@ -9374,36 +9408,38 @@
           <a:p>
             <a:pPr algn="l"/>
             <a:r>
-              <a:rPr sz="650" b="1" i="0">
-                <a:solidFill>
-                  <a:srgbClr val="0D47A1"/>
+              <a:rPr sz="750" b="0" i="0">
+                <a:solidFill>
+                  <a:srgbClr val="444444"/>
                 </a:solidFill>
                 <a:latin typeface="Segoe UI"/>
               </a:rPr>
-              <a:t>⟳ In Progress</a:t>
-            </a:r>
-          </a:p>
-        </p:txBody>
-      </p:sp>
-      <p:sp>
-        <p:nvSpPr>
-          <p:cNvPr id="161" name="Rectangle 160"/>
+              <a:t>Azure infrastructure provisioning automation discovery</a:t>
+            </a:r>
+          </a:p>
+        </p:txBody>
+      </p:sp>
+      <p:sp>
+        <p:nvSpPr>
+          <p:cNvPr id="163" name="Rectangle 162"/>
           <p:cNvSpPr/>
           <p:nvPr/>
         </p:nvSpPr>
         <p:spPr>
           <a:xfrm>
-            <a:off x="9315450" y="1389888"/>
-            <a:ext cx="36576" cy="36576"/>
-          </a:xfrm>
-          <a:prstGeom prst="rect">
-            <a:avLst/>
-          </a:prstGeom>
-          <a:solidFill>
-            <a:srgbClr val="90A4AE"/>
-          </a:solidFill>
-          <a:ln>
-            <a:noFill/>
+            <a:off x="9224010" y="1715414"/>
+            <a:ext cx="2882646" cy="583387"/>
+          </a:xfrm>
+          <a:prstGeom prst="rect">
+            <a:avLst/>
+          </a:prstGeom>
+          <a:solidFill>
+            <a:srgbClr val="FFFFFF"/>
+          </a:solidFill>
+          <a:ln w="6350">
+            <a:solidFill>
+              <a:srgbClr val="D0D5DD"/>
+            </a:solidFill>
           </a:ln>
         </p:spPr>
         <p:style>
@@ -9430,55 +9466,20 @@
       </p:sp>
       <p:sp>
         <p:nvSpPr>
-          <p:cNvPr id="162" name="TextBox 161"/>
-          <p:cNvSpPr txBox="1"/>
-          <p:nvPr/>
-        </p:nvSpPr>
-        <p:spPr>
-          <a:xfrm>
-            <a:off x="9379458" y="1339596"/>
-            <a:ext cx="2681478" cy="150875"/>
-          </a:xfrm>
-          <a:prstGeom prst="rect">
-            <a:avLst/>
-          </a:prstGeom>
-          <a:noFill/>
-        </p:spPr>
-        <p:txBody>
-          <a:bodyPr wrap="square">
-            <a:spAutoFit/>
-          </a:bodyPr>
-          <a:lstStyle/>
-          <a:p>
-            <a:pPr algn="l"/>
-            <a:r>
-              <a:rPr sz="750" b="0" i="0">
-                <a:solidFill>
-                  <a:srgbClr val="333333"/>
-                </a:solidFill>
-                <a:latin typeface="Segoe UI"/>
-              </a:rPr>
-              <a:t>Sprint 48 CI/CD workflow maintenance &amp; fixes</a:t>
-            </a:r>
-          </a:p>
-        </p:txBody>
-      </p:sp>
-      <p:sp>
-        <p:nvSpPr>
-          <p:cNvPr id="163" name="Rectangle 162"/>
+          <p:cNvPr id="164" name="Rectangle 163"/>
           <p:cNvSpPr/>
           <p:nvPr/>
         </p:nvSpPr>
         <p:spPr>
           <a:xfrm>
-            <a:off x="9315450" y="1522476"/>
-            <a:ext cx="36576" cy="36576"/>
-          </a:xfrm>
-          <a:prstGeom prst="rect">
-            <a:avLst/>
-          </a:prstGeom>
-          <a:solidFill>
-            <a:srgbClr val="90A4AE"/>
+            <a:off x="9224010" y="1715414"/>
+            <a:ext cx="36576" cy="583387"/>
+          </a:xfrm>
+          <a:prstGeom prst="rect">
+            <a:avLst/>
+          </a:prstGeom>
+          <a:solidFill>
+            <a:srgbClr val="1565C0"/>
           </a:solidFill>
           <a:ln>
             <a:noFill/>
@@ -9508,14 +9509,14 @@
       </p:sp>
       <p:sp>
         <p:nvSpPr>
-          <p:cNvPr id="164" name="TextBox 163"/>
+          <p:cNvPr id="165" name="TextBox 164"/>
           <p:cNvSpPr txBox="1"/>
           <p:nvPr/>
         </p:nvSpPr>
         <p:spPr>
           <a:xfrm>
-            <a:off x="9379458" y="1472184"/>
-            <a:ext cx="2681478" cy="150875"/>
+            <a:off x="9315450" y="1733702"/>
+            <a:ext cx="2754629" cy="178308"/>
           </a:xfrm>
           <a:prstGeom prst="rect">
             <a:avLst/>
@@ -9530,38 +9531,36 @@
           <a:p>
             <a:pPr algn="l"/>
             <a:r>
-              <a:rPr sz="750" b="0" i="0">
-                <a:solidFill>
-                  <a:srgbClr val="333333"/>
+              <a:rPr sz="850" b="1" i="0">
+                <a:solidFill>
+                  <a:srgbClr val="0D47A1"/>
                 </a:solidFill>
                 <a:latin typeface="Segoe UI"/>
               </a:rPr>
-              <a:t>Azure infrastructure provisioning automation discovery</a:t>
-            </a:r>
-          </a:p>
-        </p:txBody>
-      </p:sp>
-      <p:sp>
-        <p:nvSpPr>
-          <p:cNvPr id="165" name="Rectangle 164"/>
+              <a:t>Daily Production Logs Monitoring</a:t>
+            </a:r>
+          </a:p>
+        </p:txBody>
+      </p:sp>
+      <p:sp>
+        <p:nvSpPr>
+          <p:cNvPr id="166" name="Rectangle 165"/>
           <p:cNvSpPr/>
           <p:nvPr/>
         </p:nvSpPr>
         <p:spPr>
           <a:xfrm>
-            <a:off x="9205722" y="1696212"/>
-            <a:ext cx="2919222" cy="557784"/>
-          </a:xfrm>
-          <a:prstGeom prst="rect">
-            <a:avLst/>
-          </a:prstGeom>
-          <a:solidFill>
-            <a:srgbClr val="FFFFFF"/>
-          </a:solidFill>
-          <a:ln w="6350">
-            <a:solidFill>
-              <a:srgbClr val="E0E4EA"/>
-            </a:solidFill>
+            <a:off x="9315450" y="1902866"/>
+            <a:ext cx="2754629" cy="7315"/>
+          </a:xfrm>
+          <a:prstGeom prst="rect">
+            <a:avLst/>
+          </a:prstGeom>
+          <a:solidFill>
+            <a:srgbClr val="D0D5DD"/>
+          </a:solidFill>
+          <a:ln>
+            <a:noFill/>
           </a:ln>
         </p:spPr>
         <p:style>
@@ -9588,20 +9587,55 @@
       </p:sp>
       <p:sp>
         <p:nvSpPr>
-          <p:cNvPr id="166" name="Rectangle 165"/>
+          <p:cNvPr id="167" name="TextBox 166"/>
+          <p:cNvSpPr txBox="1"/>
+          <p:nvPr/>
+        </p:nvSpPr>
+        <p:spPr>
+          <a:xfrm>
+            <a:off x="9333738" y="1930298"/>
+            <a:ext cx="2718053" cy="132588"/>
+          </a:xfrm>
+          <a:prstGeom prst="rect">
+            <a:avLst/>
+          </a:prstGeom>
+          <a:noFill/>
+        </p:spPr>
+        <p:txBody>
+          <a:bodyPr wrap="square">
+            <a:spAutoFit/>
+          </a:bodyPr>
+          <a:lstStyle/>
+          <a:p>
+            <a:pPr algn="l"/>
+            <a:r>
+              <a:rPr sz="700" b="1" i="0">
+                <a:solidFill>
+                  <a:srgbClr val="37474F"/>
+                </a:solidFill>
+                <a:latin typeface="Segoe UI"/>
+              </a:rPr>
+              <a:t>IN PROGRESS</a:t>
+            </a:r>
+          </a:p>
+        </p:txBody>
+      </p:sp>
+      <p:sp>
+        <p:nvSpPr>
+          <p:cNvPr id="168" name="Rectangle 167"/>
           <p:cNvSpPr/>
           <p:nvPr/>
         </p:nvSpPr>
         <p:spPr>
           <a:xfrm>
-            <a:off x="9205722" y="1696212"/>
-            <a:ext cx="2919222" cy="192024"/>
-          </a:xfrm>
-          <a:prstGeom prst="rect">
-            <a:avLst/>
-          </a:prstGeom>
-          <a:solidFill>
-            <a:srgbClr val="4E342E"/>
+            <a:off x="9388602" y="2131466"/>
+            <a:ext cx="29260" cy="29260"/>
+          </a:xfrm>
+          <a:prstGeom prst="rect">
+            <a:avLst/>
+          </a:prstGeom>
+          <a:solidFill>
+            <a:srgbClr val="D0D5DD"/>
           </a:solidFill>
           <a:ln>
             <a:noFill/>
@@ -9631,14 +9665,14 @@
       </p:sp>
       <p:sp>
         <p:nvSpPr>
-          <p:cNvPr id="167" name="TextBox 166"/>
+          <p:cNvPr id="169" name="TextBox 168"/>
           <p:cNvSpPr txBox="1"/>
           <p:nvPr/>
         </p:nvSpPr>
         <p:spPr>
           <a:xfrm>
-            <a:off x="9269730" y="1723644"/>
-            <a:ext cx="2827782" cy="155448"/>
+            <a:off x="9452610" y="2081174"/>
+            <a:ext cx="2590038" cy="153619"/>
           </a:xfrm>
           <a:prstGeom prst="rect">
             <a:avLst/>
@@ -9653,37 +9687,37 @@
           <a:p>
             <a:pPr algn="l"/>
             <a:r>
-              <a:rPr sz="800" b="1" i="0">
-                <a:solidFill>
-                  <a:srgbClr val="FFFFFF"/>
+              <a:rPr sz="750" b="0" i="0">
+                <a:solidFill>
+                  <a:srgbClr val="444444"/>
                 </a:solidFill>
                 <a:latin typeface="Segoe UI"/>
               </a:rPr>
-              <a:t>Daily Production Logs Monitoring</a:t>
-            </a:r>
-          </a:p>
-        </p:txBody>
-      </p:sp>
-      <p:sp>
-        <p:nvSpPr>
-          <p:cNvPr id="168" name="Rectangle 167"/>
+              <a:t>Ongoing production log monitoring &amp; alerting – Sprint 48</a:t>
+            </a:r>
+          </a:p>
+        </p:txBody>
+      </p:sp>
+      <p:sp>
+        <p:nvSpPr>
+          <p:cNvPr id="170" name="Rectangle 169"/>
           <p:cNvSpPr/>
           <p:nvPr/>
         </p:nvSpPr>
         <p:spPr>
           <a:xfrm>
-            <a:off x="9260586" y="1924812"/>
-            <a:ext cx="749808" cy="141732"/>
-          </a:xfrm>
-          <a:prstGeom prst="rect">
-            <a:avLst/>
-          </a:prstGeom>
-          <a:solidFill>
-            <a:srgbClr val="E3F2FD"/>
+            <a:off x="9224010" y="2371953"/>
+            <a:ext cx="2882646" cy="2329891"/>
+          </a:xfrm>
+          <a:prstGeom prst="rect">
+            <a:avLst/>
+          </a:prstGeom>
+          <a:solidFill>
+            <a:srgbClr val="FFFFFF"/>
           </a:solidFill>
           <a:ln w="6350">
             <a:solidFill>
-              <a:srgbClr val="E3F2FD"/>
+              <a:srgbClr val="D0D5DD"/>
             </a:solidFill>
           </a:ln>
         </p:spPr>
@@ -9711,55 +9745,20 @@
       </p:sp>
       <p:sp>
         <p:nvSpPr>
-          <p:cNvPr id="169" name="TextBox 168"/>
-          <p:cNvSpPr txBox="1"/>
-          <p:nvPr/>
-        </p:nvSpPr>
-        <p:spPr>
-          <a:xfrm>
-            <a:off x="9269730" y="1933955"/>
-            <a:ext cx="731520" cy="128016"/>
-          </a:xfrm>
-          <a:prstGeom prst="rect">
-            <a:avLst/>
-          </a:prstGeom>
-          <a:noFill/>
-        </p:spPr>
-        <p:txBody>
-          <a:bodyPr wrap="square">
-            <a:spAutoFit/>
-          </a:bodyPr>
-          <a:lstStyle/>
-          <a:p>
-            <a:pPr algn="l"/>
-            <a:r>
-              <a:rPr sz="650" b="1" i="0">
-                <a:solidFill>
-                  <a:srgbClr val="0D47A1"/>
-                </a:solidFill>
-                <a:latin typeface="Segoe UI"/>
-              </a:rPr>
-              <a:t>⟳ In Progress</a:t>
-            </a:r>
-          </a:p>
-        </p:txBody>
-      </p:sp>
-      <p:sp>
-        <p:nvSpPr>
-          <p:cNvPr id="170" name="Rectangle 169"/>
+          <p:cNvPr id="171" name="Rectangle 170"/>
           <p:cNvSpPr/>
           <p:nvPr/>
         </p:nvSpPr>
         <p:spPr>
           <a:xfrm>
-            <a:off x="9315450" y="2135124"/>
-            <a:ext cx="36576" cy="36576"/>
-          </a:xfrm>
-          <a:prstGeom prst="rect">
-            <a:avLst/>
-          </a:prstGeom>
-          <a:solidFill>
-            <a:srgbClr val="90A4AE"/>
+            <a:off x="9224010" y="2371953"/>
+            <a:ext cx="36576" cy="2329891"/>
+          </a:xfrm>
+          <a:prstGeom prst="rect">
+            <a:avLst/>
+          </a:prstGeom>
+          <a:solidFill>
+            <a:srgbClr val="1565C0"/>
           </a:solidFill>
           <a:ln>
             <a:noFill/>
@@ -9789,14 +9788,14 @@
       </p:sp>
       <p:sp>
         <p:nvSpPr>
-          <p:cNvPr id="171" name="TextBox 170"/>
+          <p:cNvPr id="172" name="TextBox 171"/>
           <p:cNvSpPr txBox="1"/>
           <p:nvPr/>
         </p:nvSpPr>
         <p:spPr>
           <a:xfrm>
-            <a:off x="9379458" y="2084831"/>
-            <a:ext cx="2681478" cy="150875"/>
+            <a:off x="9315450" y="2390241"/>
+            <a:ext cx="2754629" cy="178308"/>
           </a:xfrm>
           <a:prstGeom prst="rect">
             <a:avLst/>
@@ -9811,38 +9810,36 @@
           <a:p>
             <a:pPr algn="l"/>
             <a:r>
-              <a:rPr sz="750" b="0" i="0">
-                <a:solidFill>
-                  <a:srgbClr val="333333"/>
+              <a:rPr sz="850" b="1" i="0">
+                <a:solidFill>
+                  <a:srgbClr val="0D47A1"/>
                 </a:solidFill>
                 <a:latin typeface="Segoe UI"/>
               </a:rPr>
-              <a:t>Ongoing production log monitoring &amp; alerting for Sprint 48</a:t>
-            </a:r>
-          </a:p>
-        </p:txBody>
-      </p:sp>
-      <p:sp>
-        <p:nvSpPr>
-          <p:cNvPr id="172" name="Rectangle 171"/>
+              <a:t>Miscellaneous</a:t>
+            </a:r>
+          </a:p>
+        </p:txBody>
+      </p:sp>
+      <p:sp>
+        <p:nvSpPr>
+          <p:cNvPr id="173" name="Rectangle 172"/>
           <p:cNvSpPr/>
           <p:nvPr/>
         </p:nvSpPr>
         <p:spPr>
           <a:xfrm>
-            <a:off x="9205722" y="2308860"/>
-            <a:ext cx="2919222" cy="2276856"/>
-          </a:xfrm>
-          <a:prstGeom prst="rect">
-            <a:avLst/>
-          </a:prstGeom>
-          <a:solidFill>
-            <a:srgbClr val="FFFFFF"/>
-          </a:solidFill>
-          <a:ln w="6350">
-            <a:solidFill>
-              <a:srgbClr val="E0E4EA"/>
-            </a:solidFill>
+            <a:off x="9315450" y="2559405"/>
+            <a:ext cx="2754629" cy="7315"/>
+          </a:xfrm>
+          <a:prstGeom prst="rect">
+            <a:avLst/>
+          </a:prstGeom>
+          <a:solidFill>
+            <a:srgbClr val="D0D5DD"/>
+          </a:solidFill>
+          <a:ln>
+            <a:noFill/>
           </a:ln>
         </p:spPr>
         <p:style>
@@ -9869,20 +9866,55 @@
       </p:sp>
       <p:sp>
         <p:nvSpPr>
-          <p:cNvPr id="173" name="Rectangle 172"/>
+          <p:cNvPr id="174" name="TextBox 173"/>
+          <p:cNvSpPr txBox="1"/>
+          <p:nvPr/>
+        </p:nvSpPr>
+        <p:spPr>
+          <a:xfrm>
+            <a:off x="9333738" y="2586837"/>
+            <a:ext cx="2718053" cy="132588"/>
+          </a:xfrm>
+          <a:prstGeom prst="rect">
+            <a:avLst/>
+          </a:prstGeom>
+          <a:noFill/>
+        </p:spPr>
+        <p:txBody>
+          <a:bodyPr wrap="square">
+            <a:spAutoFit/>
+          </a:bodyPr>
+          <a:lstStyle/>
+          <a:p>
+            <a:pPr algn="l"/>
+            <a:r>
+              <a:rPr sz="700" b="1" i="0">
+                <a:solidFill>
+                  <a:srgbClr val="37474F"/>
+                </a:solidFill>
+                <a:latin typeface="Segoe UI"/>
+              </a:rPr>
+              <a:t>COMPLETED</a:t>
+            </a:r>
+          </a:p>
+        </p:txBody>
+      </p:sp>
+      <p:sp>
+        <p:nvSpPr>
+          <p:cNvPr id="175" name="Rectangle 174"/>
           <p:cNvSpPr/>
           <p:nvPr/>
         </p:nvSpPr>
         <p:spPr>
           <a:xfrm>
-            <a:off x="9205722" y="2308860"/>
-            <a:ext cx="2919222" cy="192024"/>
-          </a:xfrm>
-          <a:prstGeom prst="rect">
-            <a:avLst/>
-          </a:prstGeom>
-          <a:solidFill>
-            <a:srgbClr val="424242"/>
+            <a:off x="9388602" y="2788005"/>
+            <a:ext cx="29260" cy="29260"/>
+          </a:xfrm>
+          <a:prstGeom prst="rect">
+            <a:avLst/>
+          </a:prstGeom>
+          <a:solidFill>
+            <a:srgbClr val="D0D5DD"/>
           </a:solidFill>
           <a:ln>
             <a:noFill/>
@@ -9912,14 +9944,14 @@
       </p:sp>
       <p:sp>
         <p:nvSpPr>
-          <p:cNvPr id="174" name="TextBox 173"/>
+          <p:cNvPr id="176" name="TextBox 175"/>
           <p:cNvSpPr txBox="1"/>
           <p:nvPr/>
         </p:nvSpPr>
         <p:spPr>
           <a:xfrm>
-            <a:off x="9269730" y="2336291"/>
-            <a:ext cx="2827782" cy="155448"/>
+            <a:off x="9452610" y="2737713"/>
+            <a:ext cx="2590038" cy="153619"/>
           </a:xfrm>
           <a:prstGeom prst="rect">
             <a:avLst/>
@@ -9934,38 +9966,71 @@
           <a:p>
             <a:pPr algn="l"/>
             <a:r>
-              <a:rPr sz="800" b="1" i="0">
-                <a:solidFill>
-                  <a:srgbClr val="FFFFFF"/>
+              <a:rPr sz="750" b="0" i="0">
+                <a:solidFill>
+                  <a:srgbClr val="444444"/>
                 </a:solidFill>
                 <a:latin typeface="Segoe UI"/>
               </a:rPr>
-              <a:t>Miscellaneous</a:t>
-            </a:r>
-          </a:p>
-        </p:txBody>
-      </p:sp>
-      <p:sp>
-        <p:nvSpPr>
-          <p:cNvPr id="175" name="Rectangle 174"/>
+              <a:t>SDK Manager Variant Configurations view (BE) delivered</a:t>
+            </a:r>
+          </a:p>
+        </p:txBody>
+      </p:sp>
+      <p:sp>
+        <p:nvSpPr>
+          <p:cNvPr id="177" name="TextBox 176"/>
+          <p:cNvSpPr txBox="1"/>
+          <p:nvPr/>
+        </p:nvSpPr>
+        <p:spPr>
+          <a:xfrm>
+            <a:off x="9333738" y="2909620"/>
+            <a:ext cx="2718053" cy="132588"/>
+          </a:xfrm>
+          <a:prstGeom prst="rect">
+            <a:avLst/>
+          </a:prstGeom>
+          <a:noFill/>
+        </p:spPr>
+        <p:txBody>
+          <a:bodyPr wrap="square">
+            <a:spAutoFit/>
+          </a:bodyPr>
+          <a:lstStyle/>
+          <a:p>
+            <a:pPr algn="l"/>
+            <a:r>
+              <a:rPr sz="700" b="1" i="0">
+                <a:solidFill>
+                  <a:srgbClr val="37474F"/>
+                </a:solidFill>
+                <a:latin typeface="Segoe UI"/>
+              </a:rPr>
+              <a:t>IN PROGRESS</a:t>
+            </a:r>
+          </a:p>
+        </p:txBody>
+      </p:sp>
+      <p:sp>
+        <p:nvSpPr>
+          <p:cNvPr id="178" name="Rectangle 177"/>
           <p:cNvSpPr/>
           <p:nvPr/>
         </p:nvSpPr>
         <p:spPr>
           <a:xfrm>
-            <a:off x="9260586" y="2537460"/>
-            <a:ext cx="749808" cy="141732"/>
-          </a:xfrm>
-          <a:prstGeom prst="rect">
-            <a:avLst/>
-          </a:prstGeom>
-          <a:solidFill>
-            <a:srgbClr val="E8F5E9"/>
-          </a:solidFill>
-          <a:ln w="6350">
-            <a:solidFill>
-              <a:srgbClr val="E8F5E9"/>
-            </a:solidFill>
+            <a:off x="9388602" y="3110788"/>
+            <a:ext cx="29260" cy="29260"/>
+          </a:xfrm>
+          <a:prstGeom prst="rect">
+            <a:avLst/>
+          </a:prstGeom>
+          <a:solidFill>
+            <a:srgbClr val="D0D5DD"/>
+          </a:solidFill>
+          <a:ln>
+            <a:noFill/>
           </a:ln>
         </p:spPr>
         <p:style>
@@ -9992,14 +10057,14 @@
       </p:sp>
       <p:sp>
         <p:nvSpPr>
-          <p:cNvPr id="176" name="TextBox 175"/>
+          <p:cNvPr id="179" name="TextBox 178"/>
           <p:cNvSpPr txBox="1"/>
           <p:nvPr/>
         </p:nvSpPr>
         <p:spPr>
           <a:xfrm>
-            <a:off x="9269730" y="2546603"/>
-            <a:ext cx="731520" cy="128016"/>
+            <a:off x="9452610" y="3060496"/>
+            <a:ext cx="2590038" cy="153619"/>
           </a:xfrm>
           <a:prstGeom prst="rect">
             <a:avLst/>
@@ -10014,33 +10079,33 @@
           <a:p>
             <a:pPr algn="l"/>
             <a:r>
-              <a:rPr sz="650" b="1" i="0">
-                <a:solidFill>
-                  <a:srgbClr val="1B5E20"/>
+              <a:rPr sz="750" b="0" i="0">
+                <a:solidFill>
+                  <a:srgbClr val="444444"/>
                 </a:solidFill>
                 <a:latin typeface="Segoe UI"/>
               </a:rPr>
-              <a:t>✓ Completed</a:t>
-            </a:r>
-          </a:p>
-        </p:txBody>
-      </p:sp>
-      <p:sp>
-        <p:nvSpPr>
-          <p:cNvPr id="177" name="Rectangle 176"/>
+              <a:t>Sprint 48 QA: integration testing &amp; GA tag verification</a:t>
+            </a:r>
+          </a:p>
+        </p:txBody>
+      </p:sp>
+      <p:sp>
+        <p:nvSpPr>
+          <p:cNvPr id="180" name="Rectangle 179"/>
           <p:cNvSpPr/>
           <p:nvPr/>
         </p:nvSpPr>
         <p:spPr>
           <a:xfrm>
-            <a:off x="9315450" y="2747772"/>
-            <a:ext cx="36576" cy="36576"/>
-          </a:xfrm>
-          <a:prstGeom prst="rect">
-            <a:avLst/>
-          </a:prstGeom>
-          <a:solidFill>
-            <a:srgbClr val="90A4AE"/>
+            <a:off x="9388602" y="3246120"/>
+            <a:ext cx="29260" cy="29260"/>
+          </a:xfrm>
+          <a:prstGeom prst="rect">
+            <a:avLst/>
+          </a:prstGeom>
+          <a:solidFill>
+            <a:srgbClr val="D0D5DD"/>
           </a:solidFill>
           <a:ln>
             <a:noFill/>
@@ -10070,14 +10135,14 @@
       </p:sp>
       <p:sp>
         <p:nvSpPr>
-          <p:cNvPr id="178" name="TextBox 177"/>
+          <p:cNvPr id="181" name="TextBox 180"/>
           <p:cNvSpPr txBox="1"/>
           <p:nvPr/>
         </p:nvSpPr>
         <p:spPr>
           <a:xfrm>
-            <a:off x="9379458" y="2697479"/>
-            <a:ext cx="2681478" cy="150875"/>
+            <a:off x="9452610" y="3195828"/>
+            <a:ext cx="2590038" cy="153619"/>
           </a:xfrm>
           <a:prstGeom prst="rect">
             <a:avLst/>
@@ -10094,36 +10159,34 @@
             <a:r>
               <a:rPr sz="750" b="0" i="0">
                 <a:solidFill>
-                  <a:srgbClr val="333333"/>
+                  <a:srgbClr val="444444"/>
                 </a:solidFill>
                 <a:latin typeface="Segoe UI"/>
               </a:rPr>
-              <a:t>SDK Manager Variant Configurations view (backend) delivered</a:t>
-            </a:r>
-          </a:p>
-        </p:txBody>
-      </p:sp>
-      <p:sp>
-        <p:nvSpPr>
-          <p:cNvPr id="179" name="Rectangle 178"/>
+              <a:t>Config ID in SDK app context across API requests</a:t>
+            </a:r>
+          </a:p>
+        </p:txBody>
+      </p:sp>
+      <p:sp>
+        <p:nvSpPr>
+          <p:cNvPr id="182" name="Rectangle 181"/>
           <p:cNvSpPr/>
           <p:nvPr/>
         </p:nvSpPr>
         <p:spPr>
           <a:xfrm>
-            <a:off x="9260586" y="2866644"/>
-            <a:ext cx="749808" cy="141732"/>
-          </a:xfrm>
-          <a:prstGeom prst="rect">
-            <a:avLst/>
-          </a:prstGeom>
-          <a:solidFill>
-            <a:srgbClr val="E3F2FD"/>
-          </a:solidFill>
-          <a:ln w="6350">
-            <a:solidFill>
-              <a:srgbClr val="E3F2FD"/>
-            </a:solidFill>
+            <a:off x="9388602" y="3381451"/>
+            <a:ext cx="29260" cy="29260"/>
+          </a:xfrm>
+          <a:prstGeom prst="rect">
+            <a:avLst/>
+          </a:prstGeom>
+          <a:solidFill>
+            <a:srgbClr val="D0D5DD"/>
+          </a:solidFill>
+          <a:ln>
+            <a:noFill/>
           </a:ln>
         </p:spPr>
         <p:style>
@@ -10150,14 +10213,14 @@
       </p:sp>
       <p:sp>
         <p:nvSpPr>
-          <p:cNvPr id="180" name="TextBox 179"/>
+          <p:cNvPr id="183" name="TextBox 182"/>
           <p:cNvSpPr txBox="1"/>
           <p:nvPr/>
         </p:nvSpPr>
         <p:spPr>
           <a:xfrm>
-            <a:off x="9269730" y="2875787"/>
-            <a:ext cx="731520" cy="128016"/>
+            <a:off x="9452610" y="3331159"/>
+            <a:ext cx="2590038" cy="153619"/>
           </a:xfrm>
           <a:prstGeom prst="rect">
             <a:avLst/>
@@ -10172,33 +10235,33 @@
           <a:p>
             <a:pPr algn="l"/>
             <a:r>
-              <a:rPr sz="650" b="1" i="0">
-                <a:solidFill>
-                  <a:srgbClr val="0D47A1"/>
+              <a:rPr sz="750" b="0" i="0">
+                <a:solidFill>
+                  <a:srgbClr val="444444"/>
                 </a:solidFill>
                 <a:latin typeface="Segoe UI"/>
               </a:rPr>
-              <a:t>⟳ In Progress</a:t>
-            </a:r>
-          </a:p>
-        </p:txBody>
-      </p:sp>
-      <p:sp>
-        <p:nvSpPr>
-          <p:cNvPr id="181" name="Rectangle 180"/>
+              <a:t>Environment banner in SDK Manager header (Dev/Stage/PreProd/Prod)</a:t>
+            </a:r>
+          </a:p>
+        </p:txBody>
+      </p:sp>
+      <p:sp>
+        <p:nvSpPr>
+          <p:cNvPr id="184" name="Rectangle 183"/>
           <p:cNvSpPr/>
           <p:nvPr/>
         </p:nvSpPr>
         <p:spPr>
           <a:xfrm>
-            <a:off x="9315450" y="3076956"/>
-            <a:ext cx="36576" cy="36576"/>
-          </a:xfrm>
-          <a:prstGeom prst="rect">
-            <a:avLst/>
-          </a:prstGeom>
-          <a:solidFill>
-            <a:srgbClr val="90A4AE"/>
+            <a:off x="9388602" y="3516782"/>
+            <a:ext cx="29260" cy="29260"/>
+          </a:xfrm>
+          <a:prstGeom prst="rect">
+            <a:avLst/>
+          </a:prstGeom>
+          <a:solidFill>
+            <a:srgbClr val="D0D5DD"/>
           </a:solidFill>
           <a:ln>
             <a:noFill/>
@@ -10228,14 +10291,14 @@
       </p:sp>
       <p:sp>
         <p:nvSpPr>
-          <p:cNvPr id="182" name="TextBox 181"/>
+          <p:cNvPr id="185" name="TextBox 184"/>
           <p:cNvSpPr txBox="1"/>
           <p:nvPr/>
         </p:nvSpPr>
         <p:spPr>
           <a:xfrm>
-            <a:off x="9379458" y="3026663"/>
-            <a:ext cx="2681478" cy="150875"/>
+            <a:off x="9452610" y="3466490"/>
+            <a:ext cx="2590038" cy="153619"/>
           </a:xfrm>
           <a:prstGeom prst="rect">
             <a:avLst/>
@@ -10252,31 +10315,31 @@
             <a:r>
               <a:rPr sz="750" b="0" i="0">
                 <a:solidFill>
-                  <a:srgbClr val="333333"/>
+                  <a:srgbClr val="444444"/>
                 </a:solidFill>
                 <a:latin typeface="Segoe UI"/>
               </a:rPr>
-              <a:t>Sprint 48 QA: integration testing &amp; GA tag verification</a:t>
-            </a:r>
-          </a:p>
-        </p:txBody>
-      </p:sp>
-      <p:sp>
-        <p:nvSpPr>
-          <p:cNvPr id="183" name="Rectangle 182"/>
+              <a:t>Bundle validation alert when deleting assigned bundles</a:t>
+            </a:r>
+          </a:p>
+        </p:txBody>
+      </p:sp>
+      <p:sp>
+        <p:nvSpPr>
+          <p:cNvPr id="186" name="Rectangle 185"/>
           <p:cNvSpPr/>
           <p:nvPr/>
         </p:nvSpPr>
         <p:spPr>
           <a:xfrm>
-            <a:off x="9315450" y="3209544"/>
-            <a:ext cx="36576" cy="36576"/>
-          </a:xfrm>
-          <a:prstGeom prst="rect">
-            <a:avLst/>
-          </a:prstGeom>
-          <a:solidFill>
-            <a:srgbClr val="90A4AE"/>
+            <a:off x="9388602" y="3652113"/>
+            <a:ext cx="29260" cy="29260"/>
+          </a:xfrm>
+          <a:prstGeom prst="rect">
+            <a:avLst/>
+          </a:prstGeom>
+          <a:solidFill>
+            <a:srgbClr val="D0D5DD"/>
           </a:solidFill>
           <a:ln>
             <a:noFill/>
@@ -10306,14 +10369,14 @@
       </p:sp>
       <p:sp>
         <p:nvSpPr>
-          <p:cNvPr id="184" name="TextBox 183"/>
+          <p:cNvPr id="187" name="TextBox 186"/>
           <p:cNvSpPr txBox="1"/>
           <p:nvPr/>
         </p:nvSpPr>
         <p:spPr>
           <a:xfrm>
-            <a:off x="9379458" y="3159251"/>
-            <a:ext cx="2681478" cy="150875"/>
+            <a:off x="9452610" y="3601821"/>
+            <a:ext cx="2590038" cy="153619"/>
           </a:xfrm>
           <a:prstGeom prst="rect">
             <a:avLst/>
@@ -10330,31 +10393,66 @@
             <a:r>
               <a:rPr sz="750" b="0" i="0">
                 <a:solidFill>
-                  <a:srgbClr val="333333"/>
+                  <a:srgbClr val="444444"/>
                 </a:solidFill>
                 <a:latin typeface="Segoe UI"/>
               </a:rPr>
-              <a:t>Config ID in SDK app context across API requests</a:t>
-            </a:r>
-          </a:p>
-        </p:txBody>
-      </p:sp>
-      <p:sp>
-        <p:nvSpPr>
-          <p:cNvPr id="185" name="Rectangle 184"/>
+              <a:t>Calendar UI fix for Anicura SDK date entry</a:t>
+            </a:r>
+          </a:p>
+        </p:txBody>
+      </p:sp>
+      <p:sp>
+        <p:nvSpPr>
+          <p:cNvPr id="188" name="TextBox 187"/>
+          <p:cNvSpPr txBox="1"/>
+          <p:nvPr/>
+        </p:nvSpPr>
+        <p:spPr>
+          <a:xfrm>
+            <a:off x="9333738" y="3773728"/>
+            <a:ext cx="2718053" cy="132588"/>
+          </a:xfrm>
+          <a:prstGeom prst="rect">
+            <a:avLst/>
+          </a:prstGeom>
+          <a:noFill/>
+        </p:spPr>
+        <p:txBody>
+          <a:bodyPr wrap="square">
+            <a:spAutoFit/>
+          </a:bodyPr>
+          <a:lstStyle/>
+          <a:p>
+            <a:pPr algn="l"/>
+            <a:r>
+              <a:rPr sz="700" b="1" i="0">
+                <a:solidFill>
+                  <a:srgbClr val="37474F"/>
+                </a:solidFill>
+                <a:latin typeface="Segoe UI"/>
+              </a:rPr>
+              <a:t>PLANNED</a:t>
+            </a:r>
+          </a:p>
+        </p:txBody>
+      </p:sp>
+      <p:sp>
+        <p:nvSpPr>
+          <p:cNvPr id="189" name="Rectangle 188"/>
           <p:cNvSpPr/>
           <p:nvPr/>
         </p:nvSpPr>
         <p:spPr>
           <a:xfrm>
-            <a:off x="9315450" y="3342132"/>
-            <a:ext cx="36576" cy="36576"/>
-          </a:xfrm>
-          <a:prstGeom prst="rect">
-            <a:avLst/>
-          </a:prstGeom>
-          <a:solidFill>
-            <a:srgbClr val="90A4AE"/>
+            <a:off x="9388602" y="3974896"/>
+            <a:ext cx="29260" cy="29260"/>
+          </a:xfrm>
+          <a:prstGeom prst="rect">
+            <a:avLst/>
+          </a:prstGeom>
+          <a:solidFill>
+            <a:srgbClr val="D0D5DD"/>
           </a:solidFill>
           <a:ln>
             <a:noFill/>
@@ -10384,14 +10482,14 @@
       </p:sp>
       <p:sp>
         <p:nvSpPr>
-          <p:cNvPr id="186" name="TextBox 185"/>
+          <p:cNvPr id="190" name="TextBox 189"/>
           <p:cNvSpPr txBox="1"/>
           <p:nvPr/>
         </p:nvSpPr>
         <p:spPr>
           <a:xfrm>
-            <a:off x="9379458" y="3291839"/>
-            <a:ext cx="2681478" cy="150875"/>
+            <a:off x="9452610" y="3924604"/>
+            <a:ext cx="2590038" cy="153619"/>
           </a:xfrm>
           <a:prstGeom prst="rect">
             <a:avLst/>
@@ -10408,31 +10506,31 @@
             <a:r>
               <a:rPr sz="750" b="0" i="0">
                 <a:solidFill>
-                  <a:srgbClr val="333333"/>
+                  <a:srgbClr val="444444"/>
                 </a:solidFill>
                 <a:latin typeface="Segoe UI"/>
               </a:rPr>
-              <a:t>Environment banner in SDK Manager header (Dev/Stage/PreProd/Prod)</a:t>
-            </a:r>
-          </a:p>
-        </p:txBody>
-      </p:sp>
-      <p:sp>
-        <p:nvSpPr>
-          <p:cNvPr id="187" name="Rectangle 186"/>
+              <a:t>Weight range updates for Puppy &amp; Kitten Weight Check tools</a:t>
+            </a:r>
+          </a:p>
+        </p:txBody>
+      </p:sp>
+      <p:sp>
+        <p:nvSpPr>
+          <p:cNvPr id="191" name="Rectangle 190"/>
           <p:cNvSpPr/>
           <p:nvPr/>
         </p:nvSpPr>
         <p:spPr>
           <a:xfrm>
-            <a:off x="9315450" y="3474720"/>
-            <a:ext cx="36576" cy="36576"/>
-          </a:xfrm>
-          <a:prstGeom prst="rect">
-            <a:avLst/>
-          </a:prstGeom>
-          <a:solidFill>
-            <a:srgbClr val="90A4AE"/>
+            <a:off x="9388602" y="4110228"/>
+            <a:ext cx="29260" cy="29260"/>
+          </a:xfrm>
+          <a:prstGeom prst="rect">
+            <a:avLst/>
+          </a:prstGeom>
+          <a:solidFill>
+            <a:srgbClr val="D0D5DD"/>
           </a:solidFill>
           <a:ln>
             <a:noFill/>
@@ -10462,14 +10560,14 @@
       </p:sp>
       <p:sp>
         <p:nvSpPr>
-          <p:cNvPr id="188" name="TextBox 187"/>
+          <p:cNvPr id="192" name="TextBox 191"/>
           <p:cNvSpPr txBox="1"/>
           <p:nvPr/>
         </p:nvSpPr>
         <p:spPr>
           <a:xfrm>
-            <a:off x="9379458" y="3424427"/>
-            <a:ext cx="2681478" cy="150875"/>
+            <a:off x="9452610" y="4059936"/>
+            <a:ext cx="2590038" cy="153619"/>
           </a:xfrm>
           <a:prstGeom prst="rect">
             <a:avLst/>
@@ -10486,31 +10584,31 @@
             <a:r>
               <a:rPr sz="750" b="0" i="0">
                 <a:solidFill>
-                  <a:srgbClr val="333333"/>
+                  <a:srgbClr val="444444"/>
                 </a:solidFill>
                 <a:latin typeface="Segoe UI"/>
               </a:rPr>
-              <a:t>Bundle validation alert when deleting assigned bundles</a:t>
-            </a:r>
-          </a:p>
-        </p:txBody>
-      </p:sp>
-      <p:sp>
-        <p:nvSpPr>
-          <p:cNvPr id="189" name="Rectangle 188"/>
+              <a:t>Analysis API &amp; submission results performance improvement</a:t>
+            </a:r>
+          </a:p>
+        </p:txBody>
+      </p:sp>
+      <p:sp>
+        <p:nvSpPr>
+          <p:cNvPr id="193" name="Rectangle 192"/>
           <p:cNvSpPr/>
           <p:nvPr/>
         </p:nvSpPr>
         <p:spPr>
           <a:xfrm>
-            <a:off x="9315450" y="3607308"/>
-            <a:ext cx="36576" cy="36576"/>
-          </a:xfrm>
-          <a:prstGeom prst="rect">
-            <a:avLst/>
-          </a:prstGeom>
-          <a:solidFill>
-            <a:srgbClr val="90A4AE"/>
+            <a:off x="9388602" y="4245559"/>
+            <a:ext cx="29260" cy="29260"/>
+          </a:xfrm>
+          <a:prstGeom prst="rect">
+            <a:avLst/>
+          </a:prstGeom>
+          <a:solidFill>
+            <a:srgbClr val="D0D5DD"/>
           </a:solidFill>
           <a:ln>
             <a:noFill/>
@@ -10540,14 +10638,14 @@
       </p:sp>
       <p:sp>
         <p:nvSpPr>
-          <p:cNvPr id="190" name="TextBox 189"/>
+          <p:cNvPr id="194" name="TextBox 193"/>
           <p:cNvSpPr txBox="1"/>
           <p:nvPr/>
         </p:nvSpPr>
         <p:spPr>
           <a:xfrm>
-            <a:off x="9379458" y="3557015"/>
-            <a:ext cx="2681478" cy="150875"/>
+            <a:off x="9452610" y="4195267"/>
+            <a:ext cx="2590038" cy="153619"/>
           </a:xfrm>
           <a:prstGeom prst="rect">
             <a:avLst/>
@@ -10564,36 +10662,34 @@
             <a:r>
               <a:rPr sz="750" b="0" i="0">
                 <a:solidFill>
-                  <a:srgbClr val="333333"/>
+                  <a:srgbClr val="444444"/>
                 </a:solidFill>
                 <a:latin typeface="Segoe UI"/>
               </a:rPr>
-              <a:t>Calendar UI fix for Anicura SDK date entry</a:t>
-            </a:r>
-          </a:p>
-        </p:txBody>
-      </p:sp>
-      <p:sp>
-        <p:nvSpPr>
-          <p:cNvPr id="191" name="Rectangle 190"/>
+              <a:t>Download Results container size consistency fix</a:t>
+            </a:r>
+          </a:p>
+        </p:txBody>
+      </p:sp>
+      <p:sp>
+        <p:nvSpPr>
+          <p:cNvPr id="195" name="Rectangle 194"/>
           <p:cNvSpPr/>
           <p:nvPr/>
         </p:nvSpPr>
         <p:spPr>
           <a:xfrm>
-            <a:off x="9260586" y="3726179"/>
-            <a:ext cx="749808" cy="141732"/>
-          </a:xfrm>
-          <a:prstGeom prst="rect">
-            <a:avLst/>
-          </a:prstGeom>
-          <a:solidFill>
-            <a:srgbClr val="F3E5F5"/>
-          </a:solidFill>
-          <a:ln w="6350">
-            <a:solidFill>
-              <a:srgbClr val="F3E5F5"/>
-            </a:solidFill>
+            <a:off x="9388602" y="4380890"/>
+            <a:ext cx="29260" cy="29260"/>
+          </a:xfrm>
+          <a:prstGeom prst="rect">
+            <a:avLst/>
+          </a:prstGeom>
+          <a:solidFill>
+            <a:srgbClr val="D0D5DD"/>
+          </a:solidFill>
+          <a:ln>
+            <a:noFill/>
           </a:ln>
         </p:spPr>
         <p:style>
@@ -10620,14 +10716,14 @@
       </p:sp>
       <p:sp>
         <p:nvSpPr>
-          <p:cNvPr id="192" name="TextBox 191"/>
+          <p:cNvPr id="196" name="TextBox 195"/>
           <p:cNvSpPr txBox="1"/>
           <p:nvPr/>
         </p:nvSpPr>
         <p:spPr>
           <a:xfrm>
-            <a:off x="9269730" y="3735323"/>
-            <a:ext cx="731520" cy="128016"/>
+            <a:off x="9452610" y="4330598"/>
+            <a:ext cx="2590038" cy="153619"/>
           </a:xfrm>
           <a:prstGeom prst="rect">
             <a:avLst/>
@@ -10642,33 +10738,33 @@
           <a:p>
             <a:pPr algn="l"/>
             <a:r>
-              <a:rPr sz="650" b="1" i="0">
-                <a:solidFill>
-                  <a:srgbClr val="4A148C"/>
+              <a:rPr sz="750" b="0" i="0">
+                <a:solidFill>
+                  <a:srgbClr val="444444"/>
                 </a:solidFill>
                 <a:latin typeface="Segoe UI"/>
               </a:rPr>
-              <a:t>◷ Planned</a:t>
-            </a:r>
-          </a:p>
-        </p:txBody>
-      </p:sp>
-      <p:sp>
-        <p:nvSpPr>
-          <p:cNvPr id="193" name="Rectangle 192"/>
+              <a:t>Backend job refactoring into workers structure</a:t>
+            </a:r>
+          </a:p>
+        </p:txBody>
+      </p:sp>
+      <p:sp>
+        <p:nvSpPr>
+          <p:cNvPr id="197" name="Rectangle 196"/>
           <p:cNvSpPr/>
           <p:nvPr/>
         </p:nvSpPr>
         <p:spPr>
           <a:xfrm>
-            <a:off x="9315450" y="3936491"/>
-            <a:ext cx="36576" cy="36576"/>
-          </a:xfrm>
-          <a:prstGeom prst="rect">
-            <a:avLst/>
-          </a:prstGeom>
-          <a:solidFill>
-            <a:srgbClr val="90A4AE"/>
+            <a:off x="9388602" y="4516221"/>
+            <a:ext cx="29260" cy="29260"/>
+          </a:xfrm>
+          <a:prstGeom prst="rect">
+            <a:avLst/>
+          </a:prstGeom>
+          <a:solidFill>
+            <a:srgbClr val="D0D5DD"/>
           </a:solidFill>
           <a:ln>
             <a:noFill/>
@@ -10698,14 +10794,14 @@
       </p:sp>
       <p:sp>
         <p:nvSpPr>
-          <p:cNvPr id="194" name="TextBox 193"/>
+          <p:cNvPr id="198" name="TextBox 197"/>
           <p:cNvSpPr txBox="1"/>
           <p:nvPr/>
         </p:nvSpPr>
         <p:spPr>
           <a:xfrm>
-            <a:off x="9379458" y="3886199"/>
-            <a:ext cx="2681478" cy="150875"/>
+            <a:off x="9452610" y="4465929"/>
+            <a:ext cx="2590038" cy="153619"/>
           </a:xfrm>
           <a:prstGeom prst="rect">
             <a:avLst/>
@@ -10722,323 +10818,11 @@
             <a:r>
               <a:rPr sz="750" b="0" i="0">
                 <a:solidFill>
-                  <a:srgbClr val="333333"/>
+                  <a:srgbClr val="444444"/>
                 </a:solidFill>
                 <a:latin typeface="Segoe UI"/>
               </a:rPr>
-              <a:t>Weight range updates for Puppy &amp; Kitten Weight Check tools</a:t>
-            </a:r>
-          </a:p>
-        </p:txBody>
-      </p:sp>
-      <p:sp>
-        <p:nvSpPr>
-          <p:cNvPr id="195" name="Rectangle 194"/>
-          <p:cNvSpPr/>
-          <p:nvPr/>
-        </p:nvSpPr>
-        <p:spPr>
-          <a:xfrm>
-            <a:off x="9315450" y="4069079"/>
-            <a:ext cx="36576" cy="36576"/>
-          </a:xfrm>
-          <a:prstGeom prst="rect">
-            <a:avLst/>
-          </a:prstGeom>
-          <a:solidFill>
-            <a:srgbClr val="90A4AE"/>
-          </a:solidFill>
-          <a:ln>
-            <a:noFill/>
-          </a:ln>
-        </p:spPr>
-        <p:style>
-          <a:lnRef idx="1">
-            <a:schemeClr val="accent1"/>
-          </a:lnRef>
-          <a:fillRef idx="3">
-            <a:schemeClr val="accent1"/>
-          </a:fillRef>
-          <a:effectRef idx="2">
-            <a:schemeClr val="accent1"/>
-          </a:effectRef>
-          <a:fontRef idx="minor">
-            <a:schemeClr val="lt1"/>
-          </a:fontRef>
-        </p:style>
-        <p:txBody>
-          <a:bodyPr rtlCol="0" anchor="ctr"/>
-          <a:lstStyle/>
-          <a:p>
-            <a:pPr algn="ctr"/>
-          </a:p>
-        </p:txBody>
-      </p:sp>
-      <p:sp>
-        <p:nvSpPr>
-          <p:cNvPr id="196" name="TextBox 195"/>
-          <p:cNvSpPr txBox="1"/>
-          <p:nvPr/>
-        </p:nvSpPr>
-        <p:spPr>
-          <a:xfrm>
-            <a:off x="9379458" y="4018787"/>
-            <a:ext cx="2681478" cy="150875"/>
-          </a:xfrm>
-          <a:prstGeom prst="rect">
-            <a:avLst/>
-          </a:prstGeom>
-          <a:noFill/>
-        </p:spPr>
-        <p:txBody>
-          <a:bodyPr wrap="square">
-            <a:spAutoFit/>
-          </a:bodyPr>
-          <a:lstStyle/>
-          <a:p>
-            <a:pPr algn="l"/>
-            <a:r>
-              <a:rPr sz="750" b="0" i="0">
-                <a:solidFill>
-                  <a:srgbClr val="333333"/>
-                </a:solidFill>
-                <a:latin typeface="Segoe UI"/>
-              </a:rPr>
-              <a:t>Analysis API &amp; submission results performance improvement</a:t>
-            </a:r>
-          </a:p>
-        </p:txBody>
-      </p:sp>
-      <p:sp>
-        <p:nvSpPr>
-          <p:cNvPr id="197" name="Rectangle 196"/>
-          <p:cNvSpPr/>
-          <p:nvPr/>
-        </p:nvSpPr>
-        <p:spPr>
-          <a:xfrm>
-            <a:off x="9315450" y="4201667"/>
-            <a:ext cx="36576" cy="36576"/>
-          </a:xfrm>
-          <a:prstGeom prst="rect">
-            <a:avLst/>
-          </a:prstGeom>
-          <a:solidFill>
-            <a:srgbClr val="90A4AE"/>
-          </a:solidFill>
-          <a:ln>
-            <a:noFill/>
-          </a:ln>
-        </p:spPr>
-        <p:style>
-          <a:lnRef idx="1">
-            <a:schemeClr val="accent1"/>
-          </a:lnRef>
-          <a:fillRef idx="3">
-            <a:schemeClr val="accent1"/>
-          </a:fillRef>
-          <a:effectRef idx="2">
-            <a:schemeClr val="accent1"/>
-          </a:effectRef>
-          <a:fontRef idx="minor">
-            <a:schemeClr val="lt1"/>
-          </a:fontRef>
-        </p:style>
-        <p:txBody>
-          <a:bodyPr rtlCol="0" anchor="ctr"/>
-          <a:lstStyle/>
-          <a:p>
-            <a:pPr algn="ctr"/>
-          </a:p>
-        </p:txBody>
-      </p:sp>
-      <p:sp>
-        <p:nvSpPr>
-          <p:cNvPr id="198" name="TextBox 197"/>
-          <p:cNvSpPr txBox="1"/>
-          <p:nvPr/>
-        </p:nvSpPr>
-        <p:spPr>
-          <a:xfrm>
-            <a:off x="9379458" y="4151375"/>
-            <a:ext cx="2681478" cy="150875"/>
-          </a:xfrm>
-          <a:prstGeom prst="rect">
-            <a:avLst/>
-          </a:prstGeom>
-          <a:noFill/>
-        </p:spPr>
-        <p:txBody>
-          <a:bodyPr wrap="square">
-            <a:spAutoFit/>
-          </a:bodyPr>
-          <a:lstStyle/>
-          <a:p>
-            <a:pPr algn="l"/>
-            <a:r>
-              <a:rPr sz="750" b="0" i="0">
-                <a:solidFill>
-                  <a:srgbClr val="333333"/>
-                </a:solidFill>
-                <a:latin typeface="Segoe UI"/>
-              </a:rPr>
-              <a:t>Download Results container size consistency fix</a:t>
-            </a:r>
-          </a:p>
-        </p:txBody>
-      </p:sp>
-      <p:sp>
-        <p:nvSpPr>
-          <p:cNvPr id="199" name="Rectangle 198"/>
-          <p:cNvSpPr/>
-          <p:nvPr/>
-        </p:nvSpPr>
-        <p:spPr>
-          <a:xfrm>
-            <a:off x="9315450" y="4334255"/>
-            <a:ext cx="36576" cy="36576"/>
-          </a:xfrm>
-          <a:prstGeom prst="rect">
-            <a:avLst/>
-          </a:prstGeom>
-          <a:solidFill>
-            <a:srgbClr val="90A4AE"/>
-          </a:solidFill>
-          <a:ln>
-            <a:noFill/>
-          </a:ln>
-        </p:spPr>
-        <p:style>
-          <a:lnRef idx="1">
-            <a:schemeClr val="accent1"/>
-          </a:lnRef>
-          <a:fillRef idx="3">
-            <a:schemeClr val="accent1"/>
-          </a:fillRef>
-          <a:effectRef idx="2">
-            <a:schemeClr val="accent1"/>
-          </a:effectRef>
-          <a:fontRef idx="minor">
-            <a:schemeClr val="lt1"/>
-          </a:fontRef>
-        </p:style>
-        <p:txBody>
-          <a:bodyPr rtlCol="0" anchor="ctr"/>
-          <a:lstStyle/>
-          <a:p>
-            <a:pPr algn="ctr"/>
-          </a:p>
-        </p:txBody>
-      </p:sp>
-      <p:sp>
-        <p:nvSpPr>
-          <p:cNvPr id="200" name="TextBox 199"/>
-          <p:cNvSpPr txBox="1"/>
-          <p:nvPr/>
-        </p:nvSpPr>
-        <p:spPr>
-          <a:xfrm>
-            <a:off x="9379458" y="4283963"/>
-            <a:ext cx="2681478" cy="150875"/>
-          </a:xfrm>
-          <a:prstGeom prst="rect">
-            <a:avLst/>
-          </a:prstGeom>
-          <a:noFill/>
-        </p:spPr>
-        <p:txBody>
-          <a:bodyPr wrap="square">
-            <a:spAutoFit/>
-          </a:bodyPr>
-          <a:lstStyle/>
-          <a:p>
-            <a:pPr algn="l"/>
-            <a:r>
-              <a:rPr sz="750" b="0" i="0">
-                <a:solidFill>
-                  <a:srgbClr val="333333"/>
-                </a:solidFill>
-                <a:latin typeface="Segoe UI"/>
-              </a:rPr>
-              <a:t>Backend job refactoring into workers structure</a:t>
-            </a:r>
-          </a:p>
-        </p:txBody>
-      </p:sp>
-      <p:sp>
-        <p:nvSpPr>
-          <p:cNvPr id="201" name="Rectangle 200"/>
-          <p:cNvSpPr/>
-          <p:nvPr/>
-        </p:nvSpPr>
-        <p:spPr>
-          <a:xfrm>
-            <a:off x="9315450" y="4466843"/>
-            <a:ext cx="36576" cy="36576"/>
-          </a:xfrm>
-          <a:prstGeom prst="rect">
-            <a:avLst/>
-          </a:prstGeom>
-          <a:solidFill>
-            <a:srgbClr val="90A4AE"/>
-          </a:solidFill>
-          <a:ln>
-            <a:noFill/>
-          </a:ln>
-        </p:spPr>
-        <p:style>
-          <a:lnRef idx="1">
-            <a:schemeClr val="accent1"/>
-          </a:lnRef>
-          <a:fillRef idx="3">
-            <a:schemeClr val="accent1"/>
-          </a:fillRef>
-          <a:effectRef idx="2">
-            <a:schemeClr val="accent1"/>
-          </a:effectRef>
-          <a:fontRef idx="minor">
-            <a:schemeClr val="lt1"/>
-          </a:fontRef>
-        </p:style>
-        <p:txBody>
-          <a:bodyPr rtlCol="0" anchor="ctr"/>
-          <a:lstStyle/>
-          <a:p>
-            <a:pPr algn="ctr"/>
-          </a:p>
-        </p:txBody>
-      </p:sp>
-      <p:sp>
-        <p:nvSpPr>
-          <p:cNvPr id="202" name="TextBox 201"/>
-          <p:cNvSpPr txBox="1"/>
-          <p:nvPr/>
-        </p:nvSpPr>
-        <p:spPr>
-          <a:xfrm>
-            <a:off x="9379458" y="4416551"/>
-            <a:ext cx="2681478" cy="150875"/>
-          </a:xfrm>
-          <a:prstGeom prst="rect">
-            <a:avLst/>
-          </a:prstGeom>
-          <a:noFill/>
-        </p:spPr>
-        <p:txBody>
-          <a:bodyPr wrap="square">
-            <a:spAutoFit/>
-          </a:bodyPr>
-          <a:lstStyle/>
-          <a:p>
-            <a:pPr algn="l"/>
-            <a:r>
-              <a:rPr sz="750" b="0" i="0">
-                <a:solidFill>
-                  <a:srgbClr val="333333"/>
-                </a:solidFill>
-                <a:latin typeface="Segoe UI"/>
-              </a:rPr>
-              <a:t>Demo application Config ID–based SDK launch support</a:t>
+              <a:t>Demo application Config ID-based SDK launch support</a:t>
             </a:r>
           </a:p>
         </p:txBody>

--- a/sprint48_slide.pptx
+++ b/sprint48_slide.pptx
@@ -3098,7 +3098,7 @@
         <p:spPr>
           <a:xfrm>
             <a:off x="0" y="0"/>
-            <a:ext cx="12188952" cy="658368"/>
+            <a:ext cx="12188952" cy="749808"/>
           </a:xfrm>
           <a:prstGeom prst="rect">
             <a:avLst/>
@@ -3141,7 +3141,7 @@
         <p:spPr>
           <a:xfrm>
             <a:off x="0" y="0"/>
-            <a:ext cx="64008" cy="658368"/>
+            <a:ext cx="82296" cy="749808"/>
           </a:xfrm>
           <a:prstGeom prst="rect">
             <a:avLst/>
@@ -3183,8 +3183,8 @@
         </p:nvSpPr>
         <p:spPr>
           <a:xfrm>
-            <a:off x="164592" y="54864"/>
-            <a:ext cx="8686800" cy="274320"/>
+            <a:off x="201168" y="64008"/>
+            <a:ext cx="8686800" cy="347472"/>
           </a:xfrm>
           <a:prstGeom prst="rect">
             <a:avLst/>
@@ -3199,11 +3199,11 @@
           <a:p>
             <a:pPr algn="l"/>
             <a:r>
-              <a:rPr sz="1300" b="1" i="0">
+              <a:rPr sz="2000" b="1" i="0">
                 <a:solidFill>
                   <a:srgbClr val="FFFFFF"/>
                 </a:solidFill>
-                <a:latin typeface="Calibri"/>
+                <a:latin typeface="Fira Sans"/>
               </a:rPr>
               <a:t>Executive Summary – GD Core Team   Project Health:</a:t>
             </a:r>
@@ -3218,8 +3218,8 @@
         </p:nvSpPr>
         <p:spPr>
           <a:xfrm>
-            <a:off x="164592" y="338328"/>
-            <a:ext cx="6858000" cy="201168"/>
+            <a:off x="201168" y="420624"/>
+            <a:ext cx="7315200" cy="237744"/>
           </a:xfrm>
           <a:prstGeom prst="rect">
             <a:avLst/>
@@ -3234,11 +3234,11 @@
           <a:p>
             <a:pPr algn="l"/>
             <a:r>
-              <a:rPr sz="800" b="0" i="0">
+              <a:rPr sz="1300" b="0" i="0">
                 <a:solidFill>
                   <a:srgbClr val="BBDEFB"/>
                 </a:solidFill>
-                <a:latin typeface="Calibri"/>
+                <a:latin typeface="Fira Sans"/>
               </a:rPr>
               <a:t>Mars – Digital Health Transformation  ·  Sprint 48 · Jun 23 – Jul 6, 2026</a:t>
             </a:r>
@@ -3253,8 +3253,8 @@
         </p:nvSpPr>
         <p:spPr>
           <a:xfrm>
-            <a:off x="8961120" y="73152"/>
-            <a:ext cx="3063240" cy="201168"/>
+            <a:off x="8961120" y="91440"/>
+            <a:ext cx="3063240" cy="256032"/>
           </a:xfrm>
           <a:prstGeom prst="rect">
             <a:avLst/>
@@ -3269,11 +3269,11 @@
           <a:p>
             <a:pPr algn="r"/>
             <a:r>
-              <a:rPr sz="900" b="0" i="0">
+              <a:rPr sz="1400" b="0" i="0">
                 <a:solidFill>
                   <a:srgbClr val="FFFFFF"/>
                 </a:solidFill>
-                <a:latin typeface="Calibri"/>
+                <a:latin typeface="Fira Sans"/>
               </a:rPr>
               <a:t>www.griddynamics.com</a:t>
             </a:r>
@@ -3288,8 +3288,8 @@
         </p:nvSpPr>
         <p:spPr>
           <a:xfrm>
-            <a:off x="8961120" y="274320"/>
-            <a:ext cx="3063240" cy="201168"/>
+            <a:off x="8961120" y="365760"/>
+            <a:ext cx="3063240" cy="237744"/>
           </a:xfrm>
           <a:prstGeom prst="rect">
             <a:avLst/>
@@ -3304,11 +3304,11 @@
           <a:p>
             <a:pPr algn="r"/>
             <a:r>
-              <a:rPr sz="650" b="0" i="1">
+              <a:rPr sz="1000" b="0" i="1">
                 <a:solidFill>
                   <a:srgbClr val="BBDEFB"/>
                 </a:solidFill>
-                <a:latin typeface="Calibri"/>
+                <a:latin typeface="Fira Sans"/>
               </a:rPr>
               <a:t>trusted engineering partner for digital transformation</a:t>
             </a:r>
@@ -3323,8 +3323,8 @@
         </p:nvSpPr>
         <p:spPr>
           <a:xfrm>
-            <a:off x="11430000" y="173736"/>
-            <a:ext cx="384048" cy="274320"/>
+            <a:off x="11704320" y="201168"/>
+            <a:ext cx="365760" cy="292608"/>
           </a:xfrm>
           <a:prstGeom prst="rect">
             <a:avLst/>
@@ -3366,8 +3366,8 @@
         </p:nvSpPr>
         <p:spPr>
           <a:xfrm>
-            <a:off x="11430000" y="173736"/>
-            <a:ext cx="384048" cy="274320"/>
+            <a:off x="11704320" y="201168"/>
+            <a:ext cx="365760" cy="292608"/>
           </a:xfrm>
           <a:prstGeom prst="rect">
             <a:avLst/>
@@ -3382,11 +3382,11 @@
           <a:p>
             <a:pPr algn="ctr"/>
             <a:r>
-              <a:rPr sz="900" b="1" i="0">
+              <a:rPr sz="1400" b="1" i="0">
                 <a:solidFill>
                   <a:srgbClr val="FFFFFF"/>
                 </a:solidFill>
-                <a:latin typeface="Calibri"/>
+                <a:latin typeface="Fira Sans"/>
               </a:rPr>
               <a:t>3</a:t>
             </a:r>
@@ -3401,8 +3401,8 @@
         </p:nvSpPr>
         <p:spPr>
           <a:xfrm>
-            <a:off x="0" y="6583680"/>
-            <a:ext cx="12188952" cy="274320"/>
+            <a:off x="0" y="6537960"/>
+            <a:ext cx="12188952" cy="320040"/>
           </a:xfrm>
           <a:prstGeom prst="rect">
             <a:avLst/>
@@ -3444,8 +3444,8 @@
         </p:nvSpPr>
         <p:spPr>
           <a:xfrm>
-            <a:off x="0" y="6583680"/>
-            <a:ext cx="64008" cy="274320"/>
+            <a:off x="0" y="6537960"/>
+            <a:ext cx="82296" cy="320040"/>
           </a:xfrm>
           <a:prstGeom prst="rect">
             <a:avLst/>
@@ -3487,8 +3487,8 @@
         </p:nvSpPr>
         <p:spPr>
           <a:xfrm>
-            <a:off x="164592" y="6629400"/>
-            <a:ext cx="7772400" cy="201168"/>
+            <a:off x="201168" y="6601968"/>
+            <a:ext cx="7772400" cy="219456"/>
           </a:xfrm>
           <a:prstGeom prst="rect">
             <a:avLst/>
@@ -3503,11 +3503,11 @@
           <a:p>
             <a:pPr algn="l"/>
             <a:r>
-              <a:rPr sz="700" b="0" i="0">
+              <a:rPr sz="1100" b="0" i="0">
                 <a:solidFill>
                   <a:srgbClr val="BBDEFB"/>
                 </a:solidFill>
-                <a:latin typeface="Calibri"/>
+                <a:latin typeface="Fira Sans"/>
               </a:rPr>
               <a:t>Grid Dynamics / Mars – Digital Health Transformation / WSR – June 29, 2026</a:t>
             </a:r>
@@ -3522,8 +3522,8 @@
         </p:nvSpPr>
         <p:spPr>
           <a:xfrm>
-            <a:off x="8686800" y="6629400"/>
-            <a:ext cx="3337560" cy="201168"/>
+            <a:off x="8686800" y="6601968"/>
+            <a:ext cx="3337560" cy="219456"/>
           </a:xfrm>
           <a:prstGeom prst="rect">
             <a:avLst/>
@@ -3538,11 +3538,11 @@
           <a:p>
             <a:pPr algn="r"/>
             <a:r>
-              <a:rPr sz="700" b="0" i="0">
+              <a:rPr sz="1100" b="0" i="0">
                 <a:solidFill>
                   <a:srgbClr val="BBDEFB"/>
                 </a:solidFill>
-                <a:latin typeface="Calibri"/>
+                <a:latin typeface="Fira Sans"/>
               </a:rPr>
               <a:t>Privileged and confidential</a:t>
             </a:r>
@@ -3557,8 +3557,8 @@
         </p:nvSpPr>
         <p:spPr>
           <a:xfrm>
-            <a:off x="0" y="658368"/>
-            <a:ext cx="12188952" cy="5925312"/>
+            <a:off x="0" y="749808"/>
+            <a:ext cx="12188952" cy="5788152"/>
           </a:xfrm>
           <a:prstGeom prst="rect">
             <a:avLst/>
@@ -3600,8 +3600,8 @@
         </p:nvSpPr>
         <p:spPr>
           <a:xfrm>
-            <a:off x="91440" y="749808"/>
-            <a:ext cx="2864358" cy="22860"/>
+            <a:off x="118872" y="859536"/>
+            <a:ext cx="2809494" cy="27432"/>
           </a:xfrm>
           <a:prstGeom prst="rect">
             <a:avLst/>
@@ -3643,8 +3643,8 @@
         </p:nvSpPr>
         <p:spPr>
           <a:xfrm>
-            <a:off x="91440" y="777240"/>
-            <a:ext cx="2864358" cy="182880"/>
+            <a:off x="118872" y="896112"/>
+            <a:ext cx="2809494" cy="310896"/>
           </a:xfrm>
           <a:prstGeom prst="rect">
             <a:avLst/>
@@ -3659,11 +3659,11 @@
           <a:p>
             <a:pPr algn="l"/>
             <a:r>
-              <a:rPr sz="800" b="1" i="0">
+              <a:rPr sz="2200" b="1" i="0">
                 <a:solidFill>
                   <a:srgbClr val="1B2A4A"/>
                 </a:solidFill>
-                <a:latin typeface="Calibri"/>
+                <a:latin typeface="Fira Sans"/>
               </a:rPr>
               <a:t>TOOTHSCAN 2.0</a:t>
             </a:r>
@@ -3678,8 +3678,8 @@
         </p:nvSpPr>
         <p:spPr>
           <a:xfrm>
-            <a:off x="91440" y="960120"/>
-            <a:ext cx="2864358" cy="7315"/>
+            <a:off x="118872" y="1207008"/>
+            <a:ext cx="2809494" cy="9144"/>
           </a:xfrm>
           <a:prstGeom prst="rect">
             <a:avLst/>
@@ -3721,8 +3721,8 @@
         </p:nvSpPr>
         <p:spPr>
           <a:xfrm>
-            <a:off x="91440" y="978408"/>
-            <a:ext cx="2864358" cy="173736"/>
+            <a:off x="118872" y="1298448"/>
+            <a:ext cx="2809494" cy="274320"/>
           </a:xfrm>
           <a:prstGeom prst="rect">
             <a:avLst/>
@@ -3737,11 +3737,11 @@
           <a:p>
             <a:pPr algn="l"/>
             <a:r>
-              <a:rPr sz="850" b="1" i="0">
+              <a:rPr sz="1900" b="1" i="0">
                 <a:solidFill>
                   <a:srgbClr val="1A1A2E"/>
                 </a:solidFill>
-                <a:latin typeface="Calibri"/>
+                <a:latin typeface="Fira Sans"/>
               </a:rPr>
               <a:t>ToothScan 2.0 – Pet Parent Experience</a:t>
             </a:r>
@@ -3756,8 +3756,8 @@
         </p:nvSpPr>
         <p:spPr>
           <a:xfrm>
-            <a:off x="91440" y="1152144"/>
-            <a:ext cx="2864358" cy="146304"/>
+            <a:off x="118872" y="1572768"/>
+            <a:ext cx="2809494" cy="237744"/>
           </a:xfrm>
           <a:prstGeom prst="rect">
             <a:avLst/>
@@ -3771,20 +3771,20 @@
           <a:lstStyle/>
           <a:p>
             <a:r>
-              <a:rPr sz="750" b="1">
+              <a:rPr sz="1700" b="1">
                 <a:solidFill>
                   <a:srgbClr val="2E7D32"/>
                 </a:solidFill>
-                <a:latin typeface="Calibri"/>
+                <a:latin typeface="Fira Sans"/>
               </a:rPr>
               <a:t>● </a:t>
             </a:r>
             <a:r>
-              <a:rPr sz="750" b="1">
+              <a:rPr sz="1700" b="1">
                 <a:solidFill>
                   <a:srgbClr val="2E7D32"/>
                 </a:solidFill>
-                <a:latin typeface="Calibri"/>
+                <a:latin typeface="Fira Sans"/>
               </a:rPr>
               <a:t>COMPLETED</a:t>
             </a:r>
@@ -3799,8 +3799,8 @@
         </p:nvSpPr>
         <p:spPr>
           <a:xfrm>
-            <a:off x="219456" y="1298448"/>
-            <a:ext cx="2736341" cy="150875"/>
+            <a:off x="283464" y="1810512"/>
+            <a:ext cx="2644901" cy="256031"/>
           </a:xfrm>
           <a:prstGeom prst="rect">
             <a:avLst/>
@@ -3814,11 +3814,11 @@
           <a:lstStyle/>
           <a:p>
             <a:r>
-              <a:rPr sz="750" b="0">
+              <a:rPr sz="1700" b="0">
                 <a:solidFill>
                   <a:srgbClr val="3D3D3D"/>
                 </a:solidFill>
-                <a:latin typeface="Calibri"/>
+                <a:latin typeface="Fira Sans"/>
               </a:rPr>
               <a:t>Fixed content on welcome page &amp; fun fact page</a:t>
             </a:r>
@@ -3833,8 +3833,8 @@
         </p:nvSpPr>
         <p:spPr>
           <a:xfrm>
-            <a:off x="219456" y="1431036"/>
-            <a:ext cx="2736341" cy="150875"/>
+            <a:off x="283464" y="2029968"/>
+            <a:ext cx="2644901" cy="256031"/>
           </a:xfrm>
           <a:prstGeom prst="rect">
             <a:avLst/>
@@ -3848,11 +3848,11 @@
           <a:lstStyle/>
           <a:p>
             <a:r>
-              <a:rPr sz="750" b="0">
+              <a:rPr sz="1700" b="0">
                 <a:solidFill>
                   <a:srgbClr val="3D3D3D"/>
                 </a:solidFill>
-                <a:latin typeface="Calibri"/>
+                <a:latin typeface="Fira Sans"/>
               </a:rPr>
               <a:t>Resolved spacing issues in user questionnaire</a:t>
             </a:r>
@@ -3867,8 +3867,8 @@
         </p:nvSpPr>
         <p:spPr>
           <a:xfrm>
-            <a:off x="219456" y="1563624"/>
-            <a:ext cx="2736341" cy="150875"/>
+            <a:off x="283464" y="2249424"/>
+            <a:ext cx="2644901" cy="256031"/>
           </a:xfrm>
           <a:prstGeom prst="rect">
             <a:avLst/>
@@ -3882,11 +3882,11 @@
           <a:lstStyle/>
           <a:p>
             <a:r>
-              <a:rPr sz="750" b="0">
+              <a:rPr sz="1700" b="0">
                 <a:solidFill>
                   <a:srgbClr val="3D3D3D"/>
                 </a:solidFill>
-                <a:latin typeface="Calibri"/>
+                <a:latin typeface="Fira Sans"/>
               </a:rPr>
               <a:t>Restored back button on Additional Resources page</a:t>
             </a:r>
@@ -3901,8 +3901,8 @@
         </p:nvSpPr>
         <p:spPr>
           <a:xfrm>
-            <a:off x="219456" y="1696212"/>
-            <a:ext cx="2736341" cy="150875"/>
+            <a:off x="283464" y="2468880"/>
+            <a:ext cx="2644901" cy="256031"/>
           </a:xfrm>
           <a:prstGeom prst="rect">
             <a:avLst/>
@@ -3916,11 +3916,11 @@
           <a:lstStyle/>
           <a:p>
             <a:r>
-              <a:rPr sz="750" b="0">
+              <a:rPr sz="1700" b="0">
                 <a:solidFill>
                   <a:srgbClr val="3D3D3D"/>
                 </a:solidFill>
-                <a:latin typeface="Calibri"/>
+                <a:latin typeface="Fira Sans"/>
               </a:rPr>
               <a:t>Resolved mobile Stage testing observations</a:t>
             </a:r>
@@ -3935,8 +3935,8 @@
         </p:nvSpPr>
         <p:spPr>
           <a:xfrm>
-            <a:off x="91440" y="1828800"/>
-            <a:ext cx="2864358" cy="146304"/>
+            <a:off x="118872" y="2688336"/>
+            <a:ext cx="2809494" cy="237744"/>
           </a:xfrm>
           <a:prstGeom prst="rect">
             <a:avLst/>
@@ -3950,20 +3950,20 @@
           <a:lstStyle/>
           <a:p>
             <a:r>
-              <a:rPr sz="750" b="1">
+              <a:rPr sz="1700" b="1">
                 <a:solidFill>
                   <a:srgbClr val="E65100"/>
                 </a:solidFill>
-                <a:latin typeface="Calibri"/>
+                <a:latin typeface="Fira Sans"/>
               </a:rPr>
               <a:t>● </a:t>
             </a:r>
             <a:r>
-              <a:rPr sz="750" b="1">
+              <a:rPr sz="1700" b="1">
                 <a:solidFill>
                   <a:srgbClr val="E65100"/>
                 </a:solidFill>
-                <a:latin typeface="Calibri"/>
+                <a:latin typeface="Fira Sans"/>
               </a:rPr>
               <a:t>QA / TESTING</a:t>
             </a:r>
@@ -3978,8 +3978,8 @@
         </p:nvSpPr>
         <p:spPr>
           <a:xfrm>
-            <a:off x="219456" y="1975104"/>
-            <a:ext cx="2736341" cy="150875"/>
+            <a:off x="283464" y="2926080"/>
+            <a:ext cx="2644901" cy="402336"/>
           </a:xfrm>
           <a:prstGeom prst="rect">
             <a:avLst/>
@@ -3993,11 +3993,11 @@
           <a:lstStyle/>
           <a:p>
             <a:r>
-              <a:rPr sz="750" b="0">
+              <a:rPr sz="1700" b="0">
                 <a:solidFill>
                   <a:srgbClr val="3D3D3D"/>
                 </a:solidFill>
-                <a:latin typeface="Calibri"/>
+                <a:latin typeface="Fira Sans"/>
               </a:rPr>
               <a:t>Config ID stored in Outcomes DB – ToothScan tool updated</a:t>
             </a:r>
@@ -4012,8 +4012,8 @@
         </p:nvSpPr>
         <p:spPr>
           <a:xfrm>
-            <a:off x="219456" y="2107692"/>
-            <a:ext cx="2736341" cy="150875"/>
+            <a:off x="283464" y="3291840"/>
+            <a:ext cx="2644901" cy="256031"/>
           </a:xfrm>
           <a:prstGeom prst="rect">
             <a:avLst/>
@@ -4027,11 +4027,11 @@
           <a:lstStyle/>
           <a:p>
             <a:r>
-              <a:rPr sz="750" b="0">
+              <a:rPr sz="1700" b="0">
                 <a:solidFill>
                   <a:srgbClr val="3D3D3D"/>
                 </a:solidFill>
-                <a:latin typeface="Calibri"/>
+                <a:latin typeface="Fira Sans"/>
               </a:rPr>
               <a:t>CAS updated to persist Config ID in outcomes</a:t>
             </a:r>
@@ -4046,8 +4046,8 @@
         </p:nvSpPr>
         <p:spPr>
           <a:xfrm>
-            <a:off x="219456" y="2240280"/>
-            <a:ext cx="2736341" cy="150875"/>
+            <a:off x="283464" y="3511296"/>
+            <a:ext cx="2644901" cy="256031"/>
           </a:xfrm>
           <a:prstGeom prst="rect">
             <a:avLst/>
@@ -4061,11 +4061,11 @@
           <a:lstStyle/>
           <a:p>
             <a:r>
-              <a:rPr sz="750" b="0">
+              <a:rPr sz="1700" b="0">
                 <a:solidFill>
                   <a:srgbClr val="3D3D3D"/>
                 </a:solidFill>
-                <a:latin typeface="Calibri"/>
+                <a:latin typeface="Fira Sans"/>
               </a:rPr>
               <a:t>App context updated with Config ID across all tools</a:t>
             </a:r>
@@ -4080,8 +4080,8 @@
         </p:nvSpPr>
         <p:spPr>
           <a:xfrm>
-            <a:off x="91440" y="2372868"/>
-            <a:ext cx="2864358" cy="146304"/>
+            <a:off x="118872" y="3730752"/>
+            <a:ext cx="2809494" cy="237744"/>
           </a:xfrm>
           <a:prstGeom prst="rect">
             <a:avLst/>
@@ -4095,20 +4095,20 @@
           <a:lstStyle/>
           <a:p>
             <a:r>
-              <a:rPr sz="750" b="1">
+              <a:rPr sz="1700" b="1">
                 <a:solidFill>
                   <a:srgbClr val="1565C0"/>
                 </a:solidFill>
-                <a:latin typeface="Calibri"/>
+                <a:latin typeface="Fira Sans"/>
               </a:rPr>
               <a:t>● </a:t>
             </a:r>
             <a:r>
-              <a:rPr sz="750" b="1">
+              <a:rPr sz="1700" b="1">
                 <a:solidFill>
                   <a:srgbClr val="1565C0"/>
                 </a:solidFill>
-                <a:latin typeface="Calibri"/>
+                <a:latin typeface="Fira Sans"/>
               </a:rPr>
               <a:t>IN PROGRESS</a:t>
             </a:r>
@@ -4123,8 +4123,8 @@
         </p:nvSpPr>
         <p:spPr>
           <a:xfrm>
-            <a:off x="219456" y="2519172"/>
-            <a:ext cx="2736341" cy="150875"/>
+            <a:off x="283464" y="3968496"/>
+            <a:ext cx="2644901" cy="256031"/>
           </a:xfrm>
           <a:prstGeom prst="rect">
             <a:avLst/>
@@ -4138,11 +4138,11 @@
           <a:lstStyle/>
           <a:p>
             <a:r>
-              <a:rPr sz="750" b="0">
+              <a:rPr sz="1700" b="0">
                 <a:solidFill>
                   <a:srgbClr val="3D3D3D"/>
                 </a:solidFill>
-                <a:latin typeface="Calibri"/>
+                <a:latin typeface="Fira Sans"/>
               </a:rPr>
               <a:t>User Journey deployment to Preprod &amp; Production</a:t>
             </a:r>
@@ -4157,8 +4157,8 @@
         </p:nvSpPr>
         <p:spPr>
           <a:xfrm>
-            <a:off x="219456" y="2651760"/>
-            <a:ext cx="2736341" cy="150875"/>
+            <a:off x="283464" y="4187952"/>
+            <a:ext cx="2644901" cy="256031"/>
           </a:xfrm>
           <a:prstGeom prst="rect">
             <a:avLst/>
@@ -4172,11 +4172,11 @@
           <a:lstStyle/>
           <a:p>
             <a:r>
-              <a:rPr sz="750" b="0">
+              <a:rPr sz="1700" b="0">
                 <a:solidFill>
                   <a:srgbClr val="3D3D3D"/>
                 </a:solidFill>
-                <a:latin typeface="Calibri"/>
+                <a:latin typeface="Fira Sans"/>
               </a:rPr>
               <a:t>Backend logger error resolution in ToothScan service</a:t>
             </a:r>
@@ -4191,8 +4191,8 @@
         </p:nvSpPr>
         <p:spPr>
           <a:xfrm>
-            <a:off x="91440" y="2784348"/>
-            <a:ext cx="2864358" cy="146304"/>
+            <a:off x="118872" y="4407408"/>
+            <a:ext cx="2809494" cy="237744"/>
           </a:xfrm>
           <a:prstGeom prst="rect">
             <a:avLst/>
@@ -4206,20 +4206,20 @@
           <a:lstStyle/>
           <a:p>
             <a:r>
-              <a:rPr sz="750" b="1">
+              <a:rPr sz="1700" b="1">
                 <a:solidFill>
                   <a:srgbClr val="555555"/>
                 </a:solidFill>
-                <a:latin typeface="Calibri"/>
+                <a:latin typeface="Fira Sans"/>
               </a:rPr>
               <a:t>● </a:t>
             </a:r>
             <a:r>
-              <a:rPr sz="750" b="1">
+              <a:rPr sz="1700" b="1">
                 <a:solidFill>
                   <a:srgbClr val="555555"/>
                 </a:solidFill>
-                <a:latin typeface="Calibri"/>
+                <a:latin typeface="Fira Sans"/>
               </a:rPr>
               <a:t>PLANNED</a:t>
             </a:r>
@@ -4234,8 +4234,8 @@
         </p:nvSpPr>
         <p:spPr>
           <a:xfrm>
-            <a:off x="219456" y="2930652"/>
-            <a:ext cx="2736341" cy="150875"/>
+            <a:off x="283464" y="4645152"/>
+            <a:ext cx="2644901" cy="256031"/>
           </a:xfrm>
           <a:prstGeom prst="rect">
             <a:avLst/>
@@ -4249,11 +4249,11 @@
           <a:lstStyle/>
           <a:p>
             <a:r>
-              <a:rPr sz="750" b="0">
+              <a:rPr sz="1700" b="0">
                 <a:solidFill>
                   <a:srgbClr val="3D3D3D"/>
                 </a:solidFill>
-                <a:latin typeface="Calibri"/>
+                <a:latin typeface="Fira Sans"/>
               </a:rPr>
               <a:t>Updated image upload error screens (new Figma designs)</a:t>
             </a:r>
@@ -4268,8 +4268,8 @@
         </p:nvSpPr>
         <p:spPr>
           <a:xfrm>
-            <a:off x="219456" y="3063240"/>
-            <a:ext cx="2736341" cy="150875"/>
+            <a:off x="283464" y="4864608"/>
+            <a:ext cx="2644901" cy="256031"/>
           </a:xfrm>
           <a:prstGeom prst="rect">
             <a:avLst/>
@@ -4283,11 +4283,11 @@
           <a:lstStyle/>
           <a:p>
             <a:r>
-              <a:rPr sz="750" b="0">
+              <a:rPr sz="1700" b="0">
                 <a:solidFill>
                   <a:srgbClr val="3D3D3D"/>
                 </a:solidFill>
-                <a:latin typeface="Calibri"/>
+                <a:latin typeface="Fira Sans"/>
               </a:rPr>
               <a:t>Validation messages display fix on preview screen</a:t>
             </a:r>
@@ -4302,8 +4302,8 @@
         </p:nvSpPr>
         <p:spPr>
           <a:xfrm>
-            <a:off x="219456" y="3195828"/>
-            <a:ext cx="2736341" cy="150875"/>
+            <a:off x="283464" y="5084064"/>
+            <a:ext cx="2644901" cy="256031"/>
           </a:xfrm>
           <a:prstGeom prst="rect">
             <a:avLst/>
@@ -4317,11 +4317,11 @@
           <a:lstStyle/>
           <a:p>
             <a:r>
-              <a:rPr sz="750" b="0">
+              <a:rPr sz="1700" b="0">
                 <a:solidFill>
                   <a:srgbClr val="3D3D3D"/>
                 </a:solidFill>
-                <a:latin typeface="Calibri"/>
+                <a:latin typeface="Fira Sans"/>
               </a:rPr>
               <a:t>Image Not Found error handling on user submission</a:t>
             </a:r>
@@ -4336,8 +4336,8 @@
         </p:nvSpPr>
         <p:spPr>
           <a:xfrm>
-            <a:off x="219456" y="3328416"/>
-            <a:ext cx="2736341" cy="150875"/>
+            <a:off x="283464" y="5303520"/>
+            <a:ext cx="2644901" cy="256031"/>
           </a:xfrm>
           <a:prstGeom prst="rect">
             <a:avLst/>
@@ -4351,11 +4351,11 @@
           <a:lstStyle/>
           <a:p>
             <a:r>
-              <a:rPr sz="750" b="0">
+              <a:rPr sz="1700" b="0">
                 <a:solidFill>
                   <a:srgbClr val="3D3D3D"/>
                 </a:solidFill>
-                <a:latin typeface="Calibri"/>
+                <a:latin typeface="Fira Sans"/>
               </a:rPr>
               <a:t>Clickable option display correction on preview screen</a:t>
             </a:r>
@@ -4370,8 +4370,8 @@
         </p:nvSpPr>
         <p:spPr>
           <a:xfrm>
-            <a:off x="3047238" y="658368"/>
-            <a:ext cx="10972" cy="5925312"/>
+            <a:off x="3047238" y="749808"/>
+            <a:ext cx="10972" cy="5788152"/>
           </a:xfrm>
           <a:prstGeom prst="rect">
             <a:avLst/>
@@ -4413,8 +4413,8 @@
         </p:nvSpPr>
         <p:spPr>
           <a:xfrm>
-            <a:off x="3138678" y="749808"/>
-            <a:ext cx="2864358" cy="22860"/>
+            <a:off x="3166110" y="859536"/>
+            <a:ext cx="2809494" cy="27432"/>
           </a:xfrm>
           <a:prstGeom prst="rect">
             <a:avLst/>
@@ -4456,8 +4456,8 @@
         </p:nvSpPr>
         <p:spPr>
           <a:xfrm>
-            <a:off x="3138678" y="777240"/>
-            <a:ext cx="2864358" cy="182880"/>
+            <a:off x="3166110" y="896112"/>
+            <a:ext cx="2809494" cy="310896"/>
           </a:xfrm>
           <a:prstGeom prst="rect">
             <a:avLst/>
@@ -4472,11 +4472,11 @@
           <a:p>
             <a:pPr algn="l"/>
             <a:r>
-              <a:rPr sz="800" b="1" i="0">
+              <a:rPr sz="2200" b="1" i="0">
                 <a:solidFill>
                   <a:srgbClr val="1B2A4A"/>
                 </a:solidFill>
-                <a:latin typeface="Calibri"/>
+                <a:latin typeface="Fira Sans"/>
               </a:rPr>
               <a:t>SDK – JOURNEY NAVIGATION</a:t>
             </a:r>
@@ -4491,8 +4491,8 @@
         </p:nvSpPr>
         <p:spPr>
           <a:xfrm>
-            <a:off x="3138678" y="960120"/>
-            <a:ext cx="2864358" cy="7315"/>
+            <a:off x="3166110" y="1207008"/>
+            <a:ext cx="2809494" cy="9144"/>
           </a:xfrm>
           <a:prstGeom prst="rect">
             <a:avLst/>
@@ -4534,8 +4534,8 @@
         </p:nvSpPr>
         <p:spPr>
           <a:xfrm>
-            <a:off x="3138678" y="978408"/>
-            <a:ext cx="2864358" cy="173736"/>
+            <a:off x="3166110" y="1298448"/>
+            <a:ext cx="2809494" cy="274320"/>
           </a:xfrm>
           <a:prstGeom prst="rect">
             <a:avLst/>
@@ -4550,11 +4550,11 @@
           <a:p>
             <a:pPr algn="l"/>
             <a:r>
-              <a:rPr sz="850" b="1" i="0">
+              <a:rPr sz="1900" b="1" i="0">
                 <a:solidFill>
                   <a:srgbClr val="1A1A2E"/>
                 </a:solidFill>
-                <a:latin typeface="Calibri"/>
+                <a:latin typeface="Fira Sans"/>
               </a:rPr>
               <a:t>Configurable Journey Navigation</a:t>
             </a:r>
@@ -4569,8 +4569,8 @@
         </p:nvSpPr>
         <p:spPr>
           <a:xfrm>
-            <a:off x="3138678" y="1152144"/>
-            <a:ext cx="2864358" cy="146304"/>
+            <a:off x="3166110" y="1572768"/>
+            <a:ext cx="2809494" cy="237744"/>
           </a:xfrm>
           <a:prstGeom prst="rect">
             <a:avLst/>
@@ -4584,20 +4584,20 @@
           <a:lstStyle/>
           <a:p>
             <a:r>
-              <a:rPr sz="750" b="1">
+              <a:rPr sz="1700" b="1">
                 <a:solidFill>
                   <a:srgbClr val="2E7D32"/>
                 </a:solidFill>
-                <a:latin typeface="Calibri"/>
+                <a:latin typeface="Fira Sans"/>
               </a:rPr>
               <a:t>● </a:t>
             </a:r>
             <a:r>
-              <a:rPr sz="750" b="1">
+              <a:rPr sz="1700" b="1">
                 <a:solidFill>
                   <a:srgbClr val="2E7D32"/>
                 </a:solidFill>
-                <a:latin typeface="Calibri"/>
+                <a:latin typeface="Fira Sans"/>
               </a:rPr>
               <a:t>COMPLETED</a:t>
             </a:r>
@@ -4612,8 +4612,8 @@
         </p:nvSpPr>
         <p:spPr>
           <a:xfrm>
-            <a:off x="3266694" y="1298448"/>
-            <a:ext cx="2736341" cy="150875"/>
+            <a:off x="3330702" y="1810512"/>
+            <a:ext cx="2644901" cy="256031"/>
           </a:xfrm>
           <a:prstGeom prst="rect">
             <a:avLst/>
@@ -4627,11 +4627,11 @@
           <a:lstStyle/>
           <a:p>
             <a:r>
-              <a:rPr sz="750" b="0">
+              <a:rPr sz="1700" b="0">
                 <a:solidFill>
                   <a:srgbClr val="3D3D3D"/>
                 </a:solidFill>
-                <a:latin typeface="Calibri"/>
+                <a:latin typeface="Fira Sans"/>
               </a:rPr>
               <a:t>Navigation Rules save validation delivered</a:t>
             </a:r>
@@ -4646,8 +4646,8 @@
         </p:nvSpPr>
         <p:spPr>
           <a:xfrm>
-            <a:off x="3266694" y="1431036"/>
-            <a:ext cx="2736341" cy="150875"/>
+            <a:off x="3330702" y="2029968"/>
+            <a:ext cx="2644901" cy="256031"/>
           </a:xfrm>
           <a:prstGeom prst="rect">
             <a:avLst/>
@@ -4661,11 +4661,11 @@
           <a:lstStyle/>
           <a:p>
             <a:r>
-              <a:rPr sz="750" b="0">
+              <a:rPr sz="1700" b="0">
                 <a:solidFill>
                   <a:srgbClr val="3D3D3D"/>
                 </a:solidFill>
-                <a:latin typeface="Calibri"/>
+                <a:latin typeface="Fira Sans"/>
               </a:rPr>
               <a:t>Navigation Rules &amp; View Conditions schema completed</a:t>
             </a:r>
@@ -4680,8 +4680,8 @@
         </p:nvSpPr>
         <p:spPr>
           <a:xfrm>
-            <a:off x="3138678" y="1563624"/>
-            <a:ext cx="2864358" cy="146304"/>
+            <a:off x="3166110" y="2249424"/>
+            <a:ext cx="2809494" cy="237744"/>
           </a:xfrm>
           <a:prstGeom prst="rect">
             <a:avLst/>
@@ -4695,20 +4695,20 @@
           <a:lstStyle/>
           <a:p>
             <a:r>
-              <a:rPr sz="750" b="1">
+              <a:rPr sz="1700" b="1">
                 <a:solidFill>
                   <a:srgbClr val="1565C0"/>
                 </a:solidFill>
-                <a:latin typeface="Calibri"/>
+                <a:latin typeface="Fira Sans"/>
               </a:rPr>
               <a:t>● </a:t>
             </a:r>
             <a:r>
-              <a:rPr sz="750" b="1">
+              <a:rPr sz="1700" b="1">
                 <a:solidFill>
                   <a:srgbClr val="1565C0"/>
                 </a:solidFill>
-                <a:latin typeface="Calibri"/>
+                <a:latin typeface="Fira Sans"/>
               </a:rPr>
               <a:t>IN PROGRESS</a:t>
             </a:r>
@@ -4723,8 +4723,8 @@
         </p:nvSpPr>
         <p:spPr>
           <a:xfrm>
-            <a:off x="3266694" y="1709928"/>
-            <a:ext cx="2736341" cy="150875"/>
+            <a:off x="3330702" y="2487168"/>
+            <a:ext cx="2644901" cy="256031"/>
           </a:xfrm>
           <a:prstGeom prst="rect">
             <a:avLst/>
@@ -4738,11 +4738,11 @@
           <a:lstStyle/>
           <a:p>
             <a:r>
-              <a:rPr sz="750" b="0">
+              <a:rPr sz="1700" b="0">
                 <a:solidFill>
                   <a:srgbClr val="3D3D3D"/>
                 </a:solidFill>
-                <a:latin typeface="Calibri"/>
+                <a:latin typeface="Fira Sans"/>
               </a:rPr>
               <a:t>UX design for navigation rules in SDK Manager</a:t>
             </a:r>
@@ -4757,8 +4757,8 @@
         </p:nvSpPr>
         <p:spPr>
           <a:xfrm>
-            <a:off x="3266694" y="1842515"/>
-            <a:ext cx="2736341" cy="150875"/>
+            <a:off x="3330702" y="2706624"/>
+            <a:ext cx="2644901" cy="256031"/>
           </a:xfrm>
           <a:prstGeom prst="rect">
             <a:avLst/>
@@ -4772,11 +4772,11 @@
           <a:lstStyle/>
           <a:p>
             <a:r>
-              <a:rPr sz="750" b="0">
+              <a:rPr sz="1700" b="0">
                 <a:solidFill>
                   <a:srgbClr val="3D3D3D"/>
                 </a:solidFill>
-                <a:latin typeface="Calibri"/>
+                <a:latin typeface="Fira Sans"/>
               </a:rPr>
               <a:t>Screen lifecycle actions in Screen Builder (FE)</a:t>
             </a:r>
@@ -4791,8 +4791,8 @@
         </p:nvSpPr>
         <p:spPr>
           <a:xfrm>
-            <a:off x="3138678" y="1975103"/>
-            <a:ext cx="2864358" cy="146304"/>
+            <a:off x="3166110" y="2926080"/>
+            <a:ext cx="2809494" cy="237744"/>
           </a:xfrm>
           <a:prstGeom prst="rect">
             <a:avLst/>
@@ -4806,20 +4806,20 @@
           <a:lstStyle/>
           <a:p>
             <a:r>
-              <a:rPr sz="750" b="1">
+              <a:rPr sz="1700" b="1">
                 <a:solidFill>
                   <a:srgbClr val="555555"/>
                 </a:solidFill>
-                <a:latin typeface="Calibri"/>
+                <a:latin typeface="Fira Sans"/>
               </a:rPr>
               <a:t>● </a:t>
             </a:r>
             <a:r>
-              <a:rPr sz="750" b="1">
+              <a:rPr sz="1700" b="1">
                 <a:solidFill>
                   <a:srgbClr val="555555"/>
                 </a:solidFill>
-                <a:latin typeface="Calibri"/>
+                <a:latin typeface="Fira Sans"/>
               </a:rPr>
               <a:t>PLANNED</a:t>
             </a:r>
@@ -4834,8 +4834,8 @@
         </p:nvSpPr>
         <p:spPr>
           <a:xfrm>
-            <a:off x="3266694" y="2121408"/>
-            <a:ext cx="2736341" cy="150875"/>
+            <a:off x="3330702" y="3163824"/>
+            <a:ext cx="2644901" cy="256031"/>
           </a:xfrm>
           <a:prstGeom prst="rect">
             <a:avLst/>
@@ -4849,11 +4849,11 @@
           <a:lstStyle/>
           <a:p>
             <a:r>
-              <a:rPr sz="750" b="0">
+              <a:rPr sz="1700" b="0">
                 <a:solidFill>
                   <a:srgbClr val="3D3D3D"/>
                 </a:solidFill>
-                <a:latin typeface="Calibri"/>
+                <a:latin typeface="Fira Sans"/>
               </a:rPr>
               <a:t>Screen lifecycle actions execution in SDK runtime</a:t>
             </a:r>
@@ -4868,8 +4868,8 @@
         </p:nvSpPr>
         <p:spPr>
           <a:xfrm>
-            <a:off x="3266694" y="2253996"/>
-            <a:ext cx="2736341" cy="150875"/>
+            <a:off x="3330702" y="3383280"/>
+            <a:ext cx="2644901" cy="256031"/>
           </a:xfrm>
           <a:prstGeom prst="rect">
             <a:avLst/>
@@ -4883,11 +4883,11 @@
           <a:lstStyle/>
           <a:p>
             <a:r>
-              <a:rPr sz="750" b="0">
+              <a:rPr sz="1700" b="0">
                 <a:solidFill>
                   <a:srgbClr val="3D3D3D"/>
                 </a:solidFill>
-                <a:latin typeface="Calibri"/>
+                <a:latin typeface="Fira Sans"/>
               </a:rPr>
               <a:t>Idempotent outcome persistence for lifecycle actions</a:t>
             </a:r>
@@ -4902,8 +4902,8 @@
         </p:nvSpPr>
         <p:spPr>
           <a:xfrm>
-            <a:off x="6094476" y="658368"/>
-            <a:ext cx="10972" cy="5925312"/>
+            <a:off x="6094476" y="749808"/>
+            <a:ext cx="10972" cy="5788152"/>
           </a:xfrm>
           <a:prstGeom prst="rect">
             <a:avLst/>
@@ -4945,8 +4945,8 @@
         </p:nvSpPr>
         <p:spPr>
           <a:xfrm>
-            <a:off x="6185916" y="749808"/>
-            <a:ext cx="2864358" cy="22860"/>
+            <a:off x="6213348" y="859536"/>
+            <a:ext cx="2809494" cy="27432"/>
           </a:xfrm>
           <a:prstGeom prst="rect">
             <a:avLst/>
@@ -4988,8 +4988,8 @@
         </p:nvSpPr>
         <p:spPr>
           <a:xfrm>
-            <a:off x="6185916" y="777240"/>
-            <a:ext cx="2864358" cy="182880"/>
+            <a:off x="6213348" y="896112"/>
+            <a:ext cx="2809494" cy="310896"/>
           </a:xfrm>
           <a:prstGeom prst="rect">
             <a:avLst/>
@@ -5004,11 +5004,11 @@
           <a:p>
             <a:pPr algn="l"/>
             <a:r>
-              <a:rPr sz="800" b="1" i="0">
+              <a:rPr sz="2200" b="1" i="0">
                 <a:solidFill>
                   <a:srgbClr val="1B2A4A"/>
                 </a:solidFill>
-                <a:latin typeface="Calibri"/>
+                <a:latin typeface="Fira Sans"/>
               </a:rPr>
               <a:t>SDK – CONFIG ID BUNDLES</a:t>
             </a:r>
@@ -5023,8 +5023,8 @@
         </p:nvSpPr>
         <p:spPr>
           <a:xfrm>
-            <a:off x="6185916" y="960120"/>
-            <a:ext cx="2864358" cy="7315"/>
+            <a:off x="6213348" y="1207008"/>
+            <a:ext cx="2809494" cy="9144"/>
           </a:xfrm>
           <a:prstGeom prst="rect">
             <a:avLst/>
@@ -5066,8 +5066,8 @@
         </p:nvSpPr>
         <p:spPr>
           <a:xfrm>
-            <a:off x="6185916" y="978408"/>
-            <a:ext cx="2864358" cy="173736"/>
+            <a:off x="6213348" y="1298448"/>
+            <a:ext cx="2809494" cy="274320"/>
           </a:xfrm>
           <a:prstGeom prst="rect">
             <a:avLst/>
@@ -5082,11 +5082,11 @@
           <a:p>
             <a:pPr algn="l"/>
             <a:r>
-              <a:rPr sz="850" b="1" i="0">
+              <a:rPr sz="1900" b="1" i="0">
                 <a:solidFill>
                   <a:srgbClr val="1A1A2E"/>
                 </a:solidFill>
-                <a:latin typeface="Calibri"/>
+                <a:latin typeface="Fira Sans"/>
               </a:rPr>
               <a:t>Config ID Bundle Management</a:t>
             </a:r>
@@ -5101,8 +5101,8 @@
         </p:nvSpPr>
         <p:spPr>
           <a:xfrm>
-            <a:off x="6185916" y="1152144"/>
-            <a:ext cx="2864358" cy="146304"/>
+            <a:off x="6213348" y="1572768"/>
+            <a:ext cx="2809494" cy="237744"/>
           </a:xfrm>
           <a:prstGeom prst="rect">
             <a:avLst/>
@@ -5116,20 +5116,20 @@
           <a:lstStyle/>
           <a:p>
             <a:r>
-              <a:rPr sz="750" b="1">
+              <a:rPr sz="1700" b="1">
                 <a:solidFill>
                   <a:srgbClr val="1565C0"/>
                 </a:solidFill>
-                <a:latin typeface="Calibri"/>
+                <a:latin typeface="Fira Sans"/>
               </a:rPr>
               <a:t>● </a:t>
             </a:r>
             <a:r>
-              <a:rPr sz="750" b="1">
+              <a:rPr sz="1700" b="1">
                 <a:solidFill>
                   <a:srgbClr val="1565C0"/>
                 </a:solidFill>
-                <a:latin typeface="Calibri"/>
+                <a:latin typeface="Fira Sans"/>
               </a:rPr>
               <a:t>IN PROGRESS</a:t>
             </a:r>
@@ -5144,8 +5144,8 @@
         </p:nvSpPr>
         <p:spPr>
           <a:xfrm>
-            <a:off x="6313931" y="1298448"/>
-            <a:ext cx="2736341" cy="150875"/>
+            <a:off x="6377940" y="1810512"/>
+            <a:ext cx="2644901" cy="256031"/>
           </a:xfrm>
           <a:prstGeom prst="rect">
             <a:avLst/>
@@ -5159,11 +5159,11 @@
           <a:lstStyle/>
           <a:p>
             <a:r>
-              <a:rPr sz="750" b="0">
+              <a:rPr sz="1700" b="0">
                 <a:solidFill>
                   <a:srgbClr val="3D3D3D"/>
                 </a:solidFill>
-                <a:latin typeface="Calibri"/>
+                <a:latin typeface="Fira Sans"/>
               </a:rPr>
               <a:t>Configuration history integration design</a:t>
             </a:r>
@@ -5178,8 +5178,8 @@
         </p:nvSpPr>
         <p:spPr>
           <a:xfrm>
-            <a:off x="6313931" y="1431036"/>
-            <a:ext cx="2736341" cy="150875"/>
+            <a:off x="6377940" y="2029968"/>
+            <a:ext cx="2644901" cy="256031"/>
           </a:xfrm>
           <a:prstGeom prst="rect">
             <a:avLst/>
@@ -5193,11 +5193,11 @@
           <a:lstStyle/>
           <a:p>
             <a:r>
-              <a:rPr sz="750" b="0">
+              <a:rPr sz="1700" b="0">
                 <a:solidFill>
                   <a:srgbClr val="3D3D3D"/>
                 </a:solidFill>
-                <a:latin typeface="Calibri"/>
+                <a:latin typeface="Fira Sans"/>
               </a:rPr>
               <a:t>Configuration variants relationship design</a:t>
             </a:r>
@@ -5212,8 +5212,8 @@
         </p:nvSpPr>
         <p:spPr>
           <a:xfrm>
-            <a:off x="6185916" y="1636776"/>
-            <a:ext cx="2864358" cy="173736"/>
+            <a:off x="6213348" y="2377440"/>
+            <a:ext cx="2809494" cy="274320"/>
           </a:xfrm>
           <a:prstGeom prst="rect">
             <a:avLst/>
@@ -5228,11 +5228,11 @@
           <a:p>
             <a:pPr algn="l"/>
             <a:r>
-              <a:rPr sz="850" b="1" i="0">
+              <a:rPr sz="1900" b="1" i="0">
                 <a:solidFill>
                   <a:srgbClr val="1A1A2E"/>
                 </a:solidFill>
-                <a:latin typeface="Calibri"/>
+                <a:latin typeface="Fira Sans"/>
               </a:rPr>
               <a:t>Edit Sub Brand</a:t>
             </a:r>
@@ -5247,8 +5247,8 @@
         </p:nvSpPr>
         <p:spPr>
           <a:xfrm>
-            <a:off x="6185916" y="1810512"/>
-            <a:ext cx="2864358" cy="146304"/>
+            <a:off x="6213348" y="2651760"/>
+            <a:ext cx="2809494" cy="237744"/>
           </a:xfrm>
           <a:prstGeom prst="rect">
             <a:avLst/>
@@ -5262,20 +5262,20 @@
           <a:lstStyle/>
           <a:p>
             <a:r>
-              <a:rPr sz="750" b="1">
+              <a:rPr sz="1700" b="1">
                 <a:solidFill>
                   <a:srgbClr val="1565C0"/>
                 </a:solidFill>
-                <a:latin typeface="Calibri"/>
+                <a:latin typeface="Fira Sans"/>
               </a:rPr>
               <a:t>● </a:t>
             </a:r>
             <a:r>
-              <a:rPr sz="750" b="1">
+              <a:rPr sz="1700" b="1">
                 <a:solidFill>
                   <a:srgbClr val="1565C0"/>
                 </a:solidFill>
-                <a:latin typeface="Calibri"/>
+                <a:latin typeface="Fira Sans"/>
               </a:rPr>
               <a:t>IN PROGRESS</a:t>
             </a:r>
@@ -5290,8 +5290,8 @@
         </p:nvSpPr>
         <p:spPr>
           <a:xfrm>
-            <a:off x="6313931" y="1956816"/>
-            <a:ext cx="2736341" cy="150875"/>
+            <a:off x="6377940" y="2889504"/>
+            <a:ext cx="2644901" cy="256031"/>
           </a:xfrm>
           <a:prstGeom prst="rect">
             <a:avLst/>
@@ -5305,11 +5305,11 @@
           <a:lstStyle/>
           <a:p>
             <a:r>
-              <a:rPr sz="750" b="0">
+              <a:rPr sz="1700" b="0">
                 <a:solidFill>
                   <a:srgbClr val="3D3D3D"/>
                 </a:solidFill>
-                <a:latin typeface="Calibri"/>
+                <a:latin typeface="Fira Sans"/>
               </a:rPr>
               <a:t>Sub-brand logo override from parent brand</a:t>
             </a:r>
@@ -5324,8 +5324,8 @@
         </p:nvSpPr>
         <p:spPr>
           <a:xfrm>
-            <a:off x="6185916" y="2089404"/>
-            <a:ext cx="2864358" cy="146304"/>
+            <a:off x="6213348" y="3108960"/>
+            <a:ext cx="2809494" cy="237744"/>
           </a:xfrm>
           <a:prstGeom prst="rect">
             <a:avLst/>
@@ -5339,20 +5339,20 @@
           <a:lstStyle/>
           <a:p>
             <a:r>
-              <a:rPr sz="750" b="1">
+              <a:rPr sz="1700" b="1">
                 <a:solidFill>
                   <a:srgbClr val="555555"/>
                 </a:solidFill>
-                <a:latin typeface="Calibri"/>
+                <a:latin typeface="Fira Sans"/>
               </a:rPr>
               <a:t>● </a:t>
             </a:r>
             <a:r>
-              <a:rPr sz="750" b="1">
+              <a:rPr sz="1700" b="1">
                 <a:solidFill>
                   <a:srgbClr val="555555"/>
                 </a:solidFill>
-                <a:latin typeface="Calibri"/>
+                <a:latin typeface="Fira Sans"/>
               </a:rPr>
               <a:t>PLANNED</a:t>
             </a:r>
@@ -5367,8 +5367,8 @@
         </p:nvSpPr>
         <p:spPr>
           <a:xfrm>
-            <a:off x="6313931" y="2235708"/>
-            <a:ext cx="2736341" cy="150875"/>
+            <a:off x="6377940" y="3346704"/>
+            <a:ext cx="2644901" cy="256031"/>
           </a:xfrm>
           <a:prstGeom prst="rect">
             <a:avLst/>
@@ -5382,11 +5382,11 @@
           <a:lstStyle/>
           <a:p>
             <a:r>
-              <a:rPr sz="750" b="0">
+              <a:rPr sz="1700" b="0">
                 <a:solidFill>
                   <a:srgbClr val="3D3D3D"/>
                 </a:solidFill>
-                <a:latin typeface="Calibri"/>
+                <a:latin typeface="Fira Sans"/>
               </a:rPr>
               <a:t>Sub-brand creation workflow bug resolution</a:t>
             </a:r>
@@ -5401,8 +5401,8 @@
         </p:nvSpPr>
         <p:spPr>
           <a:xfrm>
-            <a:off x="6185916" y="2441448"/>
-            <a:ext cx="2864358" cy="173736"/>
+            <a:off x="6213348" y="3694176"/>
+            <a:ext cx="2809494" cy="274320"/>
           </a:xfrm>
           <a:prstGeom prst="rect">
             <a:avLst/>
@@ -5417,11 +5417,11 @@
           <a:p>
             <a:pPr algn="l"/>
             <a:r>
-              <a:rPr sz="850" b="1" i="0">
+              <a:rPr sz="1900" b="1" i="0">
                 <a:solidFill>
                   <a:srgbClr val="1A1A2E"/>
                 </a:solidFill>
-                <a:latin typeface="Calibri"/>
+                <a:latin typeface="Fira Sans"/>
               </a:rPr>
               <a:t>Transition Live Tools → SDK Manager</a:t>
             </a:r>
@@ -5436,8 +5436,8 @@
         </p:nvSpPr>
         <p:spPr>
           <a:xfrm>
-            <a:off x="6185916" y="2615184"/>
-            <a:ext cx="2864358" cy="146304"/>
+            <a:off x="6213348" y="3968496"/>
+            <a:ext cx="2809494" cy="237744"/>
           </a:xfrm>
           <a:prstGeom prst="rect">
             <a:avLst/>
@@ -5451,20 +5451,20 @@
           <a:lstStyle/>
           <a:p>
             <a:r>
-              <a:rPr sz="750" b="1">
+              <a:rPr sz="1700" b="1">
                 <a:solidFill>
                   <a:srgbClr val="1565C0"/>
                 </a:solidFill>
-                <a:latin typeface="Calibri"/>
+                <a:latin typeface="Fira Sans"/>
               </a:rPr>
               <a:t>● </a:t>
             </a:r>
             <a:r>
-              <a:rPr sz="750" b="1">
+              <a:rPr sz="1700" b="1">
                 <a:solidFill>
                   <a:srgbClr val="1565C0"/>
                 </a:solidFill>
-                <a:latin typeface="Calibri"/>
+                <a:latin typeface="Fira Sans"/>
               </a:rPr>
               <a:t>IN PROGRESS</a:t>
             </a:r>
@@ -5479,8 +5479,8 @@
         </p:nvSpPr>
         <p:spPr>
           <a:xfrm>
-            <a:off x="6313931" y="2761488"/>
-            <a:ext cx="2736341" cy="150875"/>
+            <a:off x="6377940" y="4206240"/>
+            <a:ext cx="2644901" cy="256031"/>
           </a:xfrm>
           <a:prstGeom prst="rect">
             <a:avLst/>
@@ -5494,11 +5494,11 @@
           <a:lstStyle/>
           <a:p>
             <a:r>
-              <a:rPr sz="750" b="0">
+              <a:rPr sz="1700" b="0">
                 <a:solidFill>
                   <a:srgbClr val="3D3D3D"/>
                 </a:solidFill>
-                <a:latin typeface="Calibri"/>
+                <a:latin typeface="Fira Sans"/>
               </a:rPr>
               <a:t>Onboarding 7 live tools to SDK Manager with Config IDs</a:t>
             </a:r>
@@ -5513,8 +5513,8 @@
         </p:nvSpPr>
         <p:spPr>
           <a:xfrm>
-            <a:off x="6313931" y="2894076"/>
-            <a:ext cx="2736341" cy="150875"/>
+            <a:off x="6377940" y="4425696"/>
+            <a:ext cx="2644901" cy="402336"/>
           </a:xfrm>
           <a:prstGeom prst="rect">
             <a:avLst/>
@@ -5528,11 +5528,11 @@
           <a:lstStyle/>
           <a:p>
             <a:r>
-              <a:rPr sz="750" b="0">
+              <a:rPr sz="1700" b="0">
                 <a:solidFill>
                   <a:srgbClr val="3D3D3D"/>
                 </a:solidFill>
-                <a:latin typeface="Calibri"/>
+                <a:latin typeface="Fira Sans"/>
               </a:rPr>
               <a:t>(PWC, KWC, ToothCheck, ToothScan, PoopScan, Dermascan, Pawscan)</a:t>
             </a:r>
@@ -5547,8 +5547,8 @@
         </p:nvSpPr>
         <p:spPr>
           <a:xfrm>
-            <a:off x="9141714" y="658368"/>
-            <a:ext cx="10972" cy="5925312"/>
+            <a:off x="9141714" y="749808"/>
+            <a:ext cx="10972" cy="5788152"/>
           </a:xfrm>
           <a:prstGeom prst="rect">
             <a:avLst/>
@@ -5590,8 +5590,8 @@
         </p:nvSpPr>
         <p:spPr>
           <a:xfrm>
-            <a:off x="9233154" y="749808"/>
-            <a:ext cx="2864358" cy="22860"/>
+            <a:off x="9260586" y="859536"/>
+            <a:ext cx="2809494" cy="27432"/>
           </a:xfrm>
           <a:prstGeom prst="rect">
             <a:avLst/>
@@ -5633,8 +5633,8 @@
         </p:nvSpPr>
         <p:spPr>
           <a:xfrm>
-            <a:off x="9233154" y="777240"/>
-            <a:ext cx="2864358" cy="182880"/>
+            <a:off x="9260586" y="896112"/>
+            <a:ext cx="2809494" cy="310896"/>
           </a:xfrm>
           <a:prstGeom prst="rect">
             <a:avLst/>
@@ -5649,11 +5649,11 @@
           <a:p>
             <a:pPr algn="l"/>
             <a:r>
-              <a:rPr sz="800" b="1" i="0">
+              <a:rPr sz="2200" b="1" i="0">
                 <a:solidFill>
                   <a:srgbClr val="1B2A4A"/>
                 </a:solidFill>
-                <a:latin typeface="Calibri"/>
+                <a:latin typeface="Fira Sans"/>
               </a:rPr>
               <a:t>SDK – VERSION WORKFLOW</a:t>
             </a:r>
@@ -5668,8 +5668,8 @@
         </p:nvSpPr>
         <p:spPr>
           <a:xfrm>
-            <a:off x="9233154" y="960120"/>
-            <a:ext cx="2864358" cy="7315"/>
+            <a:off x="9260586" y="1207008"/>
+            <a:ext cx="2809494" cy="9144"/>
           </a:xfrm>
           <a:prstGeom prst="rect">
             <a:avLst/>
@@ -5711,8 +5711,8 @@
         </p:nvSpPr>
         <p:spPr>
           <a:xfrm>
-            <a:off x="9233154" y="978408"/>
-            <a:ext cx="2864358" cy="173736"/>
+            <a:off x="9260586" y="1298448"/>
+            <a:ext cx="2809494" cy="274320"/>
           </a:xfrm>
           <a:prstGeom prst="rect">
             <a:avLst/>
@@ -5727,11 +5727,11 @@
           <a:p>
             <a:pPr algn="l"/>
             <a:r>
-              <a:rPr sz="850" b="1" i="0">
+              <a:rPr sz="1900" b="1" i="0">
                 <a:solidFill>
                   <a:srgbClr val="1A1A2E"/>
                 </a:solidFill>
-                <a:latin typeface="Calibri"/>
+                <a:latin typeface="Fira Sans"/>
               </a:rPr>
               <a:t>SDK Version Workflow Enhancements</a:t>
             </a:r>
@@ -5746,8 +5746,8 @@
         </p:nvSpPr>
         <p:spPr>
           <a:xfrm>
-            <a:off x="9233154" y="1152144"/>
-            <a:ext cx="2864358" cy="146304"/>
+            <a:off x="9260586" y="1572768"/>
+            <a:ext cx="2809494" cy="237744"/>
           </a:xfrm>
           <a:prstGeom prst="rect">
             <a:avLst/>
@@ -5761,20 +5761,20 @@
           <a:lstStyle/>
           <a:p>
             <a:r>
-              <a:rPr sz="750" b="1">
+              <a:rPr sz="1700" b="1">
                 <a:solidFill>
                   <a:srgbClr val="1565C0"/>
                 </a:solidFill>
-                <a:latin typeface="Calibri"/>
+                <a:latin typeface="Fira Sans"/>
               </a:rPr>
               <a:t>● </a:t>
             </a:r>
             <a:r>
-              <a:rPr sz="750" b="1">
+              <a:rPr sz="1700" b="1">
                 <a:solidFill>
                   <a:srgbClr val="1565C0"/>
                 </a:solidFill>
-                <a:latin typeface="Calibri"/>
+                <a:latin typeface="Fira Sans"/>
               </a:rPr>
               <a:t>IN PROGRESS</a:t>
             </a:r>
@@ -5789,8 +5789,8 @@
         </p:nvSpPr>
         <p:spPr>
           <a:xfrm>
-            <a:off x="9361170" y="1298448"/>
-            <a:ext cx="2736341" cy="150875"/>
+            <a:off x="9425178" y="1810512"/>
+            <a:ext cx="2644901" cy="402336"/>
           </a:xfrm>
           <a:prstGeom prst="rect">
             <a:avLst/>
@@ -5804,11 +5804,11 @@
           <a:lstStyle/>
           <a:p>
             <a:r>
-              <a:rPr sz="750" b="0">
+              <a:rPr sz="1700" b="0">
                 <a:solidFill>
                   <a:srgbClr val="3D3D3D"/>
                 </a:solidFill>
-                <a:latin typeface="Calibri"/>
+                <a:latin typeface="Fira Sans"/>
               </a:rPr>
               <a:t>Save/Delete/Lifecycle consistency design for Versions &amp; Variants</a:t>
             </a:r>
@@ -5823,8 +5823,8 @@
         </p:nvSpPr>
         <p:spPr>
           <a:xfrm>
-            <a:off x="9361170" y="1431036"/>
-            <a:ext cx="2736341" cy="150875"/>
+            <a:off x="9425178" y="2176272"/>
+            <a:ext cx="2644901" cy="256031"/>
           </a:xfrm>
           <a:prstGeom prst="rect">
             <a:avLst/>
@@ -5838,11 +5838,11 @@
           <a:lstStyle/>
           <a:p>
             <a:r>
-              <a:rPr sz="750" b="0">
+              <a:rPr sz="1700" b="0">
                 <a:solidFill>
                   <a:srgbClr val="3D3D3D"/>
                 </a:solidFill>
-                <a:latin typeface="Calibri"/>
+                <a:latin typeface="Fira Sans"/>
               </a:rPr>
               <a:t>Safe &amp; consistent lifecycle implementation (FE &amp; BE)</a:t>
             </a:r>
@@ -5857,8 +5857,8 @@
         </p:nvSpPr>
         <p:spPr>
           <a:xfrm>
-            <a:off x="9233154" y="1636776"/>
-            <a:ext cx="2864358" cy="173736"/>
+            <a:off x="9260586" y="2523744"/>
+            <a:ext cx="2809494" cy="274320"/>
           </a:xfrm>
           <a:prstGeom prst="rect">
             <a:avLst/>
@@ -5873,11 +5873,11 @@
           <a:p>
             <a:pPr algn="l"/>
             <a:r>
-              <a:rPr sz="850" b="1" i="0">
+              <a:rPr sz="1900" b="1" i="0">
                 <a:solidFill>
                   <a:srgbClr val="1A1A2E"/>
                 </a:solidFill>
-                <a:latin typeface="Calibri"/>
+                <a:latin typeface="Fira Sans"/>
               </a:rPr>
               <a:t>Template Creation from SDK Version</a:t>
             </a:r>
@@ -5892,8 +5892,8 @@
         </p:nvSpPr>
         <p:spPr>
           <a:xfrm>
-            <a:off x="9233154" y="1810512"/>
-            <a:ext cx="2864358" cy="146304"/>
+            <a:off x="9260586" y="2798064"/>
+            <a:ext cx="2809494" cy="237744"/>
           </a:xfrm>
           <a:prstGeom prst="rect">
             <a:avLst/>
@@ -5907,20 +5907,20 @@
           <a:lstStyle/>
           <a:p>
             <a:r>
-              <a:rPr sz="750" b="1">
+              <a:rPr sz="1700" b="1">
                 <a:solidFill>
                   <a:srgbClr val="555555"/>
                 </a:solidFill>
-                <a:latin typeface="Calibri"/>
+                <a:latin typeface="Fira Sans"/>
               </a:rPr>
               <a:t>● </a:t>
             </a:r>
             <a:r>
-              <a:rPr sz="750" b="1">
+              <a:rPr sz="1700" b="1">
                 <a:solidFill>
                   <a:srgbClr val="555555"/>
                 </a:solidFill>
-                <a:latin typeface="Calibri"/>
+                <a:latin typeface="Fira Sans"/>
               </a:rPr>
               <a:t>PLANNED</a:t>
             </a:r>
@@ -5935,8 +5935,8 @@
         </p:nvSpPr>
         <p:spPr>
           <a:xfrm>
-            <a:off x="9361170" y="1956816"/>
-            <a:ext cx="2736341" cy="150875"/>
+            <a:off x="9425178" y="3035808"/>
+            <a:ext cx="2644901" cy="402336"/>
           </a:xfrm>
           <a:prstGeom prst="rect">
             <a:avLst/>
@@ -5950,11 +5950,11 @@
           <a:lstStyle/>
           <a:p>
             <a:r>
-              <a:rPr sz="750" b="0">
+              <a:rPr sz="1700" b="0">
                 <a:solidFill>
                   <a:srgbClr val="3D3D3D"/>
                 </a:solidFill>
-                <a:latin typeface="Calibri"/>
+                <a:latin typeface="Fira Sans"/>
               </a:rPr>
               <a:t>Template creation from existing SDK Version in SDK Manager</a:t>
             </a:r>
@@ -5969,8 +5969,8 @@
         </p:nvSpPr>
         <p:spPr>
           <a:xfrm>
-            <a:off x="9233154" y="2162556"/>
-            <a:ext cx="2864358" cy="173736"/>
+            <a:off x="9260586" y="3529584"/>
+            <a:ext cx="2809494" cy="274320"/>
           </a:xfrm>
           <a:prstGeom prst="rect">
             <a:avLst/>
@@ -5985,11 +5985,11 @@
           <a:p>
             <a:pPr algn="l"/>
             <a:r>
-              <a:rPr sz="850" b="1" i="0">
+              <a:rPr sz="1900" b="1" i="0">
                 <a:solidFill>
                   <a:srgbClr val="1A1A2E"/>
                 </a:solidFill>
-                <a:latin typeface="Calibri"/>
+                <a:latin typeface="Fira Sans"/>
               </a:rPr>
               <a:t>Platform Stability &amp; Modernization</a:t>
             </a:r>
@@ -6004,8 +6004,8 @@
         </p:nvSpPr>
         <p:spPr>
           <a:xfrm>
-            <a:off x="9233154" y="2336292"/>
-            <a:ext cx="2864358" cy="146304"/>
+            <a:off x="9260586" y="3803904"/>
+            <a:ext cx="2809494" cy="237744"/>
           </a:xfrm>
           <a:prstGeom prst="rect">
             <a:avLst/>
@@ -6019,20 +6019,20 @@
           <a:lstStyle/>
           <a:p>
             <a:r>
-              <a:rPr sz="750" b="1">
+              <a:rPr sz="1700" b="1">
                 <a:solidFill>
                   <a:srgbClr val="555555"/>
                 </a:solidFill>
-                <a:latin typeface="Calibri"/>
+                <a:latin typeface="Fira Sans"/>
               </a:rPr>
               <a:t>● </a:t>
             </a:r>
             <a:r>
-              <a:rPr sz="750" b="1">
+              <a:rPr sz="1700" b="1">
                 <a:solidFill>
                   <a:srgbClr val="555555"/>
                 </a:solidFill>
-                <a:latin typeface="Calibri"/>
+                <a:latin typeface="Fira Sans"/>
               </a:rPr>
               <a:t>PLANNED</a:t>
             </a:r>
@@ -6047,8 +6047,8 @@
         </p:nvSpPr>
         <p:spPr>
           <a:xfrm>
-            <a:off x="9361170" y="2482596"/>
-            <a:ext cx="2736341" cy="150875"/>
+            <a:off x="9425178" y="4041648"/>
+            <a:ext cx="2644901" cy="256031"/>
           </a:xfrm>
           <a:prstGeom prst="rect">
             <a:avLst/>
@@ -6062,11 +6062,11 @@
           <a:lstStyle/>
           <a:p>
             <a:r>
-              <a:rPr sz="750" b="0">
+              <a:rPr sz="1700" b="0">
                 <a:solidFill>
                   <a:srgbClr val="3D3D3D"/>
                 </a:solidFill>
-                <a:latin typeface="Calibri"/>
+                <a:latin typeface="Fira Sans"/>
               </a:rPr>
               <a:t>Reusable large text content component for D&amp;D builder</a:t>
             </a:r>
@@ -6081,8 +6081,8 @@
         </p:nvSpPr>
         <p:spPr>
           <a:xfrm>
-            <a:off x="9361170" y="2615184"/>
-            <a:ext cx="2736341" cy="150875"/>
+            <a:off x="9425178" y="4261104"/>
+            <a:ext cx="2644901" cy="256031"/>
           </a:xfrm>
           <a:prstGeom prst="rect">
             <a:avLst/>
@@ -6096,11 +6096,11 @@
           <a:lstStyle/>
           <a:p>
             <a:r>
-              <a:rPr sz="750" b="0">
+              <a:rPr sz="1700" b="0">
                 <a:solidFill>
                   <a:srgbClr val="3D3D3D"/>
                 </a:solidFill>
-                <a:latin typeface="Calibri"/>
+                <a:latin typeface="Fira Sans"/>
               </a:rPr>
               <a:t>SDK Version Template listing by species &amp; tool</a:t>
             </a:r>
@@ -6134,7 +6134,7 @@
         <p:spPr>
           <a:xfrm>
             <a:off x="0" y="0"/>
-            <a:ext cx="12188952" cy="658368"/>
+            <a:ext cx="12188952" cy="749808"/>
           </a:xfrm>
           <a:prstGeom prst="rect">
             <a:avLst/>
@@ -6177,7 +6177,7 @@
         <p:spPr>
           <a:xfrm>
             <a:off x="0" y="0"/>
-            <a:ext cx="64008" cy="658368"/>
+            <a:ext cx="82296" cy="749808"/>
           </a:xfrm>
           <a:prstGeom prst="rect">
             <a:avLst/>
@@ -6219,8 +6219,8 @@
         </p:nvSpPr>
         <p:spPr>
           <a:xfrm>
-            <a:off x="164592" y="54864"/>
-            <a:ext cx="8686800" cy="274320"/>
+            <a:off x="201168" y="64008"/>
+            <a:ext cx="8686800" cy="347472"/>
           </a:xfrm>
           <a:prstGeom prst="rect">
             <a:avLst/>
@@ -6235,11 +6235,11 @@
           <a:p>
             <a:pPr algn="l"/>
             <a:r>
-              <a:rPr sz="1300" b="1" i="0">
+              <a:rPr sz="2000" b="1" i="0">
                 <a:solidFill>
                   <a:srgbClr val="FFFFFF"/>
                 </a:solidFill>
-                <a:latin typeface="Calibri"/>
+                <a:latin typeface="Fira Sans"/>
               </a:rPr>
               <a:t>Executive Summary – GD Core Team   Project Health:</a:t>
             </a:r>
@@ -6254,8 +6254,8 @@
         </p:nvSpPr>
         <p:spPr>
           <a:xfrm>
-            <a:off x="164592" y="338328"/>
-            <a:ext cx="6858000" cy="201168"/>
+            <a:off x="201168" y="420624"/>
+            <a:ext cx="7315200" cy="237744"/>
           </a:xfrm>
           <a:prstGeom prst="rect">
             <a:avLst/>
@@ -6270,11 +6270,11 @@
           <a:p>
             <a:pPr algn="l"/>
             <a:r>
-              <a:rPr sz="800" b="0" i="0">
+              <a:rPr sz="1300" b="0" i="0">
                 <a:solidFill>
                   <a:srgbClr val="BBDEFB"/>
                 </a:solidFill>
-                <a:latin typeface="Calibri"/>
+                <a:latin typeface="Fira Sans"/>
               </a:rPr>
               <a:t>Mars – Digital Health Transformation  ·  Sprint 48 · Jun 23 – Jul 6, 2026</a:t>
             </a:r>
@@ -6289,8 +6289,8 @@
         </p:nvSpPr>
         <p:spPr>
           <a:xfrm>
-            <a:off x="8961120" y="73152"/>
-            <a:ext cx="3063240" cy="201168"/>
+            <a:off x="8961120" y="91440"/>
+            <a:ext cx="3063240" cy="256032"/>
           </a:xfrm>
           <a:prstGeom prst="rect">
             <a:avLst/>
@@ -6305,11 +6305,11 @@
           <a:p>
             <a:pPr algn="r"/>
             <a:r>
-              <a:rPr sz="900" b="0" i="0">
+              <a:rPr sz="1400" b="0" i="0">
                 <a:solidFill>
                   <a:srgbClr val="FFFFFF"/>
                 </a:solidFill>
-                <a:latin typeface="Calibri"/>
+                <a:latin typeface="Fira Sans"/>
               </a:rPr>
               <a:t>www.griddynamics.com</a:t>
             </a:r>
@@ -6324,8 +6324,8 @@
         </p:nvSpPr>
         <p:spPr>
           <a:xfrm>
-            <a:off x="8961120" y="274320"/>
-            <a:ext cx="3063240" cy="201168"/>
+            <a:off x="8961120" y="365760"/>
+            <a:ext cx="3063240" cy="237744"/>
           </a:xfrm>
           <a:prstGeom prst="rect">
             <a:avLst/>
@@ -6340,11 +6340,11 @@
           <a:p>
             <a:pPr algn="r"/>
             <a:r>
-              <a:rPr sz="650" b="0" i="1">
+              <a:rPr sz="1000" b="0" i="1">
                 <a:solidFill>
                   <a:srgbClr val="BBDEFB"/>
                 </a:solidFill>
-                <a:latin typeface="Calibri"/>
+                <a:latin typeface="Fira Sans"/>
               </a:rPr>
               <a:t>trusted engineering partner for digital transformation</a:t>
             </a:r>
@@ -6359,8 +6359,8 @@
         </p:nvSpPr>
         <p:spPr>
           <a:xfrm>
-            <a:off x="11430000" y="173736"/>
-            <a:ext cx="384048" cy="274320"/>
+            <a:off x="11704320" y="201168"/>
+            <a:ext cx="365760" cy="292608"/>
           </a:xfrm>
           <a:prstGeom prst="rect">
             <a:avLst/>
@@ -6402,8 +6402,8 @@
         </p:nvSpPr>
         <p:spPr>
           <a:xfrm>
-            <a:off x="11430000" y="173736"/>
-            <a:ext cx="384048" cy="274320"/>
+            <a:off x="11704320" y="201168"/>
+            <a:ext cx="365760" cy="292608"/>
           </a:xfrm>
           <a:prstGeom prst="rect">
             <a:avLst/>
@@ -6418,11 +6418,11 @@
           <a:p>
             <a:pPr algn="ctr"/>
             <a:r>
-              <a:rPr sz="900" b="1" i="0">
+              <a:rPr sz="1400" b="1" i="0">
                 <a:solidFill>
                   <a:srgbClr val="FFFFFF"/>
                 </a:solidFill>
-                <a:latin typeface="Calibri"/>
+                <a:latin typeface="Fira Sans"/>
               </a:rPr>
               <a:t>4</a:t>
             </a:r>
@@ -6437,8 +6437,8 @@
         </p:nvSpPr>
         <p:spPr>
           <a:xfrm>
-            <a:off x="0" y="6583680"/>
-            <a:ext cx="12188952" cy="274320"/>
+            <a:off x="0" y="6537960"/>
+            <a:ext cx="12188952" cy="320040"/>
           </a:xfrm>
           <a:prstGeom prst="rect">
             <a:avLst/>
@@ -6480,8 +6480,8 @@
         </p:nvSpPr>
         <p:spPr>
           <a:xfrm>
-            <a:off x="0" y="6583680"/>
-            <a:ext cx="64008" cy="274320"/>
+            <a:off x="0" y="6537960"/>
+            <a:ext cx="82296" cy="320040"/>
           </a:xfrm>
           <a:prstGeom prst="rect">
             <a:avLst/>
@@ -6523,8 +6523,8 @@
         </p:nvSpPr>
         <p:spPr>
           <a:xfrm>
-            <a:off x="164592" y="6629400"/>
-            <a:ext cx="7772400" cy="201168"/>
+            <a:off x="201168" y="6601968"/>
+            <a:ext cx="7772400" cy="219456"/>
           </a:xfrm>
           <a:prstGeom prst="rect">
             <a:avLst/>
@@ -6539,11 +6539,11 @@
           <a:p>
             <a:pPr algn="l"/>
             <a:r>
-              <a:rPr sz="700" b="0" i="0">
+              <a:rPr sz="1100" b="0" i="0">
                 <a:solidFill>
                   <a:srgbClr val="BBDEFB"/>
                 </a:solidFill>
-                <a:latin typeface="Calibri"/>
+                <a:latin typeface="Fira Sans"/>
               </a:rPr>
               <a:t>Grid Dynamics / Mars – Digital Health Transformation / WSR – June 29, 2026</a:t>
             </a:r>
@@ -6558,8 +6558,8 @@
         </p:nvSpPr>
         <p:spPr>
           <a:xfrm>
-            <a:off x="8686800" y="6629400"/>
-            <a:ext cx="3337560" cy="201168"/>
+            <a:off x="8686800" y="6601968"/>
+            <a:ext cx="3337560" cy="219456"/>
           </a:xfrm>
           <a:prstGeom prst="rect">
             <a:avLst/>
@@ -6574,11 +6574,11 @@
           <a:p>
             <a:pPr algn="r"/>
             <a:r>
-              <a:rPr sz="700" b="0" i="0">
+              <a:rPr sz="1100" b="0" i="0">
                 <a:solidFill>
                   <a:srgbClr val="BBDEFB"/>
                 </a:solidFill>
-                <a:latin typeface="Calibri"/>
+                <a:latin typeface="Fira Sans"/>
               </a:rPr>
               <a:t>Privileged and confidential</a:t>
             </a:r>
@@ -6593,8 +6593,8 @@
         </p:nvSpPr>
         <p:spPr>
           <a:xfrm>
-            <a:off x="0" y="658368"/>
-            <a:ext cx="12188952" cy="5925312"/>
+            <a:off x="0" y="749808"/>
+            <a:ext cx="12188952" cy="5788152"/>
           </a:xfrm>
           <a:prstGeom prst="rect">
             <a:avLst/>
@@ -6636,8 +6636,8 @@
         </p:nvSpPr>
         <p:spPr>
           <a:xfrm>
-            <a:off x="91440" y="749808"/>
-            <a:ext cx="2864358" cy="22860"/>
+            <a:off x="118872" y="859536"/>
+            <a:ext cx="2809494" cy="27432"/>
           </a:xfrm>
           <a:prstGeom prst="rect">
             <a:avLst/>
@@ -6679,8 +6679,8 @@
         </p:nvSpPr>
         <p:spPr>
           <a:xfrm>
-            <a:off x="91440" y="777240"/>
-            <a:ext cx="2864358" cy="182880"/>
+            <a:off x="118872" y="896112"/>
+            <a:ext cx="2809494" cy="310896"/>
           </a:xfrm>
           <a:prstGeom prst="rect">
             <a:avLst/>
@@ -6695,11 +6695,11 @@
           <a:p>
             <a:pPr algn="l"/>
             <a:r>
-              <a:rPr sz="800" b="1" i="0">
+              <a:rPr sz="2200" b="1" i="0">
                 <a:solidFill>
                   <a:srgbClr val="1B2A4A"/>
                 </a:solidFill>
-                <a:latin typeface="Calibri"/>
+                <a:latin typeface="Fira Sans"/>
               </a:rPr>
               <a:t>FEEDBACK CAPTURE</a:t>
             </a:r>
@@ -6714,8 +6714,8 @@
         </p:nvSpPr>
         <p:spPr>
           <a:xfrm>
-            <a:off x="91440" y="960120"/>
-            <a:ext cx="2864358" cy="7315"/>
+            <a:off x="118872" y="1207008"/>
+            <a:ext cx="2809494" cy="9144"/>
           </a:xfrm>
           <a:prstGeom prst="rect">
             <a:avLst/>
@@ -6757,8 +6757,8 @@
         </p:nvSpPr>
         <p:spPr>
           <a:xfrm>
-            <a:off x="91440" y="978408"/>
-            <a:ext cx="2864358" cy="173736"/>
+            <a:off x="118872" y="1298448"/>
+            <a:ext cx="2809494" cy="274320"/>
           </a:xfrm>
           <a:prstGeom prst="rect">
             <a:avLst/>
@@ -6773,11 +6773,11 @@
           <a:p>
             <a:pPr algn="l"/>
             <a:r>
-              <a:rPr sz="850" b="1" i="0">
+              <a:rPr sz="1900" b="1" i="0">
                 <a:solidFill>
                   <a:srgbClr val="1A1A2E"/>
                 </a:solidFill>
-                <a:latin typeface="Calibri"/>
+                <a:latin typeface="Fira Sans"/>
               </a:rPr>
               <a:t>Feedback Capture – All Tools</a:t>
             </a:r>
@@ -6792,8 +6792,8 @@
         </p:nvSpPr>
         <p:spPr>
           <a:xfrm>
-            <a:off x="91440" y="1152144"/>
-            <a:ext cx="2864358" cy="146304"/>
+            <a:off x="118872" y="1572768"/>
+            <a:ext cx="2809494" cy="237744"/>
           </a:xfrm>
           <a:prstGeom prst="rect">
             <a:avLst/>
@@ -6807,20 +6807,20 @@
           <a:lstStyle/>
           <a:p>
             <a:r>
-              <a:rPr sz="750" b="1">
+              <a:rPr sz="1700" b="1">
                 <a:solidFill>
                   <a:srgbClr val="1565C0"/>
                 </a:solidFill>
-                <a:latin typeface="Calibri"/>
+                <a:latin typeface="Fira Sans"/>
               </a:rPr>
               <a:t>● </a:t>
             </a:r>
             <a:r>
-              <a:rPr sz="750" b="1">
+              <a:rPr sz="1700" b="1">
                 <a:solidFill>
                   <a:srgbClr val="1565C0"/>
                 </a:solidFill>
-                <a:latin typeface="Calibri"/>
+                <a:latin typeface="Fira Sans"/>
               </a:rPr>
               <a:t>IN PROGRESS</a:t>
             </a:r>
@@ -6835,8 +6835,8 @@
         </p:nvSpPr>
         <p:spPr>
           <a:xfrm>
-            <a:off x="219456" y="1298448"/>
-            <a:ext cx="2736341" cy="150875"/>
+            <a:off x="283464" y="1810512"/>
+            <a:ext cx="2644901" cy="256031"/>
           </a:xfrm>
           <a:prstGeom prst="rect">
             <a:avLst/>
@@ -6850,11 +6850,11 @@
           <a:lstStyle/>
           <a:p>
             <a:r>
-              <a:rPr sz="750" b="0">
+              <a:rPr sz="1700" b="0">
                 <a:solidFill>
                   <a:srgbClr val="3D3D3D"/>
                 </a:solidFill>
-                <a:latin typeface="Calibri"/>
+                <a:latin typeface="Fira Sans"/>
               </a:rPr>
               <a:t>Feedback submission API backend implementation</a:t>
             </a:r>
@@ -6869,8 +6869,8 @@
         </p:nvSpPr>
         <p:spPr>
           <a:xfrm>
-            <a:off x="91440" y="1431036"/>
-            <a:ext cx="2864358" cy="146304"/>
+            <a:off x="118872" y="2029968"/>
+            <a:ext cx="2809494" cy="237744"/>
           </a:xfrm>
           <a:prstGeom prst="rect">
             <a:avLst/>
@@ -6884,20 +6884,20 @@
           <a:lstStyle/>
           <a:p>
             <a:r>
-              <a:rPr sz="750" b="1">
+              <a:rPr sz="1700" b="1">
                 <a:solidFill>
                   <a:srgbClr val="555555"/>
                 </a:solidFill>
-                <a:latin typeface="Calibri"/>
+                <a:latin typeface="Fira Sans"/>
               </a:rPr>
               <a:t>● </a:t>
             </a:r>
             <a:r>
-              <a:rPr sz="750" b="1">
+              <a:rPr sz="1700" b="1">
                 <a:solidFill>
                   <a:srgbClr val="555555"/>
                 </a:solidFill>
-                <a:latin typeface="Calibri"/>
+                <a:latin typeface="Fira Sans"/>
               </a:rPr>
               <a:t>PLANNED</a:t>
             </a:r>
@@ -6912,8 +6912,8 @@
         </p:nvSpPr>
         <p:spPr>
           <a:xfrm>
-            <a:off x="219456" y="1577339"/>
-            <a:ext cx="2736341" cy="150875"/>
+            <a:off x="283464" y="2267712"/>
+            <a:ext cx="2644901" cy="256031"/>
           </a:xfrm>
           <a:prstGeom prst="rect">
             <a:avLst/>
@@ -6927,11 +6927,11 @@
           <a:lstStyle/>
           <a:p>
             <a:r>
-              <a:rPr sz="750" b="0">
+              <a:rPr sz="1700" b="0">
                 <a:solidFill>
                   <a:srgbClr val="3D3D3D"/>
                 </a:solidFill>
-                <a:latin typeface="Calibri"/>
+                <a:latin typeface="Fira Sans"/>
               </a:rPr>
               <a:t>Feedback Form frontend component (D&amp;D, Macro, Preview)</a:t>
             </a:r>
@@ -6946,8 +6946,8 @@
         </p:nvSpPr>
         <p:spPr>
           <a:xfrm>
-            <a:off x="219456" y="1709928"/>
-            <a:ext cx="2736341" cy="150875"/>
+            <a:off x="283464" y="2487168"/>
+            <a:ext cx="2644901" cy="256031"/>
           </a:xfrm>
           <a:prstGeom prst="rect">
             <a:avLst/>
@@ -6961,11 +6961,11 @@
           <a:lstStyle/>
           <a:p>
             <a:r>
-              <a:rPr sz="750" b="0">
+              <a:rPr sz="1700" b="0">
                 <a:solidFill>
                   <a:srgbClr val="3D3D3D"/>
                 </a:solidFill>
-                <a:latin typeface="Calibri"/>
+                <a:latin typeface="Fira Sans"/>
               </a:rPr>
               <a:t>Feedback Form API integration in SDK</a:t>
             </a:r>
@@ -6980,8 +6980,8 @@
         </p:nvSpPr>
         <p:spPr>
           <a:xfrm>
-            <a:off x="219456" y="1842515"/>
-            <a:ext cx="2736341" cy="150875"/>
+            <a:off x="283464" y="2706624"/>
+            <a:ext cx="2644901" cy="256031"/>
           </a:xfrm>
           <a:prstGeom prst="rect">
             <a:avLst/>
@@ -6995,11 +6995,11 @@
           <a:lstStyle/>
           <a:p>
             <a:r>
-              <a:rPr sz="750" b="0">
+              <a:rPr sz="1700" b="0">
                 <a:solidFill>
                   <a:srgbClr val="3D3D3D"/>
                 </a:solidFill>
-                <a:latin typeface="Calibri"/>
+                <a:latin typeface="Fira Sans"/>
               </a:rPr>
               <a:t>Feedback analytics integration</a:t>
             </a:r>
@@ -7014,8 +7014,8 @@
         </p:nvSpPr>
         <p:spPr>
           <a:xfrm>
-            <a:off x="219456" y="1975103"/>
-            <a:ext cx="2736341" cy="150875"/>
+            <a:off x="283464" y="2926080"/>
+            <a:ext cx="2644901" cy="256031"/>
           </a:xfrm>
           <a:prstGeom prst="rect">
             <a:avLst/>
@@ -7029,11 +7029,11 @@
           <a:lstStyle/>
           <a:p>
             <a:r>
-              <a:rPr sz="750" b="0">
+              <a:rPr sz="1700" b="0">
                 <a:solidFill>
                   <a:srgbClr val="3D3D3D"/>
                 </a:solidFill>
-                <a:latin typeface="Calibri"/>
+                <a:latin typeface="Fira Sans"/>
               </a:rPr>
               <a:t>Feedback form frequency &amp; TTL settings in SDK Manager</a:t>
             </a:r>
@@ -7048,8 +7048,8 @@
         </p:nvSpPr>
         <p:spPr>
           <a:xfrm>
-            <a:off x="3047238" y="658368"/>
-            <a:ext cx="10972" cy="5925312"/>
+            <a:off x="3047238" y="749808"/>
+            <a:ext cx="10972" cy="5788152"/>
           </a:xfrm>
           <a:prstGeom prst="rect">
             <a:avLst/>
@@ -7091,8 +7091,8 @@
         </p:nvSpPr>
         <p:spPr>
           <a:xfrm>
-            <a:off x="3138678" y="749808"/>
-            <a:ext cx="2864358" cy="22860"/>
+            <a:off x="3166110" y="859536"/>
+            <a:ext cx="2809494" cy="27432"/>
           </a:xfrm>
           <a:prstGeom prst="rect">
             <a:avLst/>
@@ -7134,8 +7134,8 @@
         </p:nvSpPr>
         <p:spPr>
           <a:xfrm>
-            <a:off x="3138678" y="777240"/>
-            <a:ext cx="2864358" cy="182880"/>
+            <a:off x="3166110" y="896112"/>
+            <a:ext cx="2809494" cy="310896"/>
           </a:xfrm>
           <a:prstGeom prst="rect">
             <a:avLst/>
@@ -7150,11 +7150,11 @@
           <a:p>
             <a:pPr algn="l"/>
             <a:r>
-              <a:rPr sz="800" b="1" i="0">
+              <a:rPr sz="2200" b="1" i="0">
                 <a:solidFill>
                   <a:srgbClr val="1B2A4A"/>
                 </a:solidFill>
-                <a:latin typeface="Calibri"/>
+                <a:latin typeface="Fira Sans"/>
               </a:rPr>
               <a:t>BACKEND – INFRA &amp; MIGRATION</a:t>
             </a:r>
@@ -7169,8 +7169,8 @@
         </p:nvSpPr>
         <p:spPr>
           <a:xfrm>
-            <a:off x="3138678" y="960120"/>
-            <a:ext cx="2864358" cy="7315"/>
+            <a:off x="3166110" y="1207008"/>
+            <a:ext cx="2809494" cy="9144"/>
           </a:xfrm>
           <a:prstGeom prst="rect">
             <a:avLst/>
@@ -7212,8 +7212,8 @@
         </p:nvSpPr>
         <p:spPr>
           <a:xfrm>
-            <a:off x="3138678" y="978408"/>
-            <a:ext cx="2864358" cy="173736"/>
+            <a:off x="3166110" y="1298448"/>
+            <a:ext cx="2809494" cy="274320"/>
           </a:xfrm>
           <a:prstGeom prst="rect">
             <a:avLst/>
@@ -7228,11 +7228,11 @@
           <a:p>
             <a:pPr algn="l"/>
             <a:r>
-              <a:rPr sz="850" b="1" i="0">
+              <a:rPr sz="1900" b="1" i="0">
                 <a:solidFill>
                   <a:srgbClr val="1A1A2E"/>
                 </a:solidFill>
-                <a:latin typeface="Calibri"/>
+                <a:latin typeface="Fira Sans"/>
               </a:rPr>
               <a:t>Monorepo Migration – Backend Services</a:t>
             </a:r>
@@ -7247,8 +7247,8 @@
         </p:nvSpPr>
         <p:spPr>
           <a:xfrm>
-            <a:off x="3138678" y="1152144"/>
-            <a:ext cx="2864358" cy="146304"/>
+            <a:off x="3166110" y="1572768"/>
+            <a:ext cx="2809494" cy="237744"/>
           </a:xfrm>
           <a:prstGeom prst="rect">
             <a:avLst/>
@@ -7262,20 +7262,20 @@
           <a:lstStyle/>
           <a:p>
             <a:r>
-              <a:rPr sz="750" b="1">
+              <a:rPr sz="1700" b="1">
                 <a:solidFill>
                   <a:srgbClr val="555555"/>
                 </a:solidFill>
-                <a:latin typeface="Calibri"/>
+                <a:latin typeface="Fira Sans"/>
               </a:rPr>
               <a:t>● </a:t>
             </a:r>
             <a:r>
-              <a:rPr sz="750" b="1">
+              <a:rPr sz="1700" b="1">
                 <a:solidFill>
                   <a:srgbClr val="555555"/>
                 </a:solidFill>
-                <a:latin typeface="Calibri"/>
+                <a:latin typeface="Fira Sans"/>
               </a:rPr>
               <a:t>PLANNED</a:t>
             </a:r>
@@ -7290,8 +7290,8 @@
         </p:nvSpPr>
         <p:spPr>
           <a:xfrm>
-            <a:off x="3266694" y="1298448"/>
-            <a:ext cx="2736341" cy="150875"/>
+            <a:off x="3330702" y="1810512"/>
+            <a:ext cx="2644901" cy="256031"/>
           </a:xfrm>
           <a:prstGeom prst="rect">
             <a:avLst/>
@@ -7305,11 +7305,11 @@
           <a:lstStyle/>
           <a:p>
             <a:r>
-              <a:rPr sz="750" b="0">
+              <a:rPr sz="1700" b="0">
                 <a:solidFill>
                   <a:srgbClr val="3D3D3D"/>
                 </a:solidFill>
-                <a:latin typeface="Calibri"/>
+                <a:latin typeface="Fira Sans"/>
               </a:rPr>
               <a:t>Config-driven backend URL resolution (Check &amp; Care SDK)</a:t>
             </a:r>
@@ -7324,8 +7324,8 @@
         </p:nvSpPr>
         <p:spPr>
           <a:xfrm>
-            <a:off x="3266694" y="1431036"/>
-            <a:ext cx="2736341" cy="150875"/>
+            <a:off x="3330702" y="2029968"/>
+            <a:ext cx="2644901" cy="256031"/>
           </a:xfrm>
           <a:prstGeom prst="rect">
             <a:avLst/>
@@ -7339,11 +7339,11 @@
           <a:lstStyle/>
           <a:p>
             <a:r>
-              <a:rPr sz="750" b="0">
+              <a:rPr sz="1700" b="0">
                 <a:solidFill>
                   <a:srgbClr val="3D3D3D"/>
                 </a:solidFill>
-                <a:latin typeface="Calibri"/>
+                <a:latin typeface="Fira Sans"/>
               </a:rPr>
               <a:t>Datadog monitoring migration &amp; shared library alignment</a:t>
             </a:r>
@@ -7358,8 +7358,8 @@
         </p:nvSpPr>
         <p:spPr>
           <a:xfrm>
-            <a:off x="3138678" y="1636776"/>
-            <a:ext cx="2864358" cy="173736"/>
+            <a:off x="3166110" y="2377440"/>
+            <a:ext cx="2809494" cy="274320"/>
           </a:xfrm>
           <a:prstGeom prst="rect">
             <a:avLst/>
@@ -7374,11 +7374,11 @@
           <a:p>
             <a:pPr algn="l"/>
             <a:r>
-              <a:rPr sz="850" b="1" i="0">
+              <a:rPr sz="1900" b="1" i="0">
                 <a:solidFill>
                   <a:srgbClr val="1A1A2E"/>
                 </a:solidFill>
-                <a:latin typeface="Calibri"/>
+                <a:latin typeface="Fira Sans"/>
               </a:rPr>
               <a:t>Production Monitoring</a:t>
             </a:r>
@@ -7393,8 +7393,8 @@
         </p:nvSpPr>
         <p:spPr>
           <a:xfrm>
-            <a:off x="3138678" y="1810512"/>
-            <a:ext cx="2864358" cy="146304"/>
+            <a:off x="3166110" y="2651760"/>
+            <a:ext cx="2809494" cy="237744"/>
           </a:xfrm>
           <a:prstGeom prst="rect">
             <a:avLst/>
@@ -7408,20 +7408,20 @@
           <a:lstStyle/>
           <a:p>
             <a:r>
-              <a:rPr sz="750" b="1">
+              <a:rPr sz="1700" b="1">
                 <a:solidFill>
                   <a:srgbClr val="1565C0"/>
                 </a:solidFill>
-                <a:latin typeface="Calibri"/>
+                <a:latin typeface="Fira Sans"/>
               </a:rPr>
               <a:t>● </a:t>
             </a:r>
             <a:r>
-              <a:rPr sz="750" b="1">
+              <a:rPr sz="1700" b="1">
                 <a:solidFill>
                   <a:srgbClr val="1565C0"/>
                 </a:solidFill>
-                <a:latin typeface="Calibri"/>
+                <a:latin typeface="Fira Sans"/>
               </a:rPr>
               <a:t>IN PROGRESS</a:t>
             </a:r>
@@ -7436,8 +7436,8 @@
         </p:nvSpPr>
         <p:spPr>
           <a:xfrm>
-            <a:off x="3266694" y="1956816"/>
-            <a:ext cx="2736341" cy="150875"/>
+            <a:off x="3330702" y="2889504"/>
+            <a:ext cx="2644901" cy="256031"/>
           </a:xfrm>
           <a:prstGeom prst="rect">
             <a:avLst/>
@@ -7451,11 +7451,11 @@
           <a:lstStyle/>
           <a:p>
             <a:r>
-              <a:rPr sz="750" b="0">
+              <a:rPr sz="1700" b="0">
                 <a:solidFill>
                   <a:srgbClr val="3D3D3D"/>
                 </a:solidFill>
-                <a:latin typeface="Calibri"/>
+                <a:latin typeface="Fira Sans"/>
               </a:rPr>
               <a:t>Sprint 48 production log monitoring &amp; alerting</a:t>
             </a:r>
@@ -7470,8 +7470,8 @@
         </p:nvSpPr>
         <p:spPr>
           <a:xfrm>
-            <a:off x="6094476" y="658368"/>
-            <a:ext cx="10972" cy="5925312"/>
+            <a:off x="6094476" y="749808"/>
+            <a:ext cx="10972" cy="5788152"/>
           </a:xfrm>
           <a:prstGeom prst="rect">
             <a:avLst/>
@@ -7513,8 +7513,8 @@
         </p:nvSpPr>
         <p:spPr>
           <a:xfrm>
-            <a:off x="6185916" y="749808"/>
-            <a:ext cx="2864358" cy="22860"/>
+            <a:off x="6213348" y="859536"/>
+            <a:ext cx="2809494" cy="27432"/>
           </a:xfrm>
           <a:prstGeom prst="rect">
             <a:avLst/>
@@ -7556,8 +7556,8 @@
         </p:nvSpPr>
         <p:spPr>
           <a:xfrm>
-            <a:off x="6185916" y="777240"/>
-            <a:ext cx="2864358" cy="182880"/>
+            <a:off x="6213348" y="896112"/>
+            <a:ext cx="2809494" cy="310896"/>
           </a:xfrm>
           <a:prstGeom prst="rect">
             <a:avLst/>
@@ -7572,11 +7572,11 @@
           <a:p>
             <a:pPr algn="l"/>
             <a:r>
-              <a:rPr sz="800" b="1" i="0">
+              <a:rPr sz="2200" b="1" i="0">
                 <a:solidFill>
                   <a:srgbClr val="1B2A4A"/>
                 </a:solidFill>
-                <a:latin typeface="Calibri"/>
+                <a:latin typeface="Fira Sans"/>
               </a:rPr>
               <a:t>DEVOPS &amp; SDK MANAGER</a:t>
             </a:r>
@@ -7591,8 +7591,8 @@
         </p:nvSpPr>
         <p:spPr>
           <a:xfrm>
-            <a:off x="6185916" y="960120"/>
-            <a:ext cx="2864358" cy="7315"/>
+            <a:off x="6213348" y="1207008"/>
+            <a:ext cx="2809494" cy="9144"/>
           </a:xfrm>
           <a:prstGeom prst="rect">
             <a:avLst/>
@@ -7634,8 +7634,8 @@
         </p:nvSpPr>
         <p:spPr>
           <a:xfrm>
-            <a:off x="6185916" y="978408"/>
-            <a:ext cx="2864358" cy="173736"/>
+            <a:off x="6213348" y="1298448"/>
+            <a:ext cx="2809494" cy="274320"/>
           </a:xfrm>
           <a:prstGeom prst="rect">
             <a:avLst/>
@@ -7650,11 +7650,11 @@
           <a:p>
             <a:pPr algn="l"/>
             <a:r>
-              <a:rPr sz="850" b="1" i="0">
+              <a:rPr sz="1900" b="1" i="0">
                 <a:solidFill>
                   <a:srgbClr val="1A1A2E"/>
                 </a:solidFill>
-                <a:latin typeface="Calibri"/>
+                <a:latin typeface="Fira Sans"/>
               </a:rPr>
               <a:t>DevOps – Apply DevOps Practices</a:t>
             </a:r>
@@ -7669,8 +7669,8 @@
         </p:nvSpPr>
         <p:spPr>
           <a:xfrm>
-            <a:off x="6185916" y="1152144"/>
-            <a:ext cx="2864358" cy="146304"/>
+            <a:off x="6213348" y="1572768"/>
+            <a:ext cx="2809494" cy="237744"/>
           </a:xfrm>
           <a:prstGeom prst="rect">
             <a:avLst/>
@@ -7684,20 +7684,20 @@
           <a:lstStyle/>
           <a:p>
             <a:r>
-              <a:rPr sz="750" b="1">
+              <a:rPr sz="1700" b="1">
                 <a:solidFill>
                   <a:srgbClr val="1565C0"/>
                 </a:solidFill>
-                <a:latin typeface="Calibri"/>
+                <a:latin typeface="Fira Sans"/>
               </a:rPr>
               <a:t>● </a:t>
             </a:r>
             <a:r>
-              <a:rPr sz="750" b="1">
+              <a:rPr sz="1700" b="1">
                 <a:solidFill>
                   <a:srgbClr val="1565C0"/>
                 </a:solidFill>
-                <a:latin typeface="Calibri"/>
+                <a:latin typeface="Fira Sans"/>
               </a:rPr>
               <a:t>IN PROGRESS</a:t>
             </a:r>
@@ -7712,8 +7712,8 @@
         </p:nvSpPr>
         <p:spPr>
           <a:xfrm>
-            <a:off x="6313931" y="1298448"/>
-            <a:ext cx="2736341" cy="150875"/>
+            <a:off x="6377940" y="1810512"/>
+            <a:ext cx="2644901" cy="256031"/>
           </a:xfrm>
           <a:prstGeom prst="rect">
             <a:avLst/>
@@ -7727,11 +7727,11 @@
           <a:lstStyle/>
           <a:p>
             <a:r>
-              <a:rPr sz="750" b="0">
+              <a:rPr sz="1700" b="0">
                 <a:solidFill>
                   <a:srgbClr val="3D3D3D"/>
                 </a:solidFill>
-                <a:latin typeface="Calibri"/>
+                <a:latin typeface="Fira Sans"/>
               </a:rPr>
               <a:t>Sprint 48 CI/CD workflow maintenance &amp; fixes</a:t>
             </a:r>
@@ -7746,8 +7746,8 @@
         </p:nvSpPr>
         <p:spPr>
           <a:xfrm>
-            <a:off x="6313931" y="1431036"/>
-            <a:ext cx="2736341" cy="150875"/>
+            <a:off x="6377940" y="2029968"/>
+            <a:ext cx="2644901" cy="256031"/>
           </a:xfrm>
           <a:prstGeom prst="rect">
             <a:avLst/>
@@ -7761,11 +7761,11 @@
           <a:lstStyle/>
           <a:p>
             <a:r>
-              <a:rPr sz="750" b="0">
+              <a:rPr sz="1700" b="0">
                 <a:solidFill>
                   <a:srgbClr val="3D3D3D"/>
                 </a:solidFill>
-                <a:latin typeface="Calibri"/>
+                <a:latin typeface="Fira Sans"/>
               </a:rPr>
               <a:t>Azure infrastructure provisioning automation discovery</a:t>
             </a:r>
@@ -7780,8 +7780,8 @@
         </p:nvSpPr>
         <p:spPr>
           <a:xfrm>
-            <a:off x="6185916" y="1636776"/>
-            <a:ext cx="2864358" cy="173736"/>
+            <a:off x="6213348" y="2377440"/>
+            <a:ext cx="2809494" cy="274320"/>
           </a:xfrm>
           <a:prstGeom prst="rect">
             <a:avLst/>
@@ -7796,11 +7796,11 @@
           <a:p>
             <a:pPr algn="l"/>
             <a:r>
-              <a:rPr sz="850" b="1" i="0">
+              <a:rPr sz="1900" b="1" i="0">
                 <a:solidFill>
                   <a:srgbClr val="1A1A2E"/>
                 </a:solidFill>
-                <a:latin typeface="Calibri"/>
+                <a:latin typeface="Fira Sans"/>
               </a:rPr>
               <a:t>SDK Manager – Misc Enhancements</a:t>
             </a:r>
@@ -7815,8 +7815,8 @@
         </p:nvSpPr>
         <p:spPr>
           <a:xfrm>
-            <a:off x="6185916" y="1810512"/>
-            <a:ext cx="2864358" cy="146304"/>
+            <a:off x="6213348" y="2651760"/>
+            <a:ext cx="2809494" cy="237744"/>
           </a:xfrm>
           <a:prstGeom prst="rect">
             <a:avLst/>
@@ -7830,20 +7830,20 @@
           <a:lstStyle/>
           <a:p>
             <a:r>
-              <a:rPr sz="750" b="1">
+              <a:rPr sz="1700" b="1">
                 <a:solidFill>
                   <a:srgbClr val="2E7D32"/>
                 </a:solidFill>
-                <a:latin typeface="Calibri"/>
+                <a:latin typeface="Fira Sans"/>
               </a:rPr>
               <a:t>● </a:t>
             </a:r>
             <a:r>
-              <a:rPr sz="750" b="1">
+              <a:rPr sz="1700" b="1">
                 <a:solidFill>
                   <a:srgbClr val="2E7D32"/>
                 </a:solidFill>
-                <a:latin typeface="Calibri"/>
+                <a:latin typeface="Fira Sans"/>
               </a:rPr>
               <a:t>COMPLETED</a:t>
             </a:r>
@@ -7858,8 +7858,8 @@
         </p:nvSpPr>
         <p:spPr>
           <a:xfrm>
-            <a:off x="6313931" y="1956816"/>
-            <a:ext cx="2736341" cy="150875"/>
+            <a:off x="6377940" y="2889504"/>
+            <a:ext cx="2644901" cy="256031"/>
           </a:xfrm>
           <a:prstGeom prst="rect">
             <a:avLst/>
@@ -7873,11 +7873,11 @@
           <a:lstStyle/>
           <a:p>
             <a:r>
-              <a:rPr sz="750" b="0">
+              <a:rPr sz="1700" b="0">
                 <a:solidFill>
                   <a:srgbClr val="3D3D3D"/>
                 </a:solidFill>
-                <a:latin typeface="Calibri"/>
+                <a:latin typeface="Fira Sans"/>
               </a:rPr>
               <a:t>Variant Configurations view (backend) delivered</a:t>
             </a:r>
@@ -7892,8 +7892,8 @@
         </p:nvSpPr>
         <p:spPr>
           <a:xfrm>
-            <a:off x="6185916" y="2089404"/>
-            <a:ext cx="2864358" cy="146304"/>
+            <a:off x="6213348" y="3108960"/>
+            <a:ext cx="2809494" cy="237744"/>
           </a:xfrm>
           <a:prstGeom prst="rect">
             <a:avLst/>
@@ -7907,20 +7907,20 @@
           <a:lstStyle/>
           <a:p>
             <a:r>
-              <a:rPr sz="750" b="1">
+              <a:rPr sz="1700" b="1">
                 <a:solidFill>
                   <a:srgbClr val="1565C0"/>
                 </a:solidFill>
-                <a:latin typeface="Calibri"/>
+                <a:latin typeface="Fira Sans"/>
               </a:rPr>
               <a:t>● </a:t>
             </a:r>
             <a:r>
-              <a:rPr sz="750" b="1">
+              <a:rPr sz="1700" b="1">
                 <a:solidFill>
                   <a:srgbClr val="1565C0"/>
                 </a:solidFill>
-                <a:latin typeface="Calibri"/>
+                <a:latin typeface="Fira Sans"/>
               </a:rPr>
               <a:t>IN PROGRESS</a:t>
             </a:r>
@@ -7935,8 +7935,8 @@
         </p:nvSpPr>
         <p:spPr>
           <a:xfrm>
-            <a:off x="6313931" y="2235708"/>
-            <a:ext cx="2736341" cy="150875"/>
+            <a:off x="6377940" y="3346704"/>
+            <a:ext cx="2644901" cy="402336"/>
           </a:xfrm>
           <a:prstGeom prst="rect">
             <a:avLst/>
@@ -7950,11 +7950,11 @@
           <a:lstStyle/>
           <a:p>
             <a:r>
-              <a:rPr sz="750" b="0">
+              <a:rPr sz="1700" b="0">
                 <a:solidFill>
                   <a:srgbClr val="3D3D3D"/>
                 </a:solidFill>
-                <a:latin typeface="Calibri"/>
+                <a:latin typeface="Fira Sans"/>
               </a:rPr>
               <a:t>Environment banner in SDK Manager header (Dev/Stage/PreProd/Prod)</a:t>
             </a:r>
@@ -7969,8 +7969,8 @@
         </p:nvSpPr>
         <p:spPr>
           <a:xfrm>
-            <a:off x="6313931" y="2368296"/>
-            <a:ext cx="2736341" cy="150875"/>
+            <a:off x="6377940" y="3712464"/>
+            <a:ext cx="2644901" cy="256031"/>
           </a:xfrm>
           <a:prstGeom prst="rect">
             <a:avLst/>
@@ -7984,11 +7984,11 @@
           <a:lstStyle/>
           <a:p>
             <a:r>
-              <a:rPr sz="750" b="0">
+              <a:rPr sz="1700" b="0">
                 <a:solidFill>
                   <a:srgbClr val="3D3D3D"/>
                 </a:solidFill>
-                <a:latin typeface="Calibri"/>
+                <a:latin typeface="Fira Sans"/>
               </a:rPr>
               <a:t>Bundle validation alert when deleting assigned bundles</a:t>
             </a:r>
@@ -8003,8 +8003,8 @@
         </p:nvSpPr>
         <p:spPr>
           <a:xfrm>
-            <a:off x="6313931" y="2500884"/>
-            <a:ext cx="2736341" cy="150875"/>
+            <a:off x="6377940" y="3931920"/>
+            <a:ext cx="2644901" cy="256031"/>
           </a:xfrm>
           <a:prstGeom prst="rect">
             <a:avLst/>
@@ -8018,11 +8018,11 @@
           <a:lstStyle/>
           <a:p>
             <a:r>
-              <a:rPr sz="750" b="0">
+              <a:rPr sz="1700" b="0">
                 <a:solidFill>
                   <a:srgbClr val="3D3D3D"/>
                 </a:solidFill>
-                <a:latin typeface="Calibri"/>
+                <a:latin typeface="Fira Sans"/>
               </a:rPr>
               <a:t>Calendar UI fix for Anicura SDK date entry</a:t>
             </a:r>
@@ -8037,8 +8037,8 @@
         </p:nvSpPr>
         <p:spPr>
           <a:xfrm>
-            <a:off x="6313931" y="2633472"/>
-            <a:ext cx="2736341" cy="150875"/>
+            <a:off x="6377940" y="4151376"/>
+            <a:ext cx="2644901" cy="256031"/>
           </a:xfrm>
           <a:prstGeom prst="rect">
             <a:avLst/>
@@ -8052,11 +8052,11 @@
           <a:lstStyle/>
           <a:p>
             <a:r>
-              <a:rPr sz="750" b="0">
+              <a:rPr sz="1700" b="0">
                 <a:solidFill>
                   <a:srgbClr val="3D3D3D"/>
                 </a:solidFill>
-                <a:latin typeface="Calibri"/>
+                <a:latin typeface="Fira Sans"/>
               </a:rPr>
               <a:t>Bundle Draft status display correction</a:t>
             </a:r>
@@ -8071,8 +8071,8 @@
         </p:nvSpPr>
         <p:spPr>
           <a:xfrm>
-            <a:off x="9141714" y="658368"/>
-            <a:ext cx="10972" cy="5925312"/>
+            <a:off x="9141714" y="749808"/>
+            <a:ext cx="10972" cy="5788152"/>
           </a:xfrm>
           <a:prstGeom prst="rect">
             <a:avLst/>
@@ -8114,8 +8114,8 @@
         </p:nvSpPr>
         <p:spPr>
           <a:xfrm>
-            <a:off x="9233154" y="749808"/>
-            <a:ext cx="2864358" cy="22860"/>
+            <a:off x="9260586" y="859536"/>
+            <a:ext cx="2809494" cy="27432"/>
           </a:xfrm>
           <a:prstGeom prst="rect">
             <a:avLst/>
@@ -8157,8 +8157,8 @@
         </p:nvSpPr>
         <p:spPr>
           <a:xfrm>
-            <a:off x="9233154" y="777240"/>
-            <a:ext cx="2864358" cy="182880"/>
+            <a:off x="9260586" y="896112"/>
+            <a:ext cx="2809494" cy="310896"/>
           </a:xfrm>
           <a:prstGeom prst="rect">
             <a:avLst/>
@@ -8173,11 +8173,11 @@
           <a:p>
             <a:pPr algn="l"/>
             <a:r>
-              <a:rPr sz="800" b="1" i="0">
+              <a:rPr sz="2200" b="1" i="0">
                 <a:solidFill>
                   <a:srgbClr val="1B2A4A"/>
                 </a:solidFill>
-                <a:latin typeface="Calibri"/>
+                <a:latin typeface="Fira Sans"/>
               </a:rPr>
               <a:t>QA &amp; CROSS-CUTTING</a:t>
             </a:r>
@@ -8192,8 +8192,8 @@
         </p:nvSpPr>
         <p:spPr>
           <a:xfrm>
-            <a:off x="9233154" y="960120"/>
-            <a:ext cx="2864358" cy="7315"/>
+            <a:off x="9260586" y="1207008"/>
+            <a:ext cx="2809494" cy="9144"/>
           </a:xfrm>
           <a:prstGeom prst="rect">
             <a:avLst/>
@@ -8235,8 +8235,8 @@
         </p:nvSpPr>
         <p:spPr>
           <a:xfrm>
-            <a:off x="9233154" y="978408"/>
-            <a:ext cx="2864358" cy="173736"/>
+            <a:off x="9260586" y="1298448"/>
+            <a:ext cx="2809494" cy="274320"/>
           </a:xfrm>
           <a:prstGeom prst="rect">
             <a:avLst/>
@@ -8251,11 +8251,11 @@
           <a:p>
             <a:pPr algn="l"/>
             <a:r>
-              <a:rPr sz="850" b="1" i="0">
+              <a:rPr sz="1900" b="1" i="0">
                 <a:solidFill>
                   <a:srgbClr val="1A1A2E"/>
                 </a:solidFill>
-                <a:latin typeface="Calibri"/>
+                <a:latin typeface="Fira Sans"/>
               </a:rPr>
               <a:t>QA Activities – Sprint 48</a:t>
             </a:r>
@@ -8270,8 +8270,8 @@
         </p:nvSpPr>
         <p:spPr>
           <a:xfrm>
-            <a:off x="9233154" y="1152144"/>
-            <a:ext cx="2864358" cy="146304"/>
+            <a:off x="9260586" y="1572768"/>
+            <a:ext cx="2809494" cy="237744"/>
           </a:xfrm>
           <a:prstGeom prst="rect">
             <a:avLst/>
@@ -8285,20 +8285,20 @@
           <a:lstStyle/>
           <a:p>
             <a:r>
-              <a:rPr sz="750" b="1">
+              <a:rPr sz="1700" b="1">
                 <a:solidFill>
                   <a:srgbClr val="1565C0"/>
                 </a:solidFill>
-                <a:latin typeface="Calibri"/>
+                <a:latin typeface="Fira Sans"/>
               </a:rPr>
               <a:t>● </a:t>
             </a:r>
             <a:r>
-              <a:rPr sz="750" b="1">
+              <a:rPr sz="1700" b="1">
                 <a:solidFill>
                   <a:srgbClr val="1565C0"/>
                 </a:solidFill>
-                <a:latin typeface="Calibri"/>
+                <a:latin typeface="Fira Sans"/>
               </a:rPr>
               <a:t>IN PROGRESS</a:t>
             </a:r>
@@ -8313,8 +8313,8 @@
         </p:nvSpPr>
         <p:spPr>
           <a:xfrm>
-            <a:off x="9361170" y="1298448"/>
-            <a:ext cx="2736341" cy="150875"/>
+            <a:off x="9425178" y="1810512"/>
+            <a:ext cx="2644901" cy="256031"/>
           </a:xfrm>
           <a:prstGeom prst="rect">
             <a:avLst/>
@@ -8328,11 +8328,11 @@
           <a:lstStyle/>
           <a:p>
             <a:r>
-              <a:rPr sz="750" b="0">
+              <a:rPr sz="1700" b="0">
                 <a:solidFill>
                   <a:srgbClr val="3D3D3D"/>
                 </a:solidFill>
-                <a:latin typeface="Calibri"/>
+                <a:latin typeface="Fira Sans"/>
               </a:rPr>
               <a:t>Integration testing for ToothScan 2.0</a:t>
             </a:r>
@@ -8347,8 +8347,8 @@
         </p:nvSpPr>
         <p:spPr>
           <a:xfrm>
-            <a:off x="9361170" y="1431036"/>
-            <a:ext cx="2736341" cy="150875"/>
+            <a:off x="9425178" y="2029968"/>
+            <a:ext cx="2644901" cy="256031"/>
           </a:xfrm>
           <a:prstGeom prst="rect">
             <a:avLst/>
@@ -8362,11 +8362,11 @@
           <a:lstStyle/>
           <a:p>
             <a:r>
-              <a:rPr sz="750" b="0">
+              <a:rPr sz="1700" b="0">
                 <a:solidFill>
                   <a:srgbClr val="3D3D3D"/>
                 </a:solidFill>
-                <a:latin typeface="Calibri"/>
+                <a:latin typeface="Fira Sans"/>
               </a:rPr>
               <a:t>GA tag verification for ToothScan 2.0 user journey</a:t>
             </a:r>
@@ -8381,8 +8381,8 @@
         </p:nvSpPr>
         <p:spPr>
           <a:xfrm>
-            <a:off x="9361170" y="1563624"/>
-            <a:ext cx="2736341" cy="150875"/>
+            <a:off x="9425178" y="2249424"/>
+            <a:ext cx="2644901" cy="256031"/>
           </a:xfrm>
           <a:prstGeom prst="rect">
             <a:avLst/>
@@ -8396,11 +8396,11 @@
           <a:lstStyle/>
           <a:p>
             <a:r>
-              <a:rPr sz="750" b="0">
+              <a:rPr sz="1700" b="0">
                 <a:solidFill>
                   <a:srgbClr val="3D3D3D"/>
                 </a:solidFill>
-                <a:latin typeface="Calibri"/>
+                <a:latin typeface="Fira Sans"/>
               </a:rPr>
               <a:t>Image upload scenario verification for ToothScan</a:t>
             </a:r>
@@ -8415,8 +8415,8 @@
         </p:nvSpPr>
         <p:spPr>
           <a:xfrm>
-            <a:off x="9233154" y="1769364"/>
-            <a:ext cx="2864358" cy="173736"/>
+            <a:off x="9260586" y="2596896"/>
+            <a:ext cx="2809494" cy="274320"/>
           </a:xfrm>
           <a:prstGeom prst="rect">
             <a:avLst/>
@@ -8431,11 +8431,11 @@
           <a:p>
             <a:pPr algn="l"/>
             <a:r>
-              <a:rPr sz="850" b="1" i="0">
+              <a:rPr sz="1900" b="1" i="0">
                 <a:solidFill>
                   <a:srgbClr val="1A1A2E"/>
                 </a:solidFill>
-                <a:latin typeface="Calibri"/>
+                <a:latin typeface="Fira Sans"/>
               </a:rPr>
               <a:t>Config ID – SDK App Context</a:t>
             </a:r>
@@ -8450,8 +8450,8 @@
         </p:nvSpPr>
         <p:spPr>
           <a:xfrm>
-            <a:off x="9233154" y="1943100"/>
-            <a:ext cx="2864358" cy="146304"/>
+            <a:off x="9260586" y="2871216"/>
+            <a:ext cx="2809494" cy="237744"/>
           </a:xfrm>
           <a:prstGeom prst="rect">
             <a:avLst/>
@@ -8465,20 +8465,20 @@
           <a:lstStyle/>
           <a:p>
             <a:r>
-              <a:rPr sz="750" b="1">
+              <a:rPr sz="1700" b="1">
                 <a:solidFill>
                   <a:srgbClr val="1565C0"/>
                 </a:solidFill>
-                <a:latin typeface="Calibri"/>
+                <a:latin typeface="Fira Sans"/>
               </a:rPr>
               <a:t>● </a:t>
             </a:r>
             <a:r>
-              <a:rPr sz="750" b="1">
+              <a:rPr sz="1700" b="1">
                 <a:solidFill>
                   <a:srgbClr val="1565C0"/>
                 </a:solidFill>
-                <a:latin typeface="Calibri"/>
+                <a:latin typeface="Fira Sans"/>
               </a:rPr>
               <a:t>IN PROGRESS</a:t>
             </a:r>
@@ -8493,8 +8493,8 @@
         </p:nvSpPr>
         <p:spPr>
           <a:xfrm>
-            <a:off x="9361170" y="2089404"/>
-            <a:ext cx="2736341" cy="150875"/>
+            <a:off x="9425178" y="3108960"/>
+            <a:ext cx="2644901" cy="402336"/>
           </a:xfrm>
           <a:prstGeom prst="rect">
             <a:avLst/>
@@ -8508,11 +8508,11 @@
           <a:lstStyle/>
           <a:p>
             <a:r>
-              <a:rPr sz="750" b="0">
+              <a:rPr sz="1700" b="0">
                 <a:solidFill>
                   <a:srgbClr val="3D3D3D"/>
                 </a:solidFill>
-                <a:latin typeface="Calibri"/>
+                <a:latin typeface="Fira Sans"/>
               </a:rPr>
               <a:t>Config ID integration in SDK app context across API requests</a:t>
             </a:r>
@@ -8527,8 +8527,8 @@
         </p:nvSpPr>
         <p:spPr>
           <a:xfrm>
-            <a:off x="9233154" y="2221992"/>
-            <a:ext cx="2864358" cy="146304"/>
+            <a:off x="9260586" y="3474720"/>
+            <a:ext cx="2809494" cy="237744"/>
           </a:xfrm>
           <a:prstGeom prst="rect">
             <a:avLst/>
@@ -8542,20 +8542,20 @@
           <a:lstStyle/>
           <a:p>
             <a:r>
-              <a:rPr sz="750" b="1">
+              <a:rPr sz="1700" b="1">
                 <a:solidFill>
                   <a:srgbClr val="555555"/>
                 </a:solidFill>
-                <a:latin typeface="Calibri"/>
+                <a:latin typeface="Fira Sans"/>
               </a:rPr>
               <a:t>● </a:t>
             </a:r>
             <a:r>
-              <a:rPr sz="750" b="1">
+              <a:rPr sz="1700" b="1">
                 <a:solidFill>
                   <a:srgbClr val="555555"/>
                 </a:solidFill>
-                <a:latin typeface="Calibri"/>
+                <a:latin typeface="Fira Sans"/>
               </a:rPr>
               <a:t>PLANNED</a:t>
             </a:r>
@@ -8570,8 +8570,8 @@
         </p:nvSpPr>
         <p:spPr>
           <a:xfrm>
-            <a:off x="9361170" y="2368296"/>
-            <a:ext cx="2736341" cy="150875"/>
+            <a:off x="9425178" y="3712464"/>
+            <a:ext cx="2644901" cy="256031"/>
           </a:xfrm>
           <a:prstGeom prst="rect">
             <a:avLst/>
@@ -8585,11 +8585,11 @@
           <a:lstStyle/>
           <a:p>
             <a:r>
-              <a:rPr sz="750" b="0">
+              <a:rPr sz="1700" b="0">
                 <a:solidFill>
                   <a:srgbClr val="3D3D3D"/>
                 </a:solidFill>
-                <a:latin typeface="Calibri"/>
+                <a:latin typeface="Fira Sans"/>
               </a:rPr>
               <a:t>Demo application Config ID-based SDK launch support</a:t>
             </a:r>
@@ -8604,8 +8604,8 @@
         </p:nvSpPr>
         <p:spPr>
           <a:xfrm>
-            <a:off x="9361170" y="2500884"/>
-            <a:ext cx="2736341" cy="150875"/>
+            <a:off x="9425178" y="3931920"/>
+            <a:ext cx="2644901" cy="402336"/>
           </a:xfrm>
           <a:prstGeom prst="rect">
             <a:avLst/>
@@ -8619,11 +8619,11 @@
           <a:lstStyle/>
           <a:p>
             <a:r>
-              <a:rPr sz="750" b="0">
+              <a:rPr sz="1700" b="0">
                 <a:solidFill>
                   <a:srgbClr val="3D3D3D"/>
                 </a:solidFill>
-                <a:latin typeface="Calibri"/>
+                <a:latin typeface="Fira Sans"/>
               </a:rPr>
               <a:t>Weight range updates for Puppy &amp; Kitten Weight Check tools</a:t>
             </a:r>
